--- a/dms-workshop/AI-Powered-Product-Development_DMS.pptx
+++ b/dms-workshop/AI-Powered-Product-Development_DMS.pptx
@@ -18,19 +18,19 @@
     <p:sldId id="266" r:id="rId17"/>
     <p:sldId id="267" r:id="rId18"/>
     <p:sldId id="268" r:id="rId19"/>
-    <p:sldId id="269" r:id="rId20"/>
-    <p:sldId id="270" r:id="rId21"/>
-    <p:sldId id="271" r:id="rId22"/>
-    <p:sldId id="272" r:id="rId23"/>
-    <p:sldId id="273" r:id="rId24"/>
-    <p:sldId id="274" r:id="rId25"/>
-    <p:sldId id="275" r:id="rId26"/>
-    <p:sldId id="276" r:id="rId27"/>
-    <p:sldId id="277" r:id="rId28"/>
-    <p:sldId id="278" r:id="rId29"/>
-    <p:sldId id="279" r:id="rId30"/>
-    <p:sldId id="280" r:id="rId31"/>
-    <p:sldId id="281" r:id="rId32"/>
+    <p:sldId id="269" r:id="rId21"/>
+    <p:sldId id="270" r:id="rId22"/>
+    <p:sldId id="271" r:id="rId23"/>
+    <p:sldId id="272" r:id="rId24"/>
+    <p:sldId id="273" r:id="rId25"/>
+    <p:sldId id="274" r:id="rId26"/>
+    <p:sldId id="275" r:id="rId27"/>
+    <p:sldId id="276" r:id="rId28"/>
+    <p:sldId id="277" r:id="rId29"/>
+    <p:sldId id="278" r:id="rId30"/>
+    <p:sldId id="279" r:id="rId31"/>
+    <p:sldId id="280" r:id="rId32"/>
+    <p:sldId id="281" r:id="rId33"/>
   </p:sldIdLst>
   <p:sldSz cx="12191695" cy="6858000" type="screen4x3"/>
   <p:notesSz cx="6858000" cy="9144000"/>
@@ -130,6 +130,1093 @@
     </a:lvl9pPr>
   </p:defaultTextStyle>
 </p:presentation>
+</file>
+
+<file path=ppt/notesMasters/notesMaster1.xml><?xml version="1.0" encoding="utf-8"?>
+<p:notesMaster xmlns:a="http://schemas.openxmlformats.org/drawingml/2006/main" xmlns:p="http://schemas.openxmlformats.org/presentationml/2006/main" xmlns:r="http://schemas.openxmlformats.org/officeDocument/2006/relationships">
+  <p:cSld>
+    <p:bg>
+      <p:bgRef idx="1001">
+        <a:schemeClr val="bg1"/>
+      </p:bgRef>
+    </p:bg>
+    <p:spTree>
+      <p:nvGrpSpPr>
+        <p:cNvPr id="1" name=""/>
+        <p:cNvGrpSpPr/>
+        <p:nvPr/>
+      </p:nvGrpSpPr>
+      <p:grpSpPr>
+        <a:xfrm>
+          <a:off x="0" y="0"/>
+          <a:ext cx="0" cy="0"/>
+          <a:chOff x="0" y="0"/>
+          <a:chExt cx="0" cy="0"/>
+        </a:xfrm>
+      </p:grpSpPr>
+      <p:sp>
+        <p:nvSpPr>
+          <p:cNvPr id="2" name="Header Placeholder 1"/>
+          <p:cNvSpPr>
+            <a:spLocks noGrp="1"/>
+          </p:cNvSpPr>
+          <p:nvPr>
+            <p:ph type="hdr" sz="quarter"/>
+          </p:nvPr>
+        </p:nvSpPr>
+        <p:spPr>
+          <a:xfrm>
+            <a:off x="0" y="0"/>
+            <a:ext cx="2971800" cy="457200"/>
+          </a:xfrm>
+          <a:prstGeom prst="rect">
+            <a:avLst/>
+          </a:prstGeom>
+        </p:spPr>
+        <p:txBody>
+          <a:bodyPr vert="horz" lIns="91440" tIns="45720" rIns="91440" bIns="45720" rtlCol="0"/>
+          <a:lstStyle>
+            <a:lvl1pPr algn="l">
+              <a:defRPr sz="1200"/>
+            </a:lvl1pPr>
+          </a:lstStyle>
+          <a:p>
+            <a:endParaRPr lang="en-US"/>
+          </a:p>
+        </p:txBody>
+      </p:sp>
+      <p:sp>
+        <p:nvSpPr>
+          <p:cNvPr id="3" name="Date Placeholder 2"/>
+          <p:cNvSpPr>
+            <a:spLocks noGrp="1"/>
+          </p:cNvSpPr>
+          <p:nvPr>
+            <p:ph type="dt" idx="1"/>
+          </p:nvPr>
+        </p:nvSpPr>
+        <p:spPr>
+          <a:xfrm>
+            <a:off x="3884613" y="0"/>
+            <a:ext cx="2971800" cy="457200"/>
+          </a:xfrm>
+          <a:prstGeom prst="rect">
+            <a:avLst/>
+          </a:prstGeom>
+        </p:spPr>
+        <p:txBody>
+          <a:bodyPr vert="horz" lIns="91440" tIns="45720" rIns="91440" bIns="45720" rtlCol="0"/>
+          <a:lstStyle>
+            <a:lvl1pPr algn="r">
+              <a:defRPr sz="1200"/>
+            </a:lvl1pPr>
+          </a:lstStyle>
+          <a:p>
+            <a:fld id="{0F89C1C7-3DCD-1040-A9CF-14679D8B5DDD}" type="datetimeFigureOut">
+              <a:rPr lang="en-US" smtClean="0"/>
+              <a:t>10/17/16</a:t>
+            </a:fld>
+            <a:endParaRPr lang="en-US"/>
+          </a:p>
+        </p:txBody>
+      </p:sp>
+      <p:sp>
+        <p:nvSpPr>
+          <p:cNvPr id="4" name="Slide Image Placeholder 3"/>
+          <p:cNvSpPr>
+            <a:spLocks noGrp="1" noRot="1" noChangeAspect="1"/>
+          </p:cNvSpPr>
+          <p:nvPr>
+            <p:ph type="sldImg" idx="2"/>
+          </p:nvPr>
+        </p:nvSpPr>
+        <p:spPr>
+          <a:xfrm>
+            <a:off x="1143000" y="685800"/>
+            <a:ext cx="4572000" cy="3429000"/>
+          </a:xfrm>
+          <a:prstGeom prst="rect">
+            <a:avLst/>
+          </a:prstGeom>
+          <a:noFill/>
+          <a:ln w="12700">
+            <a:solidFill>
+              <a:prstClr val="black"/>
+            </a:solidFill>
+          </a:ln>
+        </p:spPr>
+        <p:txBody>
+          <a:bodyPr vert="horz" lIns="91440" tIns="45720" rIns="91440" bIns="45720" rtlCol="0" anchor="ctr"/>
+          <a:lstStyle/>
+          <a:p>
+            <a:endParaRPr lang="en-US"/>
+          </a:p>
+        </p:txBody>
+      </p:sp>
+      <p:sp>
+        <p:nvSpPr>
+          <p:cNvPr id="5" name="Notes Placeholder 4"/>
+          <p:cNvSpPr>
+            <a:spLocks noGrp="1"/>
+          </p:cNvSpPr>
+          <p:nvPr>
+            <p:ph type="body" sz="quarter" idx="3"/>
+          </p:nvPr>
+        </p:nvSpPr>
+        <p:spPr>
+          <a:xfrm>
+            <a:off x="685800" y="4343400"/>
+            <a:ext cx="5486400" cy="4114800"/>
+          </a:xfrm>
+          <a:prstGeom prst="rect">
+            <a:avLst/>
+          </a:prstGeom>
+        </p:spPr>
+        <p:txBody>
+          <a:bodyPr vert="horz" lIns="91440" tIns="45720" rIns="91440" bIns="45720" rtlCol="0"/>
+          <a:lstStyle/>
+          <a:p>
+            <a:pPr lvl="0"/>
+            <a:r>
+              <a:rPr lang="en-US" smtClean="0"/>
+              <a:t>Click to edit Master text styles</a:t>
+            </a:r>
+          </a:p>
+          <a:p>
+            <a:pPr lvl="1"/>
+            <a:r>
+              <a:rPr lang="en-US" smtClean="0"/>
+              <a:t>Second level</a:t>
+            </a:r>
+          </a:p>
+          <a:p>
+            <a:pPr lvl="2"/>
+            <a:r>
+              <a:rPr lang="en-US" smtClean="0"/>
+              <a:t>Third level</a:t>
+            </a:r>
+          </a:p>
+          <a:p>
+            <a:pPr lvl="3"/>
+            <a:r>
+              <a:rPr lang="en-US" smtClean="0"/>
+              <a:t>Fourth level</a:t>
+            </a:r>
+          </a:p>
+          <a:p>
+            <a:pPr lvl="4"/>
+            <a:r>
+              <a:rPr lang="en-US" smtClean="0"/>
+              <a:t>Fifth level</a:t>
+            </a:r>
+            <a:endParaRPr lang="en-US"/>
+          </a:p>
+        </p:txBody>
+      </p:sp>
+      <p:sp>
+        <p:nvSpPr>
+          <p:cNvPr id="6" name="Footer Placeholder 5"/>
+          <p:cNvSpPr>
+            <a:spLocks noGrp="1"/>
+          </p:cNvSpPr>
+          <p:nvPr>
+            <p:ph type="ftr" sz="quarter" idx="4"/>
+          </p:nvPr>
+        </p:nvSpPr>
+        <p:spPr>
+          <a:xfrm>
+            <a:off x="0" y="8685213"/>
+            <a:ext cx="2971800" cy="457200"/>
+          </a:xfrm>
+          <a:prstGeom prst="rect">
+            <a:avLst/>
+          </a:prstGeom>
+        </p:spPr>
+        <p:txBody>
+          <a:bodyPr vert="horz" lIns="91440" tIns="45720" rIns="91440" bIns="45720" rtlCol="0" anchor="b"/>
+          <a:lstStyle>
+            <a:lvl1pPr algn="l">
+              <a:defRPr sz="1200"/>
+            </a:lvl1pPr>
+          </a:lstStyle>
+          <a:p>
+            <a:endParaRPr lang="en-US"/>
+          </a:p>
+        </p:txBody>
+      </p:sp>
+      <p:sp>
+        <p:nvSpPr>
+          <p:cNvPr id="7" name="Slide Number Placeholder 6"/>
+          <p:cNvSpPr>
+            <a:spLocks noGrp="1"/>
+          </p:cNvSpPr>
+          <p:nvPr>
+            <p:ph type="sldNum" sz="quarter" idx="5"/>
+          </p:nvPr>
+        </p:nvSpPr>
+        <p:spPr>
+          <a:xfrm>
+            <a:off x="3884613" y="8685213"/>
+            <a:ext cx="2971800" cy="457200"/>
+          </a:xfrm>
+          <a:prstGeom prst="rect">
+            <a:avLst/>
+          </a:prstGeom>
+        </p:spPr>
+        <p:txBody>
+          <a:bodyPr vert="horz" lIns="91440" tIns="45720" rIns="91440" bIns="45720" rtlCol="0" anchor="b"/>
+          <a:lstStyle>
+            <a:lvl1pPr algn="r">
+              <a:defRPr sz="1200"/>
+            </a:lvl1pPr>
+          </a:lstStyle>
+          <a:p>
+            <a:fld id="{BB5E49A5-4136-284D-997B-48E1D791AD67}" type="slidenum">
+              <a:rPr lang="en-US" smtClean="0"/>
+              <a:t>‹#›</a:t>
+            </a:fld>
+            <a:endParaRPr lang="en-US"/>
+          </a:p>
+        </p:txBody>
+      </p:sp>
+    </p:spTree>
+    <p:extLst>
+      <p:ext uri="{BB962C8B-B14F-4D97-AF65-F5344CB8AC3E}">
+        <p14:creationId xmlns:p14="http://schemas.microsoft.com/office/powerpoint/2010/main" val="2623252185"/>
+      </p:ext>
+    </p:extLst>
+  </p:cSld>
+  <p:clrMap bg1="lt1" tx1="dk1" bg2="lt2" tx2="dk2" accent1="accent1" accent2="accent2" accent3="accent3" accent4="accent4" accent5="accent5" accent6="accent6" hlink="hlink" folHlink="folHlink"/>
+  <p:notesStyle>
+    <a:lvl1pPr marL="0" algn="l" defTabSz="457200" rtl="0" eaLnBrk="1" latinLnBrk="0" hangingPunct="1">
+      <a:defRPr sz="1200" kern="1200">
+        <a:solidFill>
+          <a:schemeClr val="tx1"/>
+        </a:solidFill>
+        <a:latin typeface="+mn-lt"/>
+        <a:ea typeface="+mn-ea"/>
+        <a:cs typeface="+mn-cs"/>
+      </a:defRPr>
+    </a:lvl1pPr>
+    <a:lvl2pPr marL="457200" algn="l" defTabSz="457200" rtl="0" eaLnBrk="1" latinLnBrk="0" hangingPunct="1">
+      <a:defRPr sz="1200" kern="1200">
+        <a:solidFill>
+          <a:schemeClr val="tx1"/>
+        </a:solidFill>
+        <a:latin typeface="+mn-lt"/>
+        <a:ea typeface="+mn-ea"/>
+        <a:cs typeface="+mn-cs"/>
+      </a:defRPr>
+    </a:lvl2pPr>
+    <a:lvl3pPr marL="914400" algn="l" defTabSz="457200" rtl="0" eaLnBrk="1" latinLnBrk="0" hangingPunct="1">
+      <a:defRPr sz="1200" kern="1200">
+        <a:solidFill>
+          <a:schemeClr val="tx1"/>
+        </a:solidFill>
+        <a:latin typeface="+mn-lt"/>
+        <a:ea typeface="+mn-ea"/>
+        <a:cs typeface="+mn-cs"/>
+      </a:defRPr>
+    </a:lvl3pPr>
+    <a:lvl4pPr marL="1371600" algn="l" defTabSz="457200" rtl="0" eaLnBrk="1" latinLnBrk="0" hangingPunct="1">
+      <a:defRPr sz="1200" kern="1200">
+        <a:solidFill>
+          <a:schemeClr val="tx1"/>
+        </a:solidFill>
+        <a:latin typeface="+mn-lt"/>
+        <a:ea typeface="+mn-ea"/>
+        <a:cs typeface="+mn-cs"/>
+      </a:defRPr>
+    </a:lvl4pPr>
+    <a:lvl5pPr marL="1828800" algn="l" defTabSz="457200" rtl="0" eaLnBrk="1" latinLnBrk="0" hangingPunct="1">
+      <a:defRPr sz="1200" kern="1200">
+        <a:solidFill>
+          <a:schemeClr val="tx1"/>
+        </a:solidFill>
+        <a:latin typeface="+mn-lt"/>
+        <a:ea typeface="+mn-ea"/>
+        <a:cs typeface="+mn-cs"/>
+      </a:defRPr>
+    </a:lvl5pPr>
+    <a:lvl6pPr marL="2286000" algn="l" defTabSz="457200" rtl="0" eaLnBrk="1" latinLnBrk="0" hangingPunct="1">
+      <a:defRPr sz="1200" kern="1200">
+        <a:solidFill>
+          <a:schemeClr val="tx1"/>
+        </a:solidFill>
+        <a:latin typeface="+mn-lt"/>
+        <a:ea typeface="+mn-ea"/>
+        <a:cs typeface="+mn-cs"/>
+      </a:defRPr>
+    </a:lvl6pPr>
+    <a:lvl7pPr marL="2743200" algn="l" defTabSz="457200" rtl="0" eaLnBrk="1" latinLnBrk="0" hangingPunct="1">
+      <a:defRPr sz="1200" kern="1200">
+        <a:solidFill>
+          <a:schemeClr val="tx1"/>
+        </a:solidFill>
+        <a:latin typeface="+mn-lt"/>
+        <a:ea typeface="+mn-ea"/>
+        <a:cs typeface="+mn-cs"/>
+      </a:defRPr>
+    </a:lvl7pPr>
+    <a:lvl8pPr marL="3200400" algn="l" defTabSz="457200" rtl="0" eaLnBrk="1" latinLnBrk="0" hangingPunct="1">
+      <a:defRPr sz="1200" kern="1200">
+        <a:solidFill>
+          <a:schemeClr val="tx1"/>
+        </a:solidFill>
+        <a:latin typeface="+mn-lt"/>
+        <a:ea typeface="+mn-ea"/>
+        <a:cs typeface="+mn-cs"/>
+      </a:defRPr>
+    </a:lvl8pPr>
+    <a:lvl9pPr marL="3657600" algn="l" defTabSz="457200" rtl="0" eaLnBrk="1" latinLnBrk="0" hangingPunct="1">
+      <a:defRPr sz="1200" kern="1200">
+        <a:solidFill>
+          <a:schemeClr val="tx1"/>
+        </a:solidFill>
+        <a:latin typeface="+mn-lt"/>
+        <a:ea typeface="+mn-ea"/>
+        <a:cs typeface="+mn-cs"/>
+      </a:defRPr>
+    </a:lvl9pPr>
+  </p:notesStyle>
+</p:notesMaster>
+</file>
+
+<file path=ppt/notesSlides/notesSlide1.xml><?xml version="1.0" encoding="utf-8"?>
+<p:notes xmlns:a="http://schemas.openxmlformats.org/drawingml/2006/main" xmlns:p="http://schemas.openxmlformats.org/presentationml/2006/main" xmlns:r="http://schemas.openxmlformats.org/officeDocument/2006/relationships">
+  <p:cSld>
+    <p:spTree>
+      <p:nvGrpSpPr>
+        <p:cNvPr id="1" name=""/>
+        <p:cNvGrpSpPr/>
+        <p:nvPr/>
+      </p:nvGrpSpPr>
+      <p:grpSpPr>
+        <a:xfrm>
+          <a:off x="0" y="0"/>
+          <a:ext cx="0" cy="0"/>
+          <a:chOff x="0" y="0"/>
+          <a:chExt cx="0" cy="0"/>
+        </a:xfrm>
+      </p:grpSpPr>
+      <p:sp>
+        <p:nvSpPr>
+          <p:cNvPr id="2" name="Slide Image Placeholder 1"/>
+          <p:cNvSpPr>
+            <a:spLocks noGrp="1"/>
+          </p:cNvSpPr>
+          <p:nvPr>
+            <p:ph type="sldImg" idx="2"/>
+          </p:nvPr>
+        </p:nvSpPr>
+        <p:spPr/>
+      </p:sp>
+      <p:sp>
+        <p:nvSpPr>
+          <p:cNvPr id="3" name="Notes Placeholder 2"/>
+          <p:cNvSpPr>
+            <a:spLocks noGrp="1"/>
+          </p:cNvSpPr>
+          <p:nvPr>
+            <p:ph type="body" idx="3" sz="quarter"/>
+          </p:nvPr>
+        </p:nvSpPr>
+        <p:spPr/>
+        <p:txBody>
+          <a:bodyPr/>
+          <a:lstStyle/>
+          <a:p>
+            <a:r>
+              <a:t>Before Prompt 1, prime the chat once:</a:t>
+            </a:r>
+          </a:p>
+          <a:p>
+            <a:r>
+              <a:t>"We're running a live workshop. Keep each answer concise and skimmable — bullets over prose."</a:t>
+            </a:r>
+          </a:p>
+          <a:p/>
+          <a:p>
+            <a:r>
+              <a:t>PROMPT 1 — Requirements  (paste into the AI live)</a:t>
+            </a:r>
+          </a:p>
+          <a:p/>
+          <a:p>
+            <a:r>
+              <a:t>You are a senior automotive systems engineer. We are designing a Driver Monitoring System (DMS) that detects when a driver is drowsy, distracted, or experiencing a medical emergency, and responds appropriately. Generate:</a:t>
+            </a:r>
+          </a:p>
+          <a:p>
+            <a:r>
+              <a:t>- Stakeholder needs</a:t>
+            </a:r>
+          </a:p>
+          <a:p>
+            <a:r>
+              <a:t>- Functional requirements</a:t>
+            </a:r>
+          </a:p>
+          <a:p>
+            <a:r>
+              <a:t>- Non-functional requirements (latency, accuracy, privacy)</a:t>
+            </a:r>
+          </a:p>
+          <a:p>
+            <a:r>
+              <a:t>- Constraints</a:t>
+            </a:r>
+          </a:p>
+          <a:p>
+            <a:r>
+              <a:t>- Assumptions</a:t>
+            </a:r>
+          </a:p>
+          <a:p>
+            <a:r>
+              <a:t>- Acceptance criteria</a:t>
+            </a:r>
+          </a:p>
+          <a:p>
+            <a:r>
+              <a:t>Format the output as a requirements specification.</a:t>
+            </a:r>
+          </a:p>
+          <a:p/>
+          <a:p>
+            <a:r>
+              <a:t>ASK THE ROOM: What's missing? What would you challenge?</a:t>
+            </a:r>
+          </a:p>
+        </p:txBody>
+      </p:sp>
+      <p:sp>
+        <p:nvSpPr>
+          <p:cNvPr id="4" name="Slide Number Placeholder 3"/>
+          <p:cNvSpPr>
+            <a:spLocks noGrp="1"/>
+          </p:cNvSpPr>
+          <p:nvPr>
+            <p:ph type="sldNum" idx="5" sz="quarter"/>
+          </p:nvPr>
+        </p:nvSpPr>
+        <p:spPr/>
+      </p:sp>
+    </p:spTree>
+  </p:cSld>
+  <p:clrMapOvr>
+    <a:masterClrMapping/>
+  </p:clrMapOvr>
+</p:notes>
+</file>
+
+<file path=ppt/notesSlides/notesSlide2.xml><?xml version="1.0" encoding="utf-8"?>
+<p:notes xmlns:a="http://schemas.openxmlformats.org/drawingml/2006/main" xmlns:p="http://schemas.openxmlformats.org/presentationml/2006/main" xmlns:r="http://schemas.openxmlformats.org/officeDocument/2006/relationships">
+  <p:cSld>
+    <p:spTree>
+      <p:nvGrpSpPr>
+        <p:cNvPr id="1" name=""/>
+        <p:cNvGrpSpPr/>
+        <p:nvPr/>
+      </p:nvGrpSpPr>
+      <p:grpSpPr>
+        <a:xfrm>
+          <a:off x="0" y="0"/>
+          <a:ext cx="0" cy="0"/>
+          <a:chOff x="0" y="0"/>
+          <a:chExt cx="0" cy="0"/>
+        </a:xfrm>
+      </p:grpSpPr>
+      <p:sp>
+        <p:nvSpPr>
+          <p:cNvPr id="2" name="Slide Image Placeholder 1"/>
+          <p:cNvSpPr>
+            <a:spLocks noGrp="1"/>
+          </p:cNvSpPr>
+          <p:nvPr>
+            <p:ph type="sldImg" idx="2"/>
+          </p:nvPr>
+        </p:nvSpPr>
+        <p:spPr/>
+      </p:sp>
+      <p:sp>
+        <p:nvSpPr>
+          <p:cNvPr id="3" name="Notes Placeholder 2"/>
+          <p:cNvSpPr>
+            <a:spLocks noGrp="1"/>
+          </p:cNvSpPr>
+          <p:nvPr>
+            <p:ph type="body" idx="3" sz="quarter"/>
+          </p:nvPr>
+        </p:nvSpPr>
+        <p:spPr/>
+        <p:txBody>
+          <a:bodyPr/>
+          <a:lstStyle/>
+          <a:p>
+            <a:r>
+              <a:t>PROMPT 2 — Architecture &amp; Design</a:t>
+            </a:r>
+          </a:p>
+          <a:p/>
+          <a:p>
+            <a:r>
+              <a:t>Using the approved requirements, create a concise architecture description including:</a:t>
+            </a:r>
+          </a:p>
+          <a:p>
+            <a:r>
+              <a:t>- System context diagram (described in text)</a:t>
+            </a:r>
+          </a:p>
+          <a:p>
+            <a:r>
+              <a:t>- Major components (sensors, perception/AI, decision logic, HMI, vehicle interface)</a:t>
+            </a:r>
+          </a:p>
+          <a:p>
+            <a:r>
+              <a:t>- Interfaces and data flows</a:t>
+            </a:r>
+          </a:p>
+          <a:p>
+            <a:r>
+              <a:t>- Failure modes</a:t>
+            </a:r>
+          </a:p>
+          <a:p>
+            <a:r>
+              <a:t>- Safety considerations</a:t>
+            </a:r>
+          </a:p>
+          <a:p>
+            <a:r>
+              <a:t>- Privacy and cybersecurity considerations</a:t>
+            </a:r>
+          </a:p>
+          <a:p/>
+          <a:p>
+            <a:r>
+              <a:t>ASK THE ROOM: Where could this go wrong, and how would the system stay safe?</a:t>
+            </a:r>
+          </a:p>
+        </p:txBody>
+      </p:sp>
+      <p:sp>
+        <p:nvSpPr>
+          <p:cNvPr id="4" name="Slide Number Placeholder 3"/>
+          <p:cNvSpPr>
+            <a:spLocks noGrp="1"/>
+          </p:cNvSpPr>
+          <p:nvPr>
+            <p:ph type="sldNum" idx="5" sz="quarter"/>
+          </p:nvPr>
+        </p:nvSpPr>
+        <p:spPr/>
+      </p:sp>
+    </p:spTree>
+  </p:cSld>
+  <p:clrMapOvr>
+    <a:masterClrMapping/>
+  </p:clrMapOvr>
+</p:notes>
+</file>
+
+<file path=ppt/notesSlides/notesSlide3.xml><?xml version="1.0" encoding="utf-8"?>
+<p:notes xmlns:a="http://schemas.openxmlformats.org/drawingml/2006/main" xmlns:p="http://schemas.openxmlformats.org/presentationml/2006/main" xmlns:r="http://schemas.openxmlformats.org/officeDocument/2006/relationships">
+  <p:cSld>
+    <p:spTree>
+      <p:nvGrpSpPr>
+        <p:cNvPr id="1" name=""/>
+        <p:cNvGrpSpPr/>
+        <p:nvPr/>
+      </p:nvGrpSpPr>
+      <p:grpSpPr>
+        <a:xfrm>
+          <a:off x="0" y="0"/>
+          <a:ext cx="0" cy="0"/>
+          <a:chOff x="0" y="0"/>
+          <a:chExt cx="0" cy="0"/>
+        </a:xfrm>
+      </p:grpSpPr>
+      <p:sp>
+        <p:nvSpPr>
+          <p:cNvPr id="2" name="Slide Image Placeholder 1"/>
+          <p:cNvSpPr>
+            <a:spLocks noGrp="1"/>
+          </p:cNvSpPr>
+          <p:nvPr>
+            <p:ph type="sldImg" idx="2"/>
+          </p:nvPr>
+        </p:nvSpPr>
+        <p:spPr/>
+      </p:sp>
+      <p:sp>
+        <p:nvSpPr>
+          <p:cNvPr id="3" name="Notes Placeholder 2"/>
+          <p:cNvSpPr>
+            <a:spLocks noGrp="1"/>
+          </p:cNvSpPr>
+          <p:nvPr>
+            <p:ph type="body" idx="3" sz="quarter"/>
+          </p:nvPr>
+        </p:nvSpPr>
+        <p:spPr/>
+        <p:txBody>
+          <a:bodyPr/>
+          <a:lstStyle/>
+          <a:p>
+            <a:r>
+              <a:t>PROMPT 3 — SysML v2 Text Model</a:t>
+            </a:r>
+          </a:p>
+          <a:p/>
+          <a:p>
+            <a:r>
+              <a:t>Using the architecture, generate a simple SysML v2 textual model including:</a:t>
+            </a:r>
+          </a:p>
+          <a:p>
+            <a:r>
+              <a:t>- Requirements</a:t>
+            </a:r>
+          </a:p>
+          <a:p>
+            <a:r>
+              <a:t>- Actions/functions (e.g., DetectDrowsiness, AssessConfidence, TriggerResponse)</a:t>
+            </a:r>
+          </a:p>
+          <a:p>
+            <a:r>
+              <a:t>- Interfaces/flows</a:t>
+            </a:r>
+          </a:p>
+          <a:p>
+            <a:r>
+              <a:t>- Major system elements</a:t>
+            </a:r>
+          </a:p>
+          <a:p>
+            <a:r>
+              <a:t>Focus on readability, not tool-specific correctness.</a:t>
+            </a:r>
+          </a:p>
+          <a:p/>
+          <a:p>
+            <a:r>
+              <a:t>ASK THE ROOM: This is just a structured way to write the design so a person AND a machine can read it — note how it traces back to the requirements.</a:t>
+            </a:r>
+          </a:p>
+        </p:txBody>
+      </p:sp>
+      <p:sp>
+        <p:nvSpPr>
+          <p:cNvPr id="4" name="Slide Number Placeholder 3"/>
+          <p:cNvSpPr>
+            <a:spLocks noGrp="1"/>
+          </p:cNvSpPr>
+          <p:nvPr>
+            <p:ph type="sldNum" idx="5" sz="quarter"/>
+          </p:nvPr>
+        </p:nvSpPr>
+        <p:spPr/>
+      </p:sp>
+    </p:spTree>
+  </p:cSld>
+  <p:clrMapOvr>
+    <a:masterClrMapping/>
+  </p:clrMapOvr>
+</p:notes>
+</file>
+
+<file path=ppt/notesSlides/notesSlide4.xml><?xml version="1.0" encoding="utf-8"?>
+<p:notes xmlns:a="http://schemas.openxmlformats.org/drawingml/2006/main" xmlns:p="http://schemas.openxmlformats.org/presentationml/2006/main" xmlns:r="http://schemas.openxmlformats.org/officeDocument/2006/relationships">
+  <p:cSld>
+    <p:spTree>
+      <p:nvGrpSpPr>
+        <p:cNvPr id="1" name=""/>
+        <p:cNvGrpSpPr/>
+        <p:nvPr/>
+      </p:nvGrpSpPr>
+      <p:grpSpPr>
+        <a:xfrm>
+          <a:off x="0" y="0"/>
+          <a:ext cx="0" cy="0"/>
+          <a:chOff x="0" y="0"/>
+          <a:chExt cx="0" cy="0"/>
+        </a:xfrm>
+      </p:grpSpPr>
+      <p:sp>
+        <p:nvSpPr>
+          <p:cNvPr id="2" name="Slide Image Placeholder 1"/>
+          <p:cNvSpPr>
+            <a:spLocks noGrp="1"/>
+          </p:cNvSpPr>
+          <p:nvPr>
+            <p:ph type="sldImg" idx="2"/>
+          </p:nvPr>
+        </p:nvSpPr>
+        <p:spPr/>
+      </p:sp>
+      <p:sp>
+        <p:nvSpPr>
+          <p:cNvPr id="3" name="Notes Placeholder 2"/>
+          <p:cNvSpPr>
+            <a:spLocks noGrp="1"/>
+          </p:cNvSpPr>
+          <p:nvPr>
+            <p:ph type="body" idx="3" sz="quarter"/>
+          </p:nvPr>
+        </p:nvSpPr>
+        <p:spPr/>
+        <p:txBody>
+          <a:bodyPr/>
+          <a:lstStyle/>
+          <a:p>
+            <a:r>
+              <a:t>PROMPT 4 — Test Development</a:t>
+            </a:r>
+          </a:p>
+          <a:p/>
+          <a:p>
+            <a:r>
+              <a:t>Create:</a:t>
+            </a:r>
+          </a:p>
+          <a:p>
+            <a:r>
+              <a:t>- Verification strategy</a:t>
+            </a:r>
+          </a:p>
+          <a:p>
+            <a:r>
+              <a:t>- Functional test cases</a:t>
+            </a:r>
+          </a:p>
+          <a:p>
+            <a:r>
+              <a:t>- Edge case test cases (sunglasses, darkness, head turned, passenger interference)</a:t>
+            </a:r>
+          </a:p>
+          <a:p>
+            <a:r>
+              <a:t>- Negative test cases (false-positive drowsiness)</a:t>
+            </a:r>
+          </a:p>
+          <a:p>
+            <a:r>
+              <a:t>- A requirements-to-test traceability matrix</a:t>
+            </a:r>
+          </a:p>
+          <a:p>
+            <a:r>
+              <a:t>Include objective pass/fail criteria.</a:t>
+            </a:r>
+          </a:p>
+          <a:p/>
+          <a:p>
+            <a:r>
+              <a:t>ASK THE ROOM: Which of these tests would you most want to see pass before shipping?</a:t>
+            </a:r>
+          </a:p>
+        </p:txBody>
+      </p:sp>
+      <p:sp>
+        <p:nvSpPr>
+          <p:cNvPr id="4" name="Slide Number Placeholder 3"/>
+          <p:cNvSpPr>
+            <a:spLocks noGrp="1"/>
+          </p:cNvSpPr>
+          <p:nvPr>
+            <p:ph type="sldNum" idx="5" sz="quarter"/>
+          </p:nvPr>
+        </p:nvSpPr>
+        <p:spPr/>
+      </p:sp>
+    </p:spTree>
+  </p:cSld>
+  <p:clrMapOvr>
+    <a:masterClrMapping/>
+  </p:clrMapOvr>
+</p:notes>
+</file>
+
+<file path=ppt/notesSlides/notesSlide5.xml><?xml version="1.0" encoding="utf-8"?>
+<p:notes xmlns:a="http://schemas.openxmlformats.org/drawingml/2006/main" xmlns:p="http://schemas.openxmlformats.org/presentationml/2006/main" xmlns:r="http://schemas.openxmlformats.org/officeDocument/2006/relationships">
+  <p:cSld>
+    <p:spTree>
+      <p:nvGrpSpPr>
+        <p:cNvPr id="1" name=""/>
+        <p:cNvGrpSpPr/>
+        <p:nvPr/>
+      </p:nvGrpSpPr>
+      <p:grpSpPr>
+        <a:xfrm>
+          <a:off x="0" y="0"/>
+          <a:ext cx="0" cy="0"/>
+          <a:chOff x="0" y="0"/>
+          <a:chExt cx="0" cy="0"/>
+        </a:xfrm>
+      </p:grpSpPr>
+      <p:sp>
+        <p:nvSpPr>
+          <p:cNvPr id="2" name="Slide Image Placeholder 1"/>
+          <p:cNvSpPr>
+            <a:spLocks noGrp="1"/>
+          </p:cNvSpPr>
+          <p:nvPr>
+            <p:ph type="sldImg" idx="2"/>
+          </p:nvPr>
+        </p:nvSpPr>
+        <p:spPr/>
+      </p:sp>
+      <p:sp>
+        <p:nvSpPr>
+          <p:cNvPr id="3" name="Notes Placeholder 2"/>
+          <p:cNvSpPr>
+            <a:spLocks noGrp="1"/>
+          </p:cNvSpPr>
+          <p:nvPr>
+            <p:ph type="body" idx="3" sz="quarter"/>
+          </p:nvPr>
+        </p:nvSpPr>
+        <p:spPr/>
+        <p:txBody>
+          <a:bodyPr/>
+          <a:lstStyle/>
+          <a:p>
+            <a:r>
+              <a:t>PROMPT 5 — Implementation Approach</a:t>
+            </a:r>
+          </a:p>
+          <a:p/>
+          <a:p>
+            <a:r>
+              <a:t>Generate:</a:t>
+            </a:r>
+          </a:p>
+          <a:p>
+            <a:r>
+              <a:t>- High-level implementation approach</a:t>
+            </a:r>
+          </a:p>
+          <a:p>
+            <a:r>
+              <a:t>- Pseudocode for the detect-assess-respond loop</a:t>
+            </a:r>
+          </a:p>
+          <a:p>
+            <a:r>
+              <a:t>- Logic flow</a:t>
+            </a:r>
+          </a:p>
+          <a:p>
+            <a:r>
+              <a:t>- Data processing steps</a:t>
+            </a:r>
+          </a:p>
+          <a:p>
+            <a:r>
+              <a:t>- Assumptions</a:t>
+            </a:r>
+          </a:p>
+          <a:p>
+            <a:r>
+              <a:t>Explain how the solution satisfies the requirements.</a:t>
+            </a:r>
+          </a:p>
+          <a:p/>
+          <a:p>
+            <a:r>
+              <a:t>ASK: Notice we went from idea to logic with no separate dev-team handoff.</a:t>
+            </a:r>
+          </a:p>
+          <a:p/>
+          <a:p>
+            <a:r>
+              <a:t>----------</a:t>
+            </a:r>
+          </a:p>
+          <a:p/>
+          <a:p>
+            <a:r>
+              <a:t>PROMPT 6 — Verification Review</a:t>
+            </a:r>
+          </a:p>
+          <a:p/>
+          <a:p>
+            <a:r>
+              <a:t>Review the proposed implementation. Identify:</a:t>
+            </a:r>
+          </a:p>
+          <a:p>
+            <a:r>
+              <a:t>- Which requirements are satisfied</a:t>
+            </a:r>
+          </a:p>
+          <a:p>
+            <a:r>
+              <a:t>- Which tests would pass</a:t>
+            </a:r>
+          </a:p>
+          <a:p>
+            <a:r>
+              <a:t>- Potential defects</a:t>
+            </a:r>
+          </a:p>
+          <a:p>
+            <a:r>
+              <a:t>- Risks (false alarms and missed detections)</a:t>
+            </a:r>
+          </a:p>
+          <a:p>
+            <a:r>
+              <a:t>- Recommended improvements</a:t>
+            </a:r>
+          </a:p>
+          <a:p>
+            <a:r>
+              <a:t>Provide a pass/fail assessment.</a:t>
+            </a:r>
+          </a:p>
+          <a:p/>
+          <a:p>
+            <a:r>
+              <a:t>ASK THE ROOM: Where does human expertise still have to make the final call?</a:t>
+            </a:r>
+          </a:p>
+        </p:txBody>
+      </p:sp>
+      <p:sp>
+        <p:nvSpPr>
+          <p:cNvPr id="4" name="Slide Number Placeholder 3"/>
+          <p:cNvSpPr>
+            <a:spLocks noGrp="1"/>
+          </p:cNvSpPr>
+          <p:nvPr>
+            <p:ph type="sldNum" idx="5" sz="quarter"/>
+          </p:nvPr>
+        </p:nvSpPr>
+        <p:spPr/>
+      </p:sp>
+    </p:spTree>
+  </p:cSld>
+  <p:clrMapOvr>
+    <a:masterClrMapping/>
+  </p:clrMapOvr>
+</p:notes>
+</file>
+
+<file path=ppt/notesSlides/notesSlide6.xml><?xml version="1.0" encoding="utf-8"?>
+<p:notes xmlns:a="http://schemas.openxmlformats.org/drawingml/2006/main" xmlns:p="http://schemas.openxmlformats.org/presentationml/2006/main" xmlns:r="http://schemas.openxmlformats.org/officeDocument/2006/relationships">
+  <p:cSld>
+    <p:spTree>
+      <p:nvGrpSpPr>
+        <p:cNvPr id="1" name=""/>
+        <p:cNvGrpSpPr/>
+        <p:nvPr/>
+      </p:nvGrpSpPr>
+      <p:grpSpPr>
+        <a:xfrm>
+          <a:off x="0" y="0"/>
+          <a:ext cx="0" cy="0"/>
+          <a:chOff x="0" y="0"/>
+          <a:chExt cx="0" cy="0"/>
+        </a:xfrm>
+      </p:grpSpPr>
+      <p:sp>
+        <p:nvSpPr>
+          <p:cNvPr id="2" name="Slide Image Placeholder 1"/>
+          <p:cNvSpPr>
+            <a:spLocks noGrp="1"/>
+          </p:cNvSpPr>
+          <p:nvPr>
+            <p:ph type="sldImg" idx="2"/>
+          </p:nvPr>
+        </p:nvSpPr>
+        <p:spPr/>
+      </p:sp>
+      <p:sp>
+        <p:nvSpPr>
+          <p:cNvPr id="3" name="Notes Placeholder 2"/>
+          <p:cNvSpPr>
+            <a:spLocks noGrp="1"/>
+          </p:cNvSpPr>
+          <p:nvPr>
+            <p:ph type="body" idx="3" sz="quarter"/>
+          </p:nvPr>
+        </p:nvSpPr>
+        <p:spPr/>
+        <p:txBody>
+          <a:bodyPr/>
+          <a:lstStyle/>
+          <a:p>
+            <a:r>
+              <a:t>PROMPT 7 — Deployment Planning</a:t>
+            </a:r>
+          </a:p>
+          <a:p/>
+          <a:p>
+            <a:r>
+              <a:t>Create:</a:t>
+            </a:r>
+          </a:p>
+          <a:p>
+            <a:r>
+              <a:t>- OTA deployment plan</a:t>
+            </a:r>
+          </a:p>
+          <a:p>
+            <a:r>
+              <a:t>- Rollback strategy</a:t>
+            </a:r>
+          </a:p>
+          <a:p>
+            <a:r>
+              <a:t>- Monitoring metrics (detection accuracy, false-alarm rate, driver trust signals)</a:t>
+            </a:r>
+          </a:p>
+          <a:p>
+            <a:r>
+              <a:t>- Release notes</a:t>
+            </a:r>
+          </a:p>
+          <a:p>
+            <a:r>
+              <a:t>- Customer impact assessment</a:t>
+            </a:r>
+          </a:p>
+          <a:p>
+            <a:r>
+              <a:t>- Success criteria after deployment</a:t>
+            </a:r>
+          </a:p>
+          <a:p/>
+          <a:p>
+            <a:r>
+              <a:t>ASK THE ROOM: We just reached a deployment plan. How many teams would this normally take?</a:t>
+            </a:r>
+          </a:p>
+        </p:txBody>
+      </p:sp>
+      <p:sp>
+        <p:nvSpPr>
+          <p:cNvPr id="4" name="Slide Number Placeholder 3"/>
+          <p:cNvSpPr>
+            <a:spLocks noGrp="1"/>
+          </p:cNvSpPr>
+          <p:nvPr>
+            <p:ph type="sldNum" idx="5" sz="quarter"/>
+          </p:nvPr>
+        </p:nvSpPr>
+        <p:spPr/>
+      </p:sp>
+    </p:spTree>
+  </p:cSld>
+  <p:clrMapOvr>
+    <a:masterClrMapping/>
+  </p:clrMapOvr>
+</p:notes>
 </file>
 
 <file path=ppt/slideLayouts/slideLayout1.xml><?xml version="1.0" encoding="utf-8"?>
@@ -16064,4 +17151,324 @@
   </a:objectDefaults>
   <a:extraClrSchemeLst/>
 </a:theme>
+</file>
+
+<file path=ppt/theme/theme2.xml><?xml version="1.0" encoding="utf-8"?>
+<a:theme xmlns:a="http://schemas.openxmlformats.org/drawingml/2006/main" name="Office Theme">
+  <a:themeElements>
+    <a:clrScheme name="Office">
+      <a:dk1>
+        <a:sysClr val="windowText" lastClr="000000"/>
+      </a:dk1>
+      <a:lt1>
+        <a:sysClr val="window" lastClr="FFFFFF"/>
+      </a:lt1>
+      <a:dk2>
+        <a:srgbClr val="1F497D"/>
+      </a:dk2>
+      <a:lt2>
+        <a:srgbClr val="EEECE1"/>
+      </a:lt2>
+      <a:accent1>
+        <a:srgbClr val="4F81BD"/>
+      </a:accent1>
+      <a:accent2>
+        <a:srgbClr val="C0504D"/>
+      </a:accent2>
+      <a:accent3>
+        <a:srgbClr val="9BBB59"/>
+      </a:accent3>
+      <a:accent4>
+        <a:srgbClr val="8064A2"/>
+      </a:accent4>
+      <a:accent5>
+        <a:srgbClr val="4BACC6"/>
+      </a:accent5>
+      <a:accent6>
+        <a:srgbClr val="F79646"/>
+      </a:accent6>
+      <a:hlink>
+        <a:srgbClr val="0000FF"/>
+      </a:hlink>
+      <a:folHlink>
+        <a:srgbClr val="800080"/>
+      </a:folHlink>
+    </a:clrScheme>
+    <a:fontScheme name="Office">
+      <a:majorFont>
+        <a:latin typeface="Calibri"/>
+        <a:ea typeface=""/>
+        <a:cs typeface=""/>
+        <a:font script="Jpan" typeface="ＭＳ Ｐゴシック"/>
+        <a:font script="Hang" typeface="맑은 고딕"/>
+        <a:font script="Hans" typeface="宋体"/>
+        <a:font script="Hant" typeface="新細明體"/>
+        <a:font script="Arab" typeface="Times New Roman"/>
+        <a:font script="Hebr" typeface="Times New Roman"/>
+        <a:font script="Thai" typeface="Angsana New"/>
+        <a:font script="Ethi" typeface="Nyala"/>
+        <a:font script="Beng" typeface="Vrinda"/>
+        <a:font script="Gujr" typeface="Shruti"/>
+        <a:font script="Khmr" typeface="MoolBoran"/>
+        <a:font script="Knda" typeface="Tunga"/>
+        <a:font script="Guru" typeface="Raavi"/>
+        <a:font script="Cans" typeface="Euphemia"/>
+        <a:font script="Cher" typeface="Plantagenet Cherokee"/>
+        <a:font script="Yiii" typeface="Microsoft Yi Baiti"/>
+        <a:font script="Tibt" typeface="Microsoft Himalaya"/>
+        <a:font script="Thaa" typeface="MV Boli"/>
+        <a:font script="Deva" typeface="Mangal"/>
+        <a:font script="Telu" typeface="Gautami"/>
+        <a:font script="Taml" typeface="Latha"/>
+        <a:font script="Syrc" typeface="Estrangelo Edessa"/>
+        <a:font script="Orya" typeface="Kalinga"/>
+        <a:font script="Mlym" typeface="Kartika"/>
+        <a:font script="Laoo" typeface="DokChampa"/>
+        <a:font script="Sinh" typeface="Iskoola Pota"/>
+        <a:font script="Mong" typeface="Mongolian Baiti"/>
+        <a:font script="Viet" typeface="Times New Roman"/>
+        <a:font script="Uigh" typeface="Microsoft Uighur"/>
+        <a:font script="Geor" typeface="Sylfaen"/>
+      </a:majorFont>
+      <a:minorFont>
+        <a:latin typeface="Calibri"/>
+        <a:ea typeface=""/>
+        <a:cs typeface=""/>
+        <a:font script="Jpan" typeface="ＭＳ Ｐゴシック"/>
+        <a:font script="Hang" typeface="맑은 고딕"/>
+        <a:font script="Hans" typeface="宋体"/>
+        <a:font script="Hant" typeface="新細明體"/>
+        <a:font script="Arab" typeface="Arial"/>
+        <a:font script="Hebr" typeface="Arial"/>
+        <a:font script="Thai" typeface="Cordia New"/>
+        <a:font script="Ethi" typeface="Nyala"/>
+        <a:font script="Beng" typeface="Vrinda"/>
+        <a:font script="Gujr" typeface="Shruti"/>
+        <a:font script="Khmr" typeface="DaunPenh"/>
+        <a:font script="Knda" typeface="Tunga"/>
+        <a:font script="Guru" typeface="Raavi"/>
+        <a:font script="Cans" typeface="Euphemia"/>
+        <a:font script="Cher" typeface="Plantagenet Cherokee"/>
+        <a:font script="Yiii" typeface="Microsoft Yi Baiti"/>
+        <a:font script="Tibt" typeface="Microsoft Himalaya"/>
+        <a:font script="Thaa" typeface="MV Boli"/>
+        <a:font script="Deva" typeface="Mangal"/>
+        <a:font script="Telu" typeface="Gautami"/>
+        <a:font script="Taml" typeface="Latha"/>
+        <a:font script="Syrc" typeface="Estrangelo Edessa"/>
+        <a:font script="Orya" typeface="Kalinga"/>
+        <a:font script="Mlym" typeface="Kartika"/>
+        <a:font script="Laoo" typeface="DokChampa"/>
+        <a:font script="Sinh" typeface="Iskoola Pota"/>
+        <a:font script="Mong" typeface="Mongolian Baiti"/>
+        <a:font script="Viet" typeface="Arial"/>
+        <a:font script="Uigh" typeface="Microsoft Uighur"/>
+        <a:font script="Geor" typeface="Sylfaen"/>
+      </a:minorFont>
+    </a:fontScheme>
+    <a:fmtScheme name="Office">
+      <a:fillStyleLst>
+        <a:solidFill>
+          <a:schemeClr val="phClr"/>
+        </a:solidFill>
+        <a:gradFill rotWithShape="1">
+          <a:gsLst>
+            <a:gs pos="0">
+              <a:schemeClr val="phClr">
+                <a:tint val="50000"/>
+                <a:satMod val="300000"/>
+              </a:schemeClr>
+            </a:gs>
+            <a:gs pos="35000">
+              <a:schemeClr val="phClr">
+                <a:tint val="37000"/>
+                <a:satMod val="300000"/>
+              </a:schemeClr>
+            </a:gs>
+            <a:gs pos="100000">
+              <a:schemeClr val="phClr">
+                <a:tint val="15000"/>
+                <a:satMod val="350000"/>
+              </a:schemeClr>
+            </a:gs>
+          </a:gsLst>
+          <a:lin ang="16200000" scaled="1"/>
+        </a:gradFill>
+        <a:gradFill rotWithShape="1">
+          <a:gsLst>
+            <a:gs pos="0">
+              <a:schemeClr val="phClr">
+                <a:tint val="100000"/>
+                <a:shade val="100000"/>
+                <a:satMod val="130000"/>
+              </a:schemeClr>
+            </a:gs>
+            <a:gs pos="100000">
+              <a:schemeClr val="phClr">
+                <a:tint val="50000"/>
+                <a:shade val="100000"/>
+                <a:satMod val="350000"/>
+              </a:schemeClr>
+            </a:gs>
+          </a:gsLst>
+          <a:lin ang="16200000" scaled="0"/>
+        </a:gradFill>
+      </a:fillStyleLst>
+      <a:lnStyleLst>
+        <a:ln w="9525" cap="flat" cmpd="sng" algn="ctr">
+          <a:solidFill>
+            <a:schemeClr val="phClr">
+              <a:shade val="95000"/>
+              <a:satMod val="105000"/>
+            </a:schemeClr>
+          </a:solidFill>
+          <a:prstDash val="solid"/>
+        </a:ln>
+        <a:ln w="25400" cap="flat" cmpd="sng" algn="ctr">
+          <a:solidFill>
+            <a:schemeClr val="phClr"/>
+          </a:solidFill>
+          <a:prstDash val="solid"/>
+        </a:ln>
+        <a:ln w="38100" cap="flat" cmpd="sng" algn="ctr">
+          <a:solidFill>
+            <a:schemeClr val="phClr"/>
+          </a:solidFill>
+          <a:prstDash val="solid"/>
+        </a:ln>
+      </a:lnStyleLst>
+      <a:effectStyleLst>
+        <a:effectStyle>
+          <a:effectLst>
+            <a:outerShdw blurRad="40000" dist="20000" dir="5400000" rotWithShape="0">
+              <a:srgbClr val="000000">
+                <a:alpha val="38000"/>
+              </a:srgbClr>
+            </a:outerShdw>
+          </a:effectLst>
+        </a:effectStyle>
+        <a:effectStyle>
+          <a:effectLst>
+            <a:outerShdw blurRad="40000" dist="23000" dir="5400000" rotWithShape="0">
+              <a:srgbClr val="000000">
+                <a:alpha val="35000"/>
+              </a:srgbClr>
+            </a:outerShdw>
+          </a:effectLst>
+        </a:effectStyle>
+        <a:effectStyle>
+          <a:effectLst>
+            <a:outerShdw blurRad="40000" dist="23000" dir="5400000" rotWithShape="0">
+              <a:srgbClr val="000000">
+                <a:alpha val="35000"/>
+              </a:srgbClr>
+            </a:outerShdw>
+          </a:effectLst>
+          <a:scene3d>
+            <a:camera prst="orthographicFront">
+              <a:rot lat="0" lon="0" rev="0"/>
+            </a:camera>
+            <a:lightRig rig="threePt" dir="t">
+              <a:rot lat="0" lon="0" rev="1200000"/>
+            </a:lightRig>
+          </a:scene3d>
+          <a:sp3d>
+            <a:bevelT w="63500" h="25400"/>
+          </a:sp3d>
+        </a:effectStyle>
+      </a:effectStyleLst>
+      <a:bgFillStyleLst>
+        <a:solidFill>
+          <a:schemeClr val="phClr"/>
+        </a:solidFill>
+        <a:gradFill rotWithShape="1">
+          <a:gsLst>
+            <a:gs pos="0">
+              <a:schemeClr val="phClr">
+                <a:tint val="40000"/>
+                <a:satMod val="350000"/>
+              </a:schemeClr>
+            </a:gs>
+            <a:gs pos="40000">
+              <a:schemeClr val="phClr">
+                <a:tint val="45000"/>
+                <a:shade val="99000"/>
+                <a:satMod val="350000"/>
+              </a:schemeClr>
+            </a:gs>
+            <a:gs pos="100000">
+              <a:schemeClr val="phClr">
+                <a:shade val="20000"/>
+                <a:satMod val="255000"/>
+              </a:schemeClr>
+            </a:gs>
+          </a:gsLst>
+          <a:path path="circle">
+            <a:fillToRect l="50000" t="-80000" r="50000" b="180000"/>
+          </a:path>
+        </a:gradFill>
+        <a:gradFill rotWithShape="1">
+          <a:gsLst>
+            <a:gs pos="0">
+              <a:schemeClr val="phClr">
+                <a:tint val="80000"/>
+                <a:satMod val="300000"/>
+              </a:schemeClr>
+            </a:gs>
+            <a:gs pos="100000">
+              <a:schemeClr val="phClr">
+                <a:shade val="30000"/>
+                <a:satMod val="200000"/>
+              </a:schemeClr>
+            </a:gs>
+          </a:gsLst>
+          <a:path path="circle">
+            <a:fillToRect l="50000" t="50000" r="50000" b="50000"/>
+          </a:path>
+        </a:gradFill>
+      </a:bgFillStyleLst>
+    </a:fmtScheme>
+  </a:themeElements>
+  <a:objectDefaults>
+    <a:spDef>
+      <a:spPr/>
+      <a:bodyPr/>
+      <a:lstStyle/>
+      <a:style>
+        <a:lnRef idx="1">
+          <a:schemeClr val="accent1"/>
+        </a:lnRef>
+        <a:fillRef idx="3">
+          <a:schemeClr val="accent1"/>
+        </a:fillRef>
+        <a:effectRef idx="2">
+          <a:schemeClr val="accent1"/>
+        </a:effectRef>
+        <a:fontRef idx="minor">
+          <a:schemeClr val="lt1"/>
+        </a:fontRef>
+      </a:style>
+    </a:spDef>
+    <a:lnDef>
+      <a:spPr/>
+      <a:bodyPr/>
+      <a:lstStyle/>
+      <a:style>
+        <a:lnRef idx="2">
+          <a:schemeClr val="accent1"/>
+        </a:lnRef>
+        <a:fillRef idx="0">
+          <a:schemeClr val="accent1"/>
+        </a:fillRef>
+        <a:effectRef idx="1">
+          <a:schemeClr val="accent1"/>
+        </a:effectRef>
+        <a:fontRef idx="minor">
+          <a:schemeClr val="tx1"/>
+        </a:fontRef>
+      </a:style>
+    </a:lnDef>
+  </a:objectDefaults>
+  <a:extraClrSchemeLst/>
+</a:theme>
 </file>
--- a/dms-workshop/AI-Powered-Product-Development_DMS.pptx
+++ b/dms-workshop/AI-Powered-Product-Development_DMS.pptx
@@ -4202,181 +4202,84 @@
       <p:grpSpPr/>
       <p:sp>
         <p:nvSpPr>
-          <p:cNvPr id="2" name="Rectangle 1"/>
+          <p:cNvPr id="2" name="TextBox 1"/>
+          <p:cNvSpPr txBox="1"/>
+          <p:nvPr/>
+        </p:nvSpPr>
+        <p:spPr>
+          <a:xfrm>
+            <a:off x="777240" y="502920"/>
+            <a:ext cx="8229600" cy="365760"/>
+          </a:xfrm>
+          <a:prstGeom prst="rect">
+            <a:avLst/>
+          </a:prstGeom>
+          <a:noFill/>
+        </p:spPr>
+        <p:txBody>
+          <a:bodyPr wrap="square" anchor="t">
+            <a:noAutofit/>
+          </a:bodyPr>
+          <a:lstStyle/>
+          <a:p>
+            <a:pPr algn="l"/>
+            <a:r>
+              <a:rPr sz="1400" b="1" i="0">
+                <a:solidFill>
+                  <a:srgbClr val="256E8E"/>
+                </a:solidFill>
+                <a:latin typeface="Arial"/>
+              </a:rPr>
+              <a:t>INDUSTRIAL DEVOPS NOW</a:t>
+            </a:r>
+          </a:p>
+        </p:txBody>
+      </p:sp>
+      <p:sp>
+        <p:nvSpPr>
+          <p:cNvPr id="3" name="TextBox 2"/>
+          <p:cNvSpPr txBox="1"/>
+          <p:nvPr/>
+        </p:nvSpPr>
+        <p:spPr>
+          <a:xfrm>
+            <a:off x="749808" y="2377440"/>
+            <a:ext cx="10698480" cy="2011680"/>
+          </a:xfrm>
+          <a:prstGeom prst="rect">
+            <a:avLst/>
+          </a:prstGeom>
+          <a:noFill/>
+        </p:spPr>
+        <p:txBody>
+          <a:bodyPr wrap="square" anchor="t">
+            <a:noAutofit/>
+          </a:bodyPr>
+          <a:lstStyle/>
+          <a:p>
+            <a:pPr algn="l"/>
+            <a:r>
+              <a:rPr sz="4400" b="1" i="0">
+                <a:solidFill>
+                  <a:srgbClr val="174C63"/>
+                </a:solidFill>
+                <a:latin typeface="Arial"/>
+              </a:rPr>
+              <a:t>AI-POWERED PRODUCT DEVELOPMENT</a:t>
+            </a:r>
+          </a:p>
+        </p:txBody>
+      </p:sp>
+      <p:sp>
+        <p:nvSpPr>
+          <p:cNvPr id="4" name="Rectangle 3"/>
           <p:cNvSpPr/>
           <p:nvPr/>
         </p:nvSpPr>
         <p:spPr>
           <a:xfrm>
-            <a:off x="-91440" y="-91440"/>
-            <a:ext cx="12374575" cy="7040880"/>
-          </a:xfrm>
-          <a:prstGeom prst="rect">
-            <a:avLst/>
-          </a:prstGeom>
-          <a:solidFill>
-            <a:srgbClr val="174C63"/>
-          </a:solidFill>
-          <a:ln>
-            <a:noFill/>
-          </a:ln>
-          <a:effectLst/>
-        </p:spPr>
-        <p:style>
-          <a:lnRef idx="1">
-            <a:schemeClr val="accent1"/>
-          </a:lnRef>
-          <a:fillRef idx="3">
-            <a:schemeClr val="accent1"/>
-          </a:fillRef>
-          <a:effectRef idx="2">
-            <a:schemeClr val="accent1"/>
-          </a:effectRef>
-          <a:fontRef idx="minor">
-            <a:schemeClr val="lt1"/>
-          </a:fontRef>
-        </p:style>
-        <p:txBody>
-          <a:bodyPr rtlCol="0" anchor="ctr"/>
-          <a:lstStyle/>
-          <a:p>
-            <a:pPr algn="ctr"/>
-          </a:p>
-        </p:txBody>
-      </p:sp>
-      <p:sp>
-        <p:nvSpPr>
-          <p:cNvPr id="3" name="Oval 2"/>
-          <p:cNvSpPr/>
-          <p:nvPr/>
-        </p:nvSpPr>
-        <p:spPr>
-          <a:xfrm>
-            <a:off x="10149840" y="-2103120"/>
-            <a:ext cx="5120640" cy="5120640"/>
-          </a:xfrm>
-          <a:prstGeom prst="ellipse">
-            <a:avLst/>
-          </a:prstGeom>
-          <a:solidFill>
-            <a:srgbClr val="256E8E"/>
-          </a:solidFill>
-          <a:ln>
-            <a:noFill/>
-          </a:ln>
-          <a:effectLst/>
-        </p:spPr>
-        <p:style>
-          <a:lnRef idx="1">
-            <a:schemeClr val="accent1"/>
-          </a:lnRef>
-          <a:fillRef idx="3">
-            <a:schemeClr val="accent1"/>
-          </a:fillRef>
-          <a:effectRef idx="2">
-            <a:schemeClr val="accent1"/>
-          </a:effectRef>
-          <a:fontRef idx="minor">
-            <a:schemeClr val="lt1"/>
-          </a:fontRef>
-        </p:style>
-        <p:txBody>
-          <a:bodyPr rtlCol="0" anchor="ctr"/>
-          <a:lstStyle/>
-          <a:p>
-            <a:pPr algn="ctr"/>
-          </a:p>
-        </p:txBody>
-      </p:sp>
-      <p:sp>
-        <p:nvSpPr>
-          <p:cNvPr id="4" name="Oval 3"/>
-          <p:cNvSpPr/>
-          <p:nvPr/>
-        </p:nvSpPr>
-        <p:spPr>
-          <a:xfrm>
-            <a:off x="11064240" y="3566160"/>
-            <a:ext cx="4206240" cy="4206240"/>
-          </a:xfrm>
-          <a:prstGeom prst="ellipse">
-            <a:avLst/>
-          </a:prstGeom>
-          <a:solidFill>
-            <a:srgbClr val="3288AD"/>
-          </a:solidFill>
-          <a:ln>
-            <a:noFill/>
-          </a:ln>
-          <a:effectLst/>
-        </p:spPr>
-        <p:style>
-          <a:lnRef idx="1">
-            <a:schemeClr val="accent1"/>
-          </a:lnRef>
-          <a:fillRef idx="3">
-            <a:schemeClr val="accent1"/>
-          </a:fillRef>
-          <a:effectRef idx="2">
-            <a:schemeClr val="accent1"/>
-          </a:effectRef>
-          <a:fontRef idx="minor">
-            <a:schemeClr val="lt1"/>
-          </a:fontRef>
-        </p:style>
-        <p:txBody>
-          <a:bodyPr rtlCol="0" anchor="ctr"/>
-          <a:lstStyle/>
-          <a:p>
-            <a:pPr algn="ctr"/>
-          </a:p>
-        </p:txBody>
-      </p:sp>
-      <p:sp>
-        <p:nvSpPr>
-          <p:cNvPr id="5" name="TextBox 4"/>
-          <p:cNvSpPr txBox="1"/>
-          <p:nvPr/>
-        </p:nvSpPr>
-        <p:spPr>
-          <a:xfrm>
-            <a:off x="777240" y="640080"/>
-            <a:ext cx="8229600" cy="365760"/>
-          </a:xfrm>
-          <a:prstGeom prst="rect">
-            <a:avLst/>
-          </a:prstGeom>
-          <a:noFill/>
-        </p:spPr>
-        <p:txBody>
-          <a:bodyPr wrap="square" anchor="t">
-            <a:noAutofit/>
-          </a:bodyPr>
-          <a:lstStyle/>
-          <a:p>
-            <a:pPr algn="l"/>
-            <a:r>
-              <a:rPr sz="1500" b="1" i="0">
-                <a:solidFill>
-                  <a:srgbClr val="FFFFFF"/>
-                </a:solidFill>
-                <a:latin typeface="Arial"/>
-              </a:rPr>
-              <a:t>INDUSTRIAL DEVOPS NOW</a:t>
-            </a:r>
-          </a:p>
-        </p:txBody>
-      </p:sp>
-      <p:sp>
-        <p:nvSpPr>
-          <p:cNvPr id="6" name="Rectangle 5"/>
-          <p:cNvSpPr/>
-          <p:nvPr/>
-        </p:nvSpPr>
-        <p:spPr>
-          <a:xfrm>
-            <a:off x="822960" y="2240280"/>
-            <a:ext cx="1554480" cy="64008"/>
+            <a:off x="777240" y="4389120"/>
+            <a:ext cx="1554480" cy="54864"/>
           </a:xfrm>
           <a:prstGeom prst="rect">
             <a:avLst/>
@@ -4413,14 +4316,14 @@
       </p:sp>
       <p:sp>
         <p:nvSpPr>
-          <p:cNvPr id="7" name="TextBox 6"/>
+          <p:cNvPr id="5" name="TextBox 4"/>
           <p:cNvSpPr txBox="1"/>
           <p:nvPr/>
         </p:nvSpPr>
         <p:spPr>
           <a:xfrm>
-            <a:off x="777240" y="2423160"/>
-            <a:ext cx="8961120" cy="1828800"/>
+            <a:off x="777240" y="4617720"/>
+            <a:ext cx="9692640" cy="914400"/>
           </a:xfrm>
           <a:prstGeom prst="rect">
             <a:avLst/>
@@ -4435,14 +4338,93 @@
           <a:p>
             <a:pPr algn="l"/>
             <a:r>
-              <a:rPr sz="4600" b="1" i="0">
-                <a:solidFill>
-                  <a:srgbClr val="FFFFFF"/>
-                </a:solidFill>
-                <a:latin typeface="Arial"/>
-              </a:rPr>
-              <a:t>AI-Powered Product Development</a:t>
-            </a:r>
+              <a:rPr sz="2000" b="0" i="0">
+                <a:solidFill>
+                  <a:srgbClr val="595959"/>
+                </a:solidFill>
+                <a:latin typeface="Arial"/>
+              </a:rPr>
+              <a:t>Building Better Automotive Products with Smaller, Faster, Cross-Functional Teams</a:t>
+            </a:r>
+          </a:p>
+        </p:txBody>
+      </p:sp>
+      <p:sp>
+        <p:nvSpPr>
+          <p:cNvPr id="6" name="TextBox 5"/>
+          <p:cNvSpPr txBox="1"/>
+          <p:nvPr/>
+        </p:nvSpPr>
+        <p:spPr>
+          <a:xfrm>
+            <a:off x="777240" y="5669280"/>
+            <a:ext cx="9144000" cy="365760"/>
+          </a:xfrm>
+          <a:prstGeom prst="rect">
+            <a:avLst/>
+          </a:prstGeom>
+          <a:noFill/>
+        </p:spPr>
+        <p:txBody>
+          <a:bodyPr wrap="square" anchor="t">
+            <a:noAutofit/>
+          </a:bodyPr>
+          <a:lstStyle/>
+          <a:p>
+            <a:pPr algn="l"/>
+            <a:r>
+              <a:rPr sz="1400" b="1" i="0">
+                <a:solidFill>
+                  <a:srgbClr val="256E8E"/>
+                </a:solidFill>
+                <a:latin typeface="Arial"/>
+              </a:rPr>
+              <a:t>A 90-minute hands-on workshop</a:t>
+            </a:r>
+          </a:p>
+        </p:txBody>
+      </p:sp>
+      <p:sp>
+        <p:nvSpPr>
+          <p:cNvPr id="7" name="Rectangle 6"/>
+          <p:cNvSpPr/>
+          <p:nvPr/>
+        </p:nvSpPr>
+        <p:spPr>
+          <a:xfrm>
+            <a:off x="640080" y="6419088"/>
+            <a:ext cx="10908792" cy="18288"/>
+          </a:xfrm>
+          <a:prstGeom prst="rect">
+            <a:avLst/>
+          </a:prstGeom>
+          <a:solidFill>
+            <a:srgbClr val="F0A500"/>
+          </a:solidFill>
+          <a:ln>
+            <a:noFill/>
+          </a:ln>
+          <a:effectLst/>
+        </p:spPr>
+        <p:style>
+          <a:lnRef idx="1">
+            <a:schemeClr val="accent1"/>
+          </a:lnRef>
+          <a:fillRef idx="3">
+            <a:schemeClr val="accent1"/>
+          </a:fillRef>
+          <a:effectRef idx="2">
+            <a:schemeClr val="accent1"/>
+          </a:effectRef>
+          <a:fontRef idx="minor">
+            <a:schemeClr val="lt1"/>
+          </a:fontRef>
+        </p:style>
+        <p:txBody>
+          <a:bodyPr rtlCol="0" anchor="ctr"/>
+          <a:lstStyle/>
+          <a:p>
+            <a:pPr algn="ctr"/>
           </a:p>
         </p:txBody>
       </p:sp>
@@ -4454,8 +4436,8 @@
         </p:nvSpPr>
         <p:spPr>
           <a:xfrm>
-            <a:off x="777240" y="4160520"/>
-            <a:ext cx="8046720" cy="1188720"/>
+            <a:off x="640080" y="6473952"/>
+            <a:ext cx="5486400" cy="274320"/>
           </a:xfrm>
           <a:prstGeom prst="rect">
             <a:avLst/>
@@ -4470,48 +4452,13 @@
           <a:p>
             <a:pPr algn="l"/>
             <a:r>
-              <a:rPr sz="2200" b="0" i="0">
-                <a:solidFill>
-                  <a:srgbClr val="D8E6F7"/>
-                </a:solidFill>
-                <a:latin typeface="Arial"/>
-              </a:rPr>
-              <a:t>Building Better Automotive Products with Smaller, Faster, Cross-Functional Teams</a:t>
-            </a:r>
-          </a:p>
-        </p:txBody>
-      </p:sp>
-      <p:sp>
-        <p:nvSpPr>
-          <p:cNvPr id="9" name="TextBox 8"/>
-          <p:cNvSpPr txBox="1"/>
-          <p:nvPr/>
-        </p:nvSpPr>
-        <p:spPr>
-          <a:xfrm>
-            <a:off x="777240" y="5943600"/>
-            <a:ext cx="9144000" cy="457200"/>
-          </a:xfrm>
-          <a:prstGeom prst="rect">
-            <a:avLst/>
-          </a:prstGeom>
-          <a:noFill/>
-        </p:spPr>
-        <p:txBody>
-          <a:bodyPr wrap="square" anchor="t">
-            <a:noAutofit/>
-          </a:bodyPr>
-          <a:lstStyle/>
-          <a:p>
-            <a:pPr algn="l"/>
-            <a:r>
-              <a:rPr sz="1500" b="1" i="0">
-                <a:solidFill>
-                  <a:srgbClr val="F0A500"/>
-                </a:solidFill>
-                <a:latin typeface="Arial"/>
-              </a:rPr>
-              <a:t>A 90-minute hands-on workshop</a:t>
+              <a:rPr sz="900" b="1" i="0">
+                <a:solidFill>
+                  <a:srgbClr val="595959"/>
+                </a:solidFill>
+                <a:latin typeface="Arial"/>
+              </a:rPr>
+              <a:t>Industrial DevOps Now</a:t>
             </a:r>
           </a:p>
         </p:txBody>
@@ -4586,7 +4533,7 @@
         </p:nvSpPr>
         <p:spPr>
           <a:xfrm>
-            <a:off x="640080" y="457200"/>
+            <a:off x="640080" y="438912"/>
             <a:ext cx="10515600" cy="274320"/>
           </a:xfrm>
           <a:prstGeom prst="rect">
@@ -4621,8 +4568,8 @@
         </p:nvSpPr>
         <p:spPr>
           <a:xfrm>
-            <a:off x="640080" y="841248"/>
-            <a:ext cx="10881360" cy="822960"/>
+            <a:off x="640080" y="822960"/>
+            <a:ext cx="10881360" cy="868680"/>
           </a:xfrm>
           <a:prstGeom prst="rect">
             <a:avLst/>
@@ -4637,13 +4584,13 @@
           <a:p>
             <a:pPr algn="l"/>
             <a:r>
-              <a:rPr sz="3000" b="1" i="0">
-                <a:solidFill>
-                  <a:srgbClr val="256E8E"/>
-                </a:solidFill>
-                <a:latin typeface="Arial"/>
-              </a:rPr>
-              <a:t>Future-state team</a:t>
+              <a:rPr sz="2800" b="1" i="0">
+                <a:solidFill>
+                  <a:srgbClr val="174C63"/>
+                </a:solidFill>
+                <a:latin typeface="Arial"/>
+              </a:rPr>
+              <a:t>FUTURE-STATE TEAM</a:t>
             </a:r>
           </a:p>
         </p:txBody>
@@ -4656,7 +4603,7 @@
         </p:nvSpPr>
         <p:spPr>
           <a:xfrm>
-            <a:off x="658368" y="1591056"/>
+            <a:off x="658368" y="1609344"/>
             <a:ext cx="1005840" cy="41148"/>
           </a:xfrm>
           <a:prstGeom prst="rect">
@@ -4700,7 +4647,7 @@
         </p:nvSpPr>
         <p:spPr>
           <a:xfrm>
-            <a:off x="640080" y="1892807"/>
+            <a:off x="640080" y="1901952"/>
             <a:ext cx="10607040" cy="548640"/>
           </a:xfrm>
           <a:prstGeom prst="rect">
@@ -5640,7 +5587,7 @@
         </p:nvSpPr>
         <p:spPr>
           <a:xfrm>
-            <a:off x="640080" y="457200"/>
+            <a:off x="640080" y="438912"/>
             <a:ext cx="10515600" cy="274320"/>
           </a:xfrm>
           <a:prstGeom prst="rect">
@@ -5675,8 +5622,8 @@
         </p:nvSpPr>
         <p:spPr>
           <a:xfrm>
-            <a:off x="640080" y="841248"/>
-            <a:ext cx="10881360" cy="822960"/>
+            <a:off x="640080" y="822960"/>
+            <a:ext cx="10881360" cy="868680"/>
           </a:xfrm>
           <a:prstGeom prst="rect">
             <a:avLst/>
@@ -5691,13 +5638,13 @@
           <a:p>
             <a:pPr algn="l"/>
             <a:r>
-              <a:rPr sz="3000" b="1" i="0">
-                <a:solidFill>
-                  <a:srgbClr val="256E8E"/>
-                </a:solidFill>
-                <a:latin typeface="Arial"/>
-              </a:rPr>
-              <a:t>Customer need</a:t>
+              <a:rPr sz="2800" b="1" i="0">
+                <a:solidFill>
+                  <a:srgbClr val="174C63"/>
+                </a:solidFill>
+                <a:latin typeface="Arial"/>
+              </a:rPr>
+              <a:t>CUSTOMER NEED</a:t>
             </a:r>
           </a:p>
         </p:txBody>
@@ -5710,7 +5657,7 @@
         </p:nvSpPr>
         <p:spPr>
           <a:xfrm>
-            <a:off x="658368" y="1591056"/>
+            <a:off x="658368" y="1609344"/>
             <a:ext cx="1005840" cy="41148"/>
           </a:xfrm>
           <a:prstGeom prst="rect">
@@ -5754,7 +5701,7 @@
         </p:nvSpPr>
         <p:spPr>
           <a:xfrm>
-            <a:off x="640080" y="1892807"/>
+            <a:off x="640080" y="1901952"/>
             <a:ext cx="10607040" cy="1463040"/>
           </a:xfrm>
           <a:prstGeom prst="rect">
@@ -6000,7 +5947,7 @@
         </p:nvSpPr>
         <p:spPr>
           <a:xfrm>
-            <a:off x="640080" y="457200"/>
+            <a:off x="640080" y="438912"/>
             <a:ext cx="10515600" cy="274320"/>
           </a:xfrm>
           <a:prstGeom prst="rect">
@@ -6035,8 +5982,8 @@
         </p:nvSpPr>
         <p:spPr>
           <a:xfrm>
-            <a:off x="640080" y="841248"/>
-            <a:ext cx="10881360" cy="822960"/>
+            <a:off x="640080" y="822960"/>
+            <a:ext cx="10881360" cy="868680"/>
           </a:xfrm>
           <a:prstGeom prst="rect">
             <a:avLst/>
@@ -6051,13 +5998,13 @@
           <a:p>
             <a:pPr algn="l"/>
             <a:r>
-              <a:rPr sz="3000" b="1" i="0">
-                <a:solidFill>
-                  <a:srgbClr val="256E8E"/>
-                </a:solidFill>
-                <a:latin typeface="Arial"/>
-              </a:rPr>
-              <a:t>Step 1 — Requirements</a:t>
+              <a:rPr sz="2800" b="1" i="0">
+                <a:solidFill>
+                  <a:srgbClr val="174C63"/>
+                </a:solidFill>
+                <a:latin typeface="Arial"/>
+              </a:rPr>
+              <a:t>STEP 1 — REQUIREMENTS</a:t>
             </a:r>
           </a:p>
         </p:txBody>
@@ -6070,7 +6017,7 @@
         </p:nvSpPr>
         <p:spPr>
           <a:xfrm>
-            <a:off x="658368" y="1591056"/>
+            <a:off x="658368" y="1609344"/>
             <a:ext cx="1005840" cy="41148"/>
           </a:xfrm>
           <a:prstGeom prst="rect">
@@ -6163,14 +6110,60 @@
       </p:sp>
       <p:sp>
         <p:nvSpPr>
-          <p:cNvPr id="7" name="TextBox 6"/>
+          <p:cNvPr id="7" name="Rounded Rectangle 6"/>
+          <p:cNvSpPr/>
+          <p:nvPr/>
+        </p:nvSpPr>
+        <p:spPr>
+          <a:xfrm>
+            <a:off x="640080" y="1901952"/>
+            <a:ext cx="10881360" cy="3520440"/>
+          </a:xfrm>
+          <a:prstGeom prst="roundRect">
+            <a:avLst/>
+          </a:prstGeom>
+          <a:solidFill>
+            <a:srgbClr val="F7F7F7"/>
+          </a:solidFill>
+          <a:ln w="15875">
+            <a:solidFill>
+              <a:srgbClr val="256E8E"/>
+            </a:solidFill>
+          </a:ln>
+          <a:effectLst/>
+        </p:spPr>
+        <p:style>
+          <a:lnRef idx="1">
+            <a:schemeClr val="accent1"/>
+          </a:lnRef>
+          <a:fillRef idx="3">
+            <a:schemeClr val="accent1"/>
+          </a:fillRef>
+          <a:effectRef idx="2">
+            <a:schemeClr val="accent1"/>
+          </a:effectRef>
+          <a:fontRef idx="minor">
+            <a:schemeClr val="lt1"/>
+          </a:fontRef>
+        </p:style>
+        <p:txBody>
+          <a:bodyPr rtlCol="0" anchor="ctr"/>
+          <a:lstStyle/>
+          <a:p>
+            <a:pPr algn="ctr"/>
+          </a:p>
+        </p:txBody>
+      </p:sp>
+      <p:sp>
+        <p:nvSpPr>
+          <p:cNvPr id="8" name="TextBox 7"/>
           <p:cNvSpPr txBox="1"/>
           <p:nvPr/>
         </p:nvSpPr>
         <p:spPr>
           <a:xfrm>
-            <a:off x="640080" y="1892807"/>
-            <a:ext cx="10607040" cy="1463040"/>
+            <a:off x="896112" y="2029968"/>
+            <a:ext cx="10378440" cy="365760"/>
           </a:xfrm>
           <a:prstGeom prst="rect">
             <a:avLst/>
@@ -6185,27 +6178,27 @@
           <a:p>
             <a:pPr algn="l"/>
             <a:r>
-              <a:rPr sz="2000" b="0" i="0">
-                <a:solidFill>
-                  <a:srgbClr val="1B1B1B"/>
-                </a:solidFill>
-                <a:latin typeface="Arial"/>
-              </a:rPr>
-              <a:t>Generate stakeholder needs, requirements, constraints, and acceptance criteria.</a:t>
-            </a:r>
-          </a:p>
-        </p:txBody>
-      </p:sp>
-      <p:sp>
-        <p:nvSpPr>
-          <p:cNvPr id="8" name="Rectangle 7"/>
+              <a:rPr sz="1300" b="1" i="0">
+                <a:solidFill>
+                  <a:srgbClr val="256E8E"/>
+                </a:solidFill>
+                <a:latin typeface="Arial"/>
+              </a:rPr>
+              <a:t>▶  Prompt 1 — Requirements  — paste into the AI</a:t>
+            </a:r>
+          </a:p>
+        </p:txBody>
+      </p:sp>
+      <p:sp>
+        <p:nvSpPr>
+          <p:cNvPr id="9" name="Rectangle 8"/>
           <p:cNvSpPr/>
           <p:nvPr/>
         </p:nvSpPr>
         <p:spPr>
           <a:xfrm>
-            <a:off x="640080" y="6437376"/>
-            <a:ext cx="10908792" cy="13716"/>
+            <a:off x="896112" y="2414016"/>
+            <a:ext cx="10369296" cy="16459"/>
           </a:xfrm>
           <a:prstGeom prst="rect">
             <a:avLst/>
@@ -6242,7 +6235,229 @@
       </p:sp>
       <p:sp>
         <p:nvSpPr>
-          <p:cNvPr id="9" name="TextBox 8"/>
+          <p:cNvPr id="10" name="TextBox 9"/>
+          <p:cNvSpPr txBox="1"/>
+          <p:nvPr/>
+        </p:nvSpPr>
+        <p:spPr>
+          <a:xfrm>
+            <a:off x="896112" y="2523744"/>
+            <a:ext cx="10369296" cy="2743200"/>
+          </a:xfrm>
+          <a:prstGeom prst="rect">
+            <a:avLst/>
+          </a:prstGeom>
+          <a:noFill/>
+        </p:spPr>
+        <p:txBody>
+          <a:bodyPr wrap="square" anchor="t">
+            <a:noAutofit/>
+          </a:bodyPr>
+          <a:lstStyle/>
+          <a:p>
+            <a:pPr algn="l"/>
+            <a:r>
+              <a:rPr sz="1500" b="0" i="0">
+                <a:solidFill>
+                  <a:srgbClr val="1B1B1B"/>
+                </a:solidFill>
+                <a:latin typeface="Arial"/>
+              </a:rPr>
+              <a:t>You are a senior automotive systems engineer. Design a Driver Monitoring System (DMS) that detects when a driver is drowsy, distracted, or in a medical emergency — and responds appropriately.</a:t>
+            </a:r>
+          </a:p>
+          <a:p>
+            <a:pPr algn="l"/>
+            <a:r>
+              <a:rPr sz="1500" b="0" i="0">
+                <a:solidFill>
+                  <a:srgbClr val="1B1B1B"/>
+                </a:solidFill>
+                <a:latin typeface="Arial"/>
+              </a:rPr>
+              <a:t/>
+            </a:r>
+          </a:p>
+          <a:p>
+            <a:pPr algn="l"/>
+            <a:r>
+              <a:rPr sz="1500" b="0" i="0">
+                <a:solidFill>
+                  <a:srgbClr val="1B1B1B"/>
+                </a:solidFill>
+                <a:latin typeface="Arial"/>
+              </a:rPr>
+              <a:t>Generate:</a:t>
+            </a:r>
+          </a:p>
+          <a:p>
+            <a:pPr algn="l"/>
+            <a:r>
+              <a:rPr sz="1500" b="0" i="0">
+                <a:solidFill>
+                  <a:srgbClr val="1B1B1B"/>
+                </a:solidFill>
+                <a:latin typeface="Arial"/>
+              </a:rPr>
+              <a:t>•  Stakeholder needs</a:t>
+            </a:r>
+          </a:p>
+          <a:p>
+            <a:pPr algn="l"/>
+            <a:r>
+              <a:rPr sz="1500" b="0" i="0">
+                <a:solidFill>
+                  <a:srgbClr val="1B1B1B"/>
+                </a:solidFill>
+                <a:latin typeface="Arial"/>
+              </a:rPr>
+              <a:t>•  Functional requirements</a:t>
+            </a:r>
+          </a:p>
+          <a:p>
+            <a:pPr algn="l"/>
+            <a:r>
+              <a:rPr sz="1500" b="0" i="0">
+                <a:solidFill>
+                  <a:srgbClr val="1B1B1B"/>
+                </a:solidFill>
+                <a:latin typeface="Arial"/>
+              </a:rPr>
+              <a:t>•  Non-functional requirements (latency, accuracy, privacy)</a:t>
+            </a:r>
+          </a:p>
+          <a:p>
+            <a:pPr algn="l"/>
+            <a:r>
+              <a:rPr sz="1500" b="0" i="0">
+                <a:solidFill>
+                  <a:srgbClr val="1B1B1B"/>
+                </a:solidFill>
+                <a:latin typeface="Arial"/>
+              </a:rPr>
+              <a:t>•  Constraints &amp; assumptions</a:t>
+            </a:r>
+          </a:p>
+          <a:p>
+            <a:pPr algn="l"/>
+            <a:r>
+              <a:rPr sz="1500" b="0" i="0">
+                <a:solidFill>
+                  <a:srgbClr val="1B1B1B"/>
+                </a:solidFill>
+                <a:latin typeface="Arial"/>
+              </a:rPr>
+              <a:t>•  Acceptance criteria</a:t>
+            </a:r>
+          </a:p>
+          <a:p>
+            <a:pPr algn="l"/>
+            <a:r>
+              <a:rPr sz="1500" b="0" i="0">
+                <a:solidFill>
+                  <a:srgbClr val="1B1B1B"/>
+                </a:solidFill>
+                <a:latin typeface="Arial"/>
+              </a:rPr>
+              <a:t/>
+            </a:r>
+          </a:p>
+          <a:p>
+            <a:pPr algn="l"/>
+            <a:r>
+              <a:rPr sz="1500" b="0" i="0">
+                <a:solidFill>
+                  <a:srgbClr val="1B1B1B"/>
+                </a:solidFill>
+                <a:latin typeface="Arial"/>
+              </a:rPr>
+              <a:t>Format the output as a requirements specification.</a:t>
+            </a:r>
+          </a:p>
+        </p:txBody>
+      </p:sp>
+      <p:sp>
+        <p:nvSpPr>
+          <p:cNvPr id="11" name="TextBox 10"/>
+          <p:cNvSpPr txBox="1"/>
+          <p:nvPr/>
+        </p:nvSpPr>
+        <p:spPr>
+          <a:xfrm>
+            <a:off x="640080" y="5541264"/>
+            <a:ext cx="10881360" cy="457200"/>
+          </a:xfrm>
+          <a:prstGeom prst="rect">
+            <a:avLst/>
+          </a:prstGeom>
+          <a:noFill/>
+        </p:spPr>
+        <p:txBody>
+          <a:bodyPr wrap="square" anchor="t">
+            <a:noAutofit/>
+          </a:bodyPr>
+          <a:lstStyle/>
+          <a:p>
+            <a:pPr algn="l"/>
+            <a:r>
+              <a:rPr sz="1400" b="1" i="1">
+                <a:solidFill>
+                  <a:srgbClr val="256E8E"/>
+                </a:solidFill>
+                <a:latin typeface="Arial"/>
+              </a:rPr>
+              <a:t>Ask the room:   What's missing? What would you challenge?</a:t>
+            </a:r>
+          </a:p>
+        </p:txBody>
+      </p:sp>
+      <p:sp>
+        <p:nvSpPr>
+          <p:cNvPr id="12" name="Rectangle 11"/>
+          <p:cNvSpPr/>
+          <p:nvPr/>
+        </p:nvSpPr>
+        <p:spPr>
+          <a:xfrm>
+            <a:off x="640080" y="6437376"/>
+            <a:ext cx="10908792" cy="13716"/>
+          </a:xfrm>
+          <a:prstGeom prst="rect">
+            <a:avLst/>
+          </a:prstGeom>
+          <a:solidFill>
+            <a:srgbClr val="E2E2E2"/>
+          </a:solidFill>
+          <a:ln>
+            <a:noFill/>
+          </a:ln>
+          <a:effectLst/>
+        </p:spPr>
+        <p:style>
+          <a:lnRef idx="1">
+            <a:schemeClr val="accent1"/>
+          </a:lnRef>
+          <a:fillRef idx="3">
+            <a:schemeClr val="accent1"/>
+          </a:fillRef>
+          <a:effectRef idx="2">
+            <a:schemeClr val="accent1"/>
+          </a:effectRef>
+          <a:fontRef idx="minor">
+            <a:schemeClr val="lt1"/>
+          </a:fontRef>
+        </p:style>
+        <p:txBody>
+          <a:bodyPr rtlCol="0" anchor="ctr"/>
+          <a:lstStyle/>
+          <a:p>
+            <a:pPr algn="ctr"/>
+          </a:p>
+        </p:txBody>
+      </p:sp>
+      <p:sp>
+        <p:nvSpPr>
+          <p:cNvPr id="13" name="TextBox 12"/>
           <p:cNvSpPr txBox="1"/>
           <p:nvPr/>
         </p:nvSpPr>
@@ -6277,7 +6492,7 @@
       </p:sp>
       <p:sp>
         <p:nvSpPr>
-          <p:cNvPr id="10" name="TextBox 9"/>
+          <p:cNvPr id="14" name="TextBox 13"/>
           <p:cNvSpPr txBox="1"/>
           <p:nvPr/>
         </p:nvSpPr>
@@ -6312,7 +6527,7 @@
       </p:sp>
       <p:sp>
         <p:nvSpPr>
-          <p:cNvPr id="11" name="TextBox 10"/>
+          <p:cNvPr id="15" name="TextBox 14"/>
           <p:cNvSpPr txBox="1"/>
           <p:nvPr/>
         </p:nvSpPr>
@@ -6415,7 +6630,7 @@
         </p:nvSpPr>
         <p:spPr>
           <a:xfrm>
-            <a:off x="640080" y="457200"/>
+            <a:off x="640080" y="438912"/>
             <a:ext cx="10515600" cy="274320"/>
           </a:xfrm>
           <a:prstGeom prst="rect">
@@ -6450,8 +6665,8 @@
         </p:nvSpPr>
         <p:spPr>
           <a:xfrm>
-            <a:off x="640080" y="841248"/>
-            <a:ext cx="10881360" cy="822960"/>
+            <a:off x="640080" y="822960"/>
+            <a:ext cx="10881360" cy="868680"/>
           </a:xfrm>
           <a:prstGeom prst="rect">
             <a:avLst/>
@@ -6466,13 +6681,13 @@
           <a:p>
             <a:pPr algn="l"/>
             <a:r>
-              <a:rPr sz="3000" b="1" i="0">
-                <a:solidFill>
-                  <a:srgbClr val="256E8E"/>
-                </a:solidFill>
-                <a:latin typeface="Arial"/>
-              </a:rPr>
-              <a:t>Step 2 — Architecture</a:t>
+              <a:rPr sz="2800" b="1" i="0">
+                <a:solidFill>
+                  <a:srgbClr val="174C63"/>
+                </a:solidFill>
+                <a:latin typeface="Arial"/>
+              </a:rPr>
+              <a:t>STEP 2 — ARCHITECTURE</a:t>
             </a:r>
           </a:p>
         </p:txBody>
@@ -6485,7 +6700,7 @@
         </p:nvSpPr>
         <p:spPr>
           <a:xfrm>
-            <a:off x="658368" y="1591056"/>
+            <a:off x="658368" y="1609344"/>
             <a:ext cx="1005840" cy="41148"/>
           </a:xfrm>
           <a:prstGeom prst="rect">
@@ -6578,58 +6793,25 @@
       </p:sp>
       <p:sp>
         <p:nvSpPr>
-          <p:cNvPr id="7" name="TextBox 6"/>
-          <p:cNvSpPr txBox="1"/>
-          <p:nvPr/>
-        </p:nvSpPr>
-        <p:spPr>
-          <a:xfrm>
-            <a:off x="640080" y="1892807"/>
-            <a:ext cx="10607040" cy="548640"/>
-          </a:xfrm>
-          <a:prstGeom prst="rect">
-            <a:avLst/>
-          </a:prstGeom>
-          <a:noFill/>
-        </p:spPr>
-        <p:txBody>
-          <a:bodyPr wrap="square" anchor="t">
-            <a:noAutofit/>
-          </a:bodyPr>
-          <a:lstStyle/>
-          <a:p>
-            <a:pPr algn="l"/>
-            <a:r>
-              <a:rPr sz="1800" b="0" i="0">
-                <a:solidFill>
-                  <a:srgbClr val="1B1B1B"/>
-                </a:solidFill>
-                <a:latin typeface="Arial"/>
-              </a:rPr>
-              <a:t>From sensing to a safe response — the system in one line.</a:t>
-            </a:r>
-          </a:p>
-        </p:txBody>
-      </p:sp>
-      <p:sp>
-        <p:nvSpPr>
-          <p:cNvPr id="8" name="Rounded Rectangle 7"/>
+          <p:cNvPr id="7" name="Rounded Rectangle 6"/>
           <p:cNvSpPr/>
           <p:nvPr/>
         </p:nvSpPr>
         <p:spPr>
           <a:xfrm>
-            <a:off x="640080" y="3383280"/>
-            <a:ext cx="2535174" cy="1097280"/>
+            <a:off x="640080" y="1901952"/>
+            <a:ext cx="10881360" cy="3520440"/>
           </a:xfrm>
           <a:prstGeom prst="roundRect">
             <a:avLst/>
           </a:prstGeom>
           <a:solidFill>
-            <a:srgbClr val="174C63"/>
+            <a:srgbClr val="F7F7F7"/>
           </a:solidFill>
-          <a:ln>
-            <a:noFill/>
+          <a:ln w="15875">
+            <a:solidFill>
+              <a:srgbClr val="256E8E"/>
+            </a:solidFill>
           </a:ln>
           <a:effectLst/>
         </p:spPr>
@@ -6648,343 +6830,58 @@
           </a:fontRef>
         </p:style>
         <p:txBody>
-          <a:bodyPr rtlCol="0" anchor="ctr" wrap="square">
-            <a:noAutofit/>
-          </a:bodyPr>
+          <a:bodyPr rtlCol="0" anchor="ctr"/>
           <a:lstStyle/>
           <a:p>
             <a:pPr algn="ctr"/>
-            <a:r>
-              <a:rPr sz="1400" b="1" i="0">
-                <a:solidFill>
-                  <a:srgbClr val="FFFFFF"/>
-                </a:solidFill>
-                <a:latin typeface="Arial"/>
-              </a:rPr>
-              <a:t>Sensors</a:t>
-            </a:r>
-          </a:p>
-          <a:p>
-            <a:pPr algn="ctr"/>
-            <a:r>
-              <a:rPr sz="1400" b="1" i="0">
-                <a:solidFill>
-                  <a:srgbClr val="FFFFFF"/>
-                </a:solidFill>
-                <a:latin typeface="Arial"/>
-              </a:rPr>
-              <a:t>(camera / IR)</a:t>
-            </a:r>
-          </a:p>
-        </p:txBody>
-      </p:sp>
-      <p:sp>
-        <p:nvSpPr>
-          <p:cNvPr id="9" name="Right Arrow 8"/>
+          </a:p>
+        </p:txBody>
+      </p:sp>
+      <p:sp>
+        <p:nvSpPr>
+          <p:cNvPr id="8" name="TextBox 7"/>
+          <p:cNvSpPr txBox="1"/>
+          <p:nvPr/>
+        </p:nvSpPr>
+        <p:spPr>
+          <a:xfrm>
+            <a:off x="896112" y="2029968"/>
+            <a:ext cx="10378440" cy="365760"/>
+          </a:xfrm>
+          <a:prstGeom prst="rect">
+            <a:avLst/>
+          </a:prstGeom>
+          <a:noFill/>
+        </p:spPr>
+        <p:txBody>
+          <a:bodyPr wrap="square" anchor="t">
+            <a:noAutofit/>
+          </a:bodyPr>
+          <a:lstStyle/>
+          <a:p>
+            <a:pPr algn="l"/>
+            <a:r>
+              <a:rPr sz="1300" b="1" i="0">
+                <a:solidFill>
+                  <a:srgbClr val="256E8E"/>
+                </a:solidFill>
+                <a:latin typeface="Arial"/>
+              </a:rPr>
+              <a:t>▶  Prompt 2 — Architecture  — paste into the AI</a:t>
+            </a:r>
+          </a:p>
+        </p:txBody>
+      </p:sp>
+      <p:sp>
+        <p:nvSpPr>
+          <p:cNvPr id="9" name="Rectangle 8"/>
           <p:cNvSpPr/>
           <p:nvPr/>
         </p:nvSpPr>
         <p:spPr>
           <a:xfrm>
-            <a:off x="3202686" y="3831335"/>
-            <a:ext cx="201168" cy="201168"/>
-          </a:xfrm>
-          <a:prstGeom prst="rightArrow">
-            <a:avLst/>
-          </a:prstGeom>
-          <a:solidFill>
-            <a:srgbClr val="F0A500"/>
-          </a:solidFill>
-          <a:ln>
-            <a:noFill/>
-          </a:ln>
-          <a:effectLst/>
-        </p:spPr>
-        <p:style>
-          <a:lnRef idx="1">
-            <a:schemeClr val="accent1"/>
-          </a:lnRef>
-          <a:fillRef idx="3">
-            <a:schemeClr val="accent1"/>
-          </a:fillRef>
-          <a:effectRef idx="2">
-            <a:schemeClr val="accent1"/>
-          </a:effectRef>
-          <a:fontRef idx="minor">
-            <a:schemeClr val="lt1"/>
-          </a:fontRef>
-        </p:style>
-        <p:txBody>
-          <a:bodyPr rtlCol="0" anchor="ctr"/>
-          <a:lstStyle/>
-          <a:p>
-            <a:pPr algn="ctr"/>
-          </a:p>
-        </p:txBody>
-      </p:sp>
-      <p:sp>
-        <p:nvSpPr>
-          <p:cNvPr id="10" name="Rounded Rectangle 9"/>
-          <p:cNvSpPr/>
-          <p:nvPr/>
-        </p:nvSpPr>
-        <p:spPr>
-          <a:xfrm>
-            <a:off x="3431286" y="3383280"/>
-            <a:ext cx="2535174" cy="1097280"/>
-          </a:xfrm>
-          <a:prstGeom prst="roundRect">
-            <a:avLst/>
-          </a:prstGeom>
-          <a:solidFill>
-            <a:srgbClr val="20607B"/>
-          </a:solidFill>
-          <a:ln>
-            <a:noFill/>
-          </a:ln>
-          <a:effectLst/>
-        </p:spPr>
-        <p:style>
-          <a:lnRef idx="1">
-            <a:schemeClr val="accent1"/>
-          </a:lnRef>
-          <a:fillRef idx="3">
-            <a:schemeClr val="accent1"/>
-          </a:fillRef>
-          <a:effectRef idx="2">
-            <a:schemeClr val="accent1"/>
-          </a:effectRef>
-          <a:fontRef idx="minor">
-            <a:schemeClr val="lt1"/>
-          </a:fontRef>
-        </p:style>
-        <p:txBody>
-          <a:bodyPr rtlCol="0" anchor="ctr" wrap="square">
-            <a:noAutofit/>
-          </a:bodyPr>
-          <a:lstStyle/>
-          <a:p>
-            <a:pPr algn="ctr"/>
-            <a:r>
-              <a:rPr sz="1400" b="1" i="0">
-                <a:solidFill>
-                  <a:srgbClr val="FFFFFF"/>
-                </a:solidFill>
-                <a:latin typeface="Arial"/>
-              </a:rPr>
-              <a:t>AI Perception</a:t>
-            </a:r>
-          </a:p>
-        </p:txBody>
-      </p:sp>
-      <p:sp>
-        <p:nvSpPr>
-          <p:cNvPr id="11" name="Right Arrow 10"/>
-          <p:cNvSpPr/>
-          <p:nvPr/>
-        </p:nvSpPr>
-        <p:spPr>
-          <a:xfrm>
-            <a:off x="5993892" y="3831335"/>
-            <a:ext cx="201168" cy="201168"/>
-          </a:xfrm>
-          <a:prstGeom prst="rightArrow">
-            <a:avLst/>
-          </a:prstGeom>
-          <a:solidFill>
-            <a:srgbClr val="F0A500"/>
-          </a:solidFill>
-          <a:ln>
-            <a:noFill/>
-          </a:ln>
-          <a:effectLst/>
-        </p:spPr>
-        <p:style>
-          <a:lnRef idx="1">
-            <a:schemeClr val="accent1"/>
-          </a:lnRef>
-          <a:fillRef idx="3">
-            <a:schemeClr val="accent1"/>
-          </a:fillRef>
-          <a:effectRef idx="2">
-            <a:schemeClr val="accent1"/>
-          </a:effectRef>
-          <a:fontRef idx="minor">
-            <a:schemeClr val="lt1"/>
-          </a:fontRef>
-        </p:style>
-        <p:txBody>
-          <a:bodyPr rtlCol="0" anchor="ctr"/>
-          <a:lstStyle/>
-          <a:p>
-            <a:pPr algn="ctr"/>
-          </a:p>
-        </p:txBody>
-      </p:sp>
-      <p:sp>
-        <p:nvSpPr>
-          <p:cNvPr id="12" name="Rounded Rectangle 11"/>
-          <p:cNvSpPr/>
-          <p:nvPr/>
-        </p:nvSpPr>
-        <p:spPr>
-          <a:xfrm>
-            <a:off x="6222492" y="3383280"/>
-            <a:ext cx="2535174" cy="1097280"/>
-          </a:xfrm>
-          <a:prstGeom prst="roundRect">
-            <a:avLst/>
-          </a:prstGeom>
-          <a:solidFill>
-            <a:srgbClr val="297494"/>
-          </a:solidFill>
-          <a:ln>
-            <a:noFill/>
-          </a:ln>
-          <a:effectLst/>
-        </p:spPr>
-        <p:style>
-          <a:lnRef idx="1">
-            <a:schemeClr val="accent1"/>
-          </a:lnRef>
-          <a:fillRef idx="3">
-            <a:schemeClr val="accent1"/>
-          </a:fillRef>
-          <a:effectRef idx="2">
-            <a:schemeClr val="accent1"/>
-          </a:effectRef>
-          <a:fontRef idx="minor">
-            <a:schemeClr val="lt1"/>
-          </a:fontRef>
-        </p:style>
-        <p:txBody>
-          <a:bodyPr rtlCol="0" anchor="ctr" wrap="square">
-            <a:noAutofit/>
-          </a:bodyPr>
-          <a:lstStyle/>
-          <a:p>
-            <a:pPr algn="ctr"/>
-            <a:r>
-              <a:rPr sz="1400" b="1" i="0">
-                <a:solidFill>
-                  <a:srgbClr val="FFFFFF"/>
-                </a:solidFill>
-                <a:latin typeface="Arial"/>
-              </a:rPr>
-              <a:t>Decision Logic</a:t>
-            </a:r>
-          </a:p>
-        </p:txBody>
-      </p:sp>
-      <p:sp>
-        <p:nvSpPr>
-          <p:cNvPr id="13" name="Right Arrow 12"/>
-          <p:cNvSpPr/>
-          <p:nvPr/>
-        </p:nvSpPr>
-        <p:spPr>
-          <a:xfrm>
-            <a:off x="8785098" y="3831335"/>
-            <a:ext cx="201168" cy="201168"/>
-          </a:xfrm>
-          <a:prstGeom prst="rightArrow">
-            <a:avLst/>
-          </a:prstGeom>
-          <a:solidFill>
-            <a:srgbClr val="F0A500"/>
-          </a:solidFill>
-          <a:ln>
-            <a:noFill/>
-          </a:ln>
-          <a:effectLst/>
-        </p:spPr>
-        <p:style>
-          <a:lnRef idx="1">
-            <a:schemeClr val="accent1"/>
-          </a:lnRef>
-          <a:fillRef idx="3">
-            <a:schemeClr val="accent1"/>
-          </a:fillRef>
-          <a:effectRef idx="2">
-            <a:schemeClr val="accent1"/>
-          </a:effectRef>
-          <a:fontRef idx="minor">
-            <a:schemeClr val="lt1"/>
-          </a:fontRef>
-        </p:style>
-        <p:txBody>
-          <a:bodyPr rtlCol="0" anchor="ctr"/>
-          <a:lstStyle/>
-          <a:p>
-            <a:pPr algn="ctr"/>
-          </a:p>
-        </p:txBody>
-      </p:sp>
-      <p:sp>
-        <p:nvSpPr>
-          <p:cNvPr id="14" name="Rounded Rectangle 13"/>
-          <p:cNvSpPr/>
-          <p:nvPr/>
-        </p:nvSpPr>
-        <p:spPr>
-          <a:xfrm>
-            <a:off x="9013698" y="3383280"/>
-            <a:ext cx="2535174" cy="1097280"/>
-          </a:xfrm>
-          <a:prstGeom prst="roundRect">
-            <a:avLst/>
-          </a:prstGeom>
-          <a:solidFill>
-            <a:srgbClr val="3288AD"/>
-          </a:solidFill>
-          <a:ln>
-            <a:noFill/>
-          </a:ln>
-          <a:effectLst/>
-        </p:spPr>
-        <p:style>
-          <a:lnRef idx="1">
-            <a:schemeClr val="accent1"/>
-          </a:lnRef>
-          <a:fillRef idx="3">
-            <a:schemeClr val="accent1"/>
-          </a:fillRef>
-          <a:effectRef idx="2">
-            <a:schemeClr val="accent1"/>
-          </a:effectRef>
-          <a:fontRef idx="minor">
-            <a:schemeClr val="lt1"/>
-          </a:fontRef>
-        </p:style>
-        <p:txBody>
-          <a:bodyPr rtlCol="0" anchor="ctr" wrap="square">
-            <a:noAutofit/>
-          </a:bodyPr>
-          <a:lstStyle/>
-          <a:p>
-            <a:pPr algn="ctr"/>
-            <a:r>
-              <a:rPr sz="1400" b="1" i="0">
-                <a:solidFill>
-                  <a:srgbClr val="FFFFFF"/>
-                </a:solidFill>
-                <a:latin typeface="Arial"/>
-              </a:rPr>
-              <a:t>HMI + Vehicle</a:t>
-            </a:r>
-          </a:p>
-        </p:txBody>
-      </p:sp>
-      <p:sp>
-        <p:nvSpPr>
-          <p:cNvPr id="15" name="Rectangle 14"/>
-          <p:cNvSpPr/>
-          <p:nvPr/>
-        </p:nvSpPr>
-        <p:spPr>
-          <a:xfrm>
-            <a:off x="640080" y="6437376"/>
-            <a:ext cx="10908792" cy="13716"/>
+            <a:off x="896112" y="2414016"/>
+            <a:ext cx="10369296" cy="16459"/>
           </a:xfrm>
           <a:prstGeom prst="rect">
             <a:avLst/>
@@ -7021,7 +6918,205 @@
       </p:sp>
       <p:sp>
         <p:nvSpPr>
-          <p:cNvPr id="16" name="TextBox 15"/>
+          <p:cNvPr id="10" name="TextBox 9"/>
+          <p:cNvSpPr txBox="1"/>
+          <p:nvPr/>
+        </p:nvSpPr>
+        <p:spPr>
+          <a:xfrm>
+            <a:off x="896112" y="2523744"/>
+            <a:ext cx="10369296" cy="2743200"/>
+          </a:xfrm>
+          <a:prstGeom prst="rect">
+            <a:avLst/>
+          </a:prstGeom>
+          <a:noFill/>
+        </p:spPr>
+        <p:txBody>
+          <a:bodyPr wrap="square" anchor="t">
+            <a:noAutofit/>
+          </a:bodyPr>
+          <a:lstStyle/>
+          <a:p>
+            <a:pPr algn="l"/>
+            <a:r>
+              <a:rPr sz="1500" b="0" i="0">
+                <a:solidFill>
+                  <a:srgbClr val="1B1B1B"/>
+                </a:solidFill>
+                <a:latin typeface="Arial"/>
+              </a:rPr>
+              <a:t>Using the approved requirements, create a concise architecture description:</a:t>
+            </a:r>
+          </a:p>
+          <a:p>
+            <a:pPr algn="l"/>
+            <a:r>
+              <a:rPr sz="1500" b="0" i="0">
+                <a:solidFill>
+                  <a:srgbClr val="1B1B1B"/>
+                </a:solidFill>
+                <a:latin typeface="Arial"/>
+              </a:rPr>
+              <a:t/>
+            </a:r>
+          </a:p>
+          <a:p>
+            <a:pPr algn="l"/>
+            <a:r>
+              <a:rPr sz="1500" b="0" i="0">
+                <a:solidFill>
+                  <a:srgbClr val="1B1B1B"/>
+                </a:solidFill>
+                <a:latin typeface="Arial"/>
+              </a:rPr>
+              <a:t>•  System context diagram (in text)</a:t>
+            </a:r>
+          </a:p>
+          <a:p>
+            <a:pPr algn="l"/>
+            <a:r>
+              <a:rPr sz="1500" b="0" i="0">
+                <a:solidFill>
+                  <a:srgbClr val="1B1B1B"/>
+                </a:solidFill>
+                <a:latin typeface="Arial"/>
+              </a:rPr>
+              <a:t>•  Major components: sensors, perception/AI, decision logic, HMI, vehicle interface</a:t>
+            </a:r>
+          </a:p>
+          <a:p>
+            <a:pPr algn="l"/>
+            <a:r>
+              <a:rPr sz="1500" b="0" i="0">
+                <a:solidFill>
+                  <a:srgbClr val="1B1B1B"/>
+                </a:solidFill>
+                <a:latin typeface="Arial"/>
+              </a:rPr>
+              <a:t>•  Interfaces &amp; data flows</a:t>
+            </a:r>
+          </a:p>
+          <a:p>
+            <a:pPr algn="l"/>
+            <a:r>
+              <a:rPr sz="1500" b="0" i="0">
+                <a:solidFill>
+                  <a:srgbClr val="1B1B1B"/>
+                </a:solidFill>
+                <a:latin typeface="Arial"/>
+              </a:rPr>
+              <a:t>•  Failure modes</a:t>
+            </a:r>
+          </a:p>
+          <a:p>
+            <a:pPr algn="l"/>
+            <a:r>
+              <a:rPr sz="1500" b="0" i="0">
+                <a:solidFill>
+                  <a:srgbClr val="1B1B1B"/>
+                </a:solidFill>
+                <a:latin typeface="Arial"/>
+              </a:rPr>
+              <a:t>•  Safety considerations</a:t>
+            </a:r>
+          </a:p>
+          <a:p>
+            <a:pPr algn="l"/>
+            <a:r>
+              <a:rPr sz="1500" b="0" i="0">
+                <a:solidFill>
+                  <a:srgbClr val="1B1B1B"/>
+                </a:solidFill>
+                <a:latin typeface="Arial"/>
+              </a:rPr>
+              <a:t>•  Privacy &amp; cybersecurity considerations</a:t>
+            </a:r>
+          </a:p>
+        </p:txBody>
+      </p:sp>
+      <p:sp>
+        <p:nvSpPr>
+          <p:cNvPr id="11" name="TextBox 10"/>
+          <p:cNvSpPr txBox="1"/>
+          <p:nvPr/>
+        </p:nvSpPr>
+        <p:spPr>
+          <a:xfrm>
+            <a:off x="640080" y="5541264"/>
+            <a:ext cx="10881360" cy="457200"/>
+          </a:xfrm>
+          <a:prstGeom prst="rect">
+            <a:avLst/>
+          </a:prstGeom>
+          <a:noFill/>
+        </p:spPr>
+        <p:txBody>
+          <a:bodyPr wrap="square" anchor="t">
+            <a:noAutofit/>
+          </a:bodyPr>
+          <a:lstStyle/>
+          <a:p>
+            <a:pPr algn="l"/>
+            <a:r>
+              <a:rPr sz="1400" b="1" i="1">
+                <a:solidFill>
+                  <a:srgbClr val="256E8E"/>
+                </a:solidFill>
+                <a:latin typeface="Arial"/>
+              </a:rPr>
+              <a:t>Ask the room:   Where could this go wrong, and how does it stay safe?</a:t>
+            </a:r>
+          </a:p>
+        </p:txBody>
+      </p:sp>
+      <p:sp>
+        <p:nvSpPr>
+          <p:cNvPr id="12" name="Rectangle 11"/>
+          <p:cNvSpPr/>
+          <p:nvPr/>
+        </p:nvSpPr>
+        <p:spPr>
+          <a:xfrm>
+            <a:off x="640080" y="6437376"/>
+            <a:ext cx="10908792" cy="13716"/>
+          </a:xfrm>
+          <a:prstGeom prst="rect">
+            <a:avLst/>
+          </a:prstGeom>
+          <a:solidFill>
+            <a:srgbClr val="E2E2E2"/>
+          </a:solidFill>
+          <a:ln>
+            <a:noFill/>
+          </a:ln>
+          <a:effectLst/>
+        </p:spPr>
+        <p:style>
+          <a:lnRef idx="1">
+            <a:schemeClr val="accent1"/>
+          </a:lnRef>
+          <a:fillRef idx="3">
+            <a:schemeClr val="accent1"/>
+          </a:fillRef>
+          <a:effectRef idx="2">
+            <a:schemeClr val="accent1"/>
+          </a:effectRef>
+          <a:fontRef idx="minor">
+            <a:schemeClr val="lt1"/>
+          </a:fontRef>
+        </p:style>
+        <p:txBody>
+          <a:bodyPr rtlCol="0" anchor="ctr"/>
+          <a:lstStyle/>
+          <a:p>
+            <a:pPr algn="ctr"/>
+          </a:p>
+        </p:txBody>
+      </p:sp>
+      <p:sp>
+        <p:nvSpPr>
+          <p:cNvPr id="13" name="TextBox 12"/>
           <p:cNvSpPr txBox="1"/>
           <p:nvPr/>
         </p:nvSpPr>
@@ -7056,7 +7151,7 @@
       </p:sp>
       <p:sp>
         <p:nvSpPr>
-          <p:cNvPr id="17" name="TextBox 16"/>
+          <p:cNvPr id="14" name="TextBox 13"/>
           <p:cNvSpPr txBox="1"/>
           <p:nvPr/>
         </p:nvSpPr>
@@ -7091,7 +7186,7 @@
       </p:sp>
       <p:sp>
         <p:nvSpPr>
-          <p:cNvPr id="18" name="TextBox 17"/>
+          <p:cNvPr id="15" name="TextBox 14"/>
           <p:cNvSpPr txBox="1"/>
           <p:nvPr/>
         </p:nvSpPr>
@@ -7194,7 +7289,7 @@
         </p:nvSpPr>
         <p:spPr>
           <a:xfrm>
-            <a:off x="640080" y="457200"/>
+            <a:off x="640080" y="438912"/>
             <a:ext cx="10515600" cy="274320"/>
           </a:xfrm>
           <a:prstGeom prst="rect">
@@ -7229,8 +7324,8 @@
         </p:nvSpPr>
         <p:spPr>
           <a:xfrm>
-            <a:off x="640080" y="841248"/>
-            <a:ext cx="10881360" cy="822960"/>
+            <a:off x="640080" y="822960"/>
+            <a:ext cx="10881360" cy="868680"/>
           </a:xfrm>
           <a:prstGeom prst="rect">
             <a:avLst/>
@@ -7245,13 +7340,13 @@
           <a:p>
             <a:pPr algn="l"/>
             <a:r>
-              <a:rPr sz="3000" b="1" i="0">
-                <a:solidFill>
-                  <a:srgbClr val="256E8E"/>
-                </a:solidFill>
-                <a:latin typeface="Arial"/>
-              </a:rPr>
-              <a:t>Step 3 — Model (SysML v2)</a:t>
+              <a:rPr sz="2800" b="1" i="0">
+                <a:solidFill>
+                  <a:srgbClr val="174C63"/>
+                </a:solidFill>
+                <a:latin typeface="Arial"/>
+              </a:rPr>
+              <a:t>STEP 3 — MODEL (SYSML V2)</a:t>
             </a:r>
           </a:p>
         </p:txBody>
@@ -7264,7 +7359,7 @@
         </p:nvSpPr>
         <p:spPr>
           <a:xfrm>
-            <a:off x="658368" y="1591056"/>
+            <a:off x="658368" y="1609344"/>
             <a:ext cx="1005840" cy="41148"/>
           </a:xfrm>
           <a:prstGeom prst="rect">
@@ -7357,14 +7452,60 @@
       </p:sp>
       <p:sp>
         <p:nvSpPr>
-          <p:cNvPr id="7" name="TextBox 6"/>
+          <p:cNvPr id="7" name="Rounded Rectangle 6"/>
+          <p:cNvSpPr/>
+          <p:nvPr/>
+        </p:nvSpPr>
+        <p:spPr>
+          <a:xfrm>
+            <a:off x="640080" y="1901952"/>
+            <a:ext cx="10881360" cy="3520440"/>
+          </a:xfrm>
+          <a:prstGeom prst="roundRect">
+            <a:avLst/>
+          </a:prstGeom>
+          <a:solidFill>
+            <a:srgbClr val="F7F7F7"/>
+          </a:solidFill>
+          <a:ln w="15875">
+            <a:solidFill>
+              <a:srgbClr val="256E8E"/>
+            </a:solidFill>
+          </a:ln>
+          <a:effectLst/>
+        </p:spPr>
+        <p:style>
+          <a:lnRef idx="1">
+            <a:schemeClr val="accent1"/>
+          </a:lnRef>
+          <a:fillRef idx="3">
+            <a:schemeClr val="accent1"/>
+          </a:fillRef>
+          <a:effectRef idx="2">
+            <a:schemeClr val="accent1"/>
+          </a:effectRef>
+          <a:fontRef idx="minor">
+            <a:schemeClr val="lt1"/>
+          </a:fontRef>
+        </p:style>
+        <p:txBody>
+          <a:bodyPr rtlCol="0" anchor="ctr"/>
+          <a:lstStyle/>
+          <a:p>
+            <a:pPr algn="ctr"/>
+          </a:p>
+        </p:txBody>
+      </p:sp>
+      <p:sp>
+        <p:nvSpPr>
+          <p:cNvPr id="8" name="TextBox 7"/>
           <p:cNvSpPr txBox="1"/>
           <p:nvPr/>
         </p:nvSpPr>
         <p:spPr>
           <a:xfrm>
-            <a:off x="640080" y="1892807"/>
-            <a:ext cx="10607040" cy="1463040"/>
+            <a:off x="896112" y="2029968"/>
+            <a:ext cx="10378440" cy="365760"/>
           </a:xfrm>
           <a:prstGeom prst="rect">
             <a:avLst/>
@@ -7379,27 +7520,27 @@
           <a:p>
             <a:pPr algn="l"/>
             <a:r>
-              <a:rPr sz="2000" b="0" i="0">
-                <a:solidFill>
-                  <a:srgbClr val="1B1B1B"/>
-                </a:solidFill>
-                <a:latin typeface="Arial"/>
-              </a:rPr>
-              <a:t>A structured, readable design that traces back to the requirements.</a:t>
-            </a:r>
-          </a:p>
-        </p:txBody>
-      </p:sp>
-      <p:sp>
-        <p:nvSpPr>
-          <p:cNvPr id="8" name="Rectangle 7"/>
+              <a:rPr sz="1300" b="1" i="0">
+                <a:solidFill>
+                  <a:srgbClr val="256E8E"/>
+                </a:solidFill>
+                <a:latin typeface="Arial"/>
+              </a:rPr>
+              <a:t>▶  Prompt 3 — SysML v2 Model  — paste into the AI</a:t>
+            </a:r>
+          </a:p>
+        </p:txBody>
+      </p:sp>
+      <p:sp>
+        <p:nvSpPr>
+          <p:cNvPr id="9" name="Rectangle 8"/>
           <p:cNvSpPr/>
           <p:nvPr/>
         </p:nvSpPr>
         <p:spPr>
           <a:xfrm>
-            <a:off x="640080" y="6437376"/>
-            <a:ext cx="10908792" cy="13716"/>
+            <a:off x="896112" y="2414016"/>
+            <a:ext cx="10369296" cy="16459"/>
           </a:xfrm>
           <a:prstGeom prst="rect">
             <a:avLst/>
@@ -7436,7 +7577,205 @@
       </p:sp>
       <p:sp>
         <p:nvSpPr>
-          <p:cNvPr id="9" name="TextBox 8"/>
+          <p:cNvPr id="10" name="TextBox 9"/>
+          <p:cNvSpPr txBox="1"/>
+          <p:nvPr/>
+        </p:nvSpPr>
+        <p:spPr>
+          <a:xfrm>
+            <a:off x="896112" y="2523744"/>
+            <a:ext cx="10369296" cy="2743200"/>
+          </a:xfrm>
+          <a:prstGeom prst="rect">
+            <a:avLst/>
+          </a:prstGeom>
+          <a:noFill/>
+        </p:spPr>
+        <p:txBody>
+          <a:bodyPr wrap="square" anchor="t">
+            <a:noAutofit/>
+          </a:bodyPr>
+          <a:lstStyle/>
+          <a:p>
+            <a:pPr algn="l"/>
+            <a:r>
+              <a:rPr sz="1500" b="0" i="0">
+                <a:solidFill>
+                  <a:srgbClr val="1B1B1B"/>
+                </a:solidFill>
+                <a:latin typeface="Arial"/>
+              </a:rPr>
+              <a:t>Using the architecture, generate a simple SysML v2 textual model:</a:t>
+            </a:r>
+          </a:p>
+          <a:p>
+            <a:pPr algn="l"/>
+            <a:r>
+              <a:rPr sz="1500" b="0" i="0">
+                <a:solidFill>
+                  <a:srgbClr val="1B1B1B"/>
+                </a:solidFill>
+                <a:latin typeface="Arial"/>
+              </a:rPr>
+              <a:t/>
+            </a:r>
+          </a:p>
+          <a:p>
+            <a:pPr algn="l"/>
+            <a:r>
+              <a:rPr sz="1500" b="0" i="0">
+                <a:solidFill>
+                  <a:srgbClr val="1B1B1B"/>
+                </a:solidFill>
+                <a:latin typeface="Arial"/>
+              </a:rPr>
+              <a:t>•  Requirements</a:t>
+            </a:r>
+          </a:p>
+          <a:p>
+            <a:pPr algn="l"/>
+            <a:r>
+              <a:rPr sz="1500" b="0" i="0">
+                <a:solidFill>
+                  <a:srgbClr val="1B1B1B"/>
+                </a:solidFill>
+                <a:latin typeface="Arial"/>
+              </a:rPr>
+              <a:t>•  Actions / functions (DetectDrowsiness, AssessConfidence, TriggerResponse)</a:t>
+            </a:r>
+          </a:p>
+          <a:p>
+            <a:pPr algn="l"/>
+            <a:r>
+              <a:rPr sz="1500" b="0" i="0">
+                <a:solidFill>
+                  <a:srgbClr val="1B1B1B"/>
+                </a:solidFill>
+                <a:latin typeface="Arial"/>
+              </a:rPr>
+              <a:t>•  Interfaces / flows</a:t>
+            </a:r>
+          </a:p>
+          <a:p>
+            <a:pPr algn="l"/>
+            <a:r>
+              <a:rPr sz="1500" b="0" i="0">
+                <a:solidFill>
+                  <a:srgbClr val="1B1B1B"/>
+                </a:solidFill>
+                <a:latin typeface="Arial"/>
+              </a:rPr>
+              <a:t>•  Major system elements</a:t>
+            </a:r>
+          </a:p>
+          <a:p>
+            <a:pPr algn="l"/>
+            <a:r>
+              <a:rPr sz="1500" b="0" i="0">
+                <a:solidFill>
+                  <a:srgbClr val="1B1B1B"/>
+                </a:solidFill>
+                <a:latin typeface="Arial"/>
+              </a:rPr>
+              <a:t/>
+            </a:r>
+          </a:p>
+          <a:p>
+            <a:pPr algn="l"/>
+            <a:r>
+              <a:rPr sz="1500" b="0" i="0">
+                <a:solidFill>
+                  <a:srgbClr val="1B1B1B"/>
+                </a:solidFill>
+                <a:latin typeface="Arial"/>
+              </a:rPr>
+              <a:t>Focus on readability, not tool-specific correctness.</a:t>
+            </a:r>
+          </a:p>
+        </p:txBody>
+      </p:sp>
+      <p:sp>
+        <p:nvSpPr>
+          <p:cNvPr id="11" name="TextBox 10"/>
+          <p:cNvSpPr txBox="1"/>
+          <p:nvPr/>
+        </p:nvSpPr>
+        <p:spPr>
+          <a:xfrm>
+            <a:off x="640080" y="5541264"/>
+            <a:ext cx="10881360" cy="457200"/>
+          </a:xfrm>
+          <a:prstGeom prst="rect">
+            <a:avLst/>
+          </a:prstGeom>
+          <a:noFill/>
+        </p:spPr>
+        <p:txBody>
+          <a:bodyPr wrap="square" anchor="t">
+            <a:noAutofit/>
+          </a:bodyPr>
+          <a:lstStyle/>
+          <a:p>
+            <a:pPr algn="l"/>
+            <a:r>
+              <a:rPr sz="1400" b="1" i="1">
+                <a:solidFill>
+                  <a:srgbClr val="256E8E"/>
+                </a:solidFill>
+                <a:latin typeface="Arial"/>
+              </a:rPr>
+              <a:t>Ask the room:   See how it traces back to the requirements.</a:t>
+            </a:r>
+          </a:p>
+        </p:txBody>
+      </p:sp>
+      <p:sp>
+        <p:nvSpPr>
+          <p:cNvPr id="12" name="Rectangle 11"/>
+          <p:cNvSpPr/>
+          <p:nvPr/>
+        </p:nvSpPr>
+        <p:spPr>
+          <a:xfrm>
+            <a:off x="640080" y="6437376"/>
+            <a:ext cx="10908792" cy="13716"/>
+          </a:xfrm>
+          <a:prstGeom prst="rect">
+            <a:avLst/>
+          </a:prstGeom>
+          <a:solidFill>
+            <a:srgbClr val="E2E2E2"/>
+          </a:solidFill>
+          <a:ln>
+            <a:noFill/>
+          </a:ln>
+          <a:effectLst/>
+        </p:spPr>
+        <p:style>
+          <a:lnRef idx="1">
+            <a:schemeClr val="accent1"/>
+          </a:lnRef>
+          <a:fillRef idx="3">
+            <a:schemeClr val="accent1"/>
+          </a:fillRef>
+          <a:effectRef idx="2">
+            <a:schemeClr val="accent1"/>
+          </a:effectRef>
+          <a:fontRef idx="minor">
+            <a:schemeClr val="lt1"/>
+          </a:fontRef>
+        </p:style>
+        <p:txBody>
+          <a:bodyPr rtlCol="0" anchor="ctr"/>
+          <a:lstStyle/>
+          <a:p>
+            <a:pPr algn="ctr"/>
+          </a:p>
+        </p:txBody>
+      </p:sp>
+      <p:sp>
+        <p:nvSpPr>
+          <p:cNvPr id="13" name="TextBox 12"/>
           <p:cNvSpPr txBox="1"/>
           <p:nvPr/>
         </p:nvSpPr>
@@ -7471,7 +7810,7 @@
       </p:sp>
       <p:sp>
         <p:nvSpPr>
-          <p:cNvPr id="10" name="TextBox 9"/>
+          <p:cNvPr id="14" name="TextBox 13"/>
           <p:cNvSpPr txBox="1"/>
           <p:nvPr/>
         </p:nvSpPr>
@@ -7506,7 +7845,7 @@
       </p:sp>
       <p:sp>
         <p:nvSpPr>
-          <p:cNvPr id="11" name="TextBox 10"/>
+          <p:cNvPr id="15" name="TextBox 14"/>
           <p:cNvSpPr txBox="1"/>
           <p:nvPr/>
         </p:nvSpPr>
@@ -7609,7 +7948,7 @@
         </p:nvSpPr>
         <p:spPr>
           <a:xfrm>
-            <a:off x="640080" y="457200"/>
+            <a:off x="640080" y="438912"/>
             <a:ext cx="10515600" cy="274320"/>
           </a:xfrm>
           <a:prstGeom prst="rect">
@@ -7644,8 +7983,8 @@
         </p:nvSpPr>
         <p:spPr>
           <a:xfrm>
-            <a:off x="640080" y="841248"/>
-            <a:ext cx="10881360" cy="822960"/>
+            <a:off x="640080" y="822960"/>
+            <a:ext cx="10881360" cy="868680"/>
           </a:xfrm>
           <a:prstGeom prst="rect">
             <a:avLst/>
@@ -7660,13 +7999,13 @@
           <a:p>
             <a:pPr algn="l"/>
             <a:r>
-              <a:rPr sz="3000" b="1" i="0">
-                <a:solidFill>
-                  <a:srgbClr val="256E8E"/>
-                </a:solidFill>
-                <a:latin typeface="Arial"/>
-              </a:rPr>
-              <a:t>Step 4 — Tests &amp; traceability</a:t>
+              <a:rPr sz="2800" b="1" i="0">
+                <a:solidFill>
+                  <a:srgbClr val="174C63"/>
+                </a:solidFill>
+                <a:latin typeface="Arial"/>
+              </a:rPr>
+              <a:t>STEP 4 — TESTS &amp; TRACEABILITY</a:t>
             </a:r>
           </a:p>
         </p:txBody>
@@ -7679,7 +8018,7 @@
         </p:nvSpPr>
         <p:spPr>
           <a:xfrm>
-            <a:off x="658368" y="1591056"/>
+            <a:off x="658368" y="1609344"/>
             <a:ext cx="1005840" cy="41148"/>
           </a:xfrm>
           <a:prstGeom prst="rect">
@@ -7772,14 +8111,60 @@
       </p:sp>
       <p:sp>
         <p:nvSpPr>
-          <p:cNvPr id="7" name="TextBox 6"/>
+          <p:cNvPr id="7" name="Rounded Rectangle 6"/>
+          <p:cNvSpPr/>
+          <p:nvPr/>
+        </p:nvSpPr>
+        <p:spPr>
+          <a:xfrm>
+            <a:off x="640080" y="1901952"/>
+            <a:ext cx="10881360" cy="3520440"/>
+          </a:xfrm>
+          <a:prstGeom prst="roundRect">
+            <a:avLst/>
+          </a:prstGeom>
+          <a:solidFill>
+            <a:srgbClr val="F7F7F7"/>
+          </a:solidFill>
+          <a:ln w="15875">
+            <a:solidFill>
+              <a:srgbClr val="256E8E"/>
+            </a:solidFill>
+          </a:ln>
+          <a:effectLst/>
+        </p:spPr>
+        <p:style>
+          <a:lnRef idx="1">
+            <a:schemeClr val="accent1"/>
+          </a:lnRef>
+          <a:fillRef idx="3">
+            <a:schemeClr val="accent1"/>
+          </a:fillRef>
+          <a:effectRef idx="2">
+            <a:schemeClr val="accent1"/>
+          </a:effectRef>
+          <a:fontRef idx="minor">
+            <a:schemeClr val="lt1"/>
+          </a:fontRef>
+        </p:style>
+        <p:txBody>
+          <a:bodyPr rtlCol="0" anchor="ctr"/>
+          <a:lstStyle/>
+          <a:p>
+            <a:pPr algn="ctr"/>
+          </a:p>
+        </p:txBody>
+      </p:sp>
+      <p:sp>
+        <p:nvSpPr>
+          <p:cNvPr id="8" name="TextBox 7"/>
           <p:cNvSpPr txBox="1"/>
           <p:nvPr/>
         </p:nvSpPr>
         <p:spPr>
           <a:xfrm>
-            <a:off x="640080" y="1892807"/>
-            <a:ext cx="10607040" cy="1463040"/>
+            <a:off x="896112" y="2029968"/>
+            <a:ext cx="10378440" cy="365760"/>
           </a:xfrm>
           <a:prstGeom prst="rect">
             <a:avLst/>
@@ -7794,27 +8179,27 @@
           <a:p>
             <a:pPr algn="l"/>
             <a:r>
-              <a:rPr sz="2000" b="0" i="0">
-                <a:solidFill>
-                  <a:srgbClr val="1B1B1B"/>
-                </a:solidFill>
-                <a:latin typeface="Arial"/>
-              </a:rPr>
-              <a:t>Functional, edge, and negative test cases — plus a requirements-to-test matrix.</a:t>
-            </a:r>
-          </a:p>
-        </p:txBody>
-      </p:sp>
-      <p:sp>
-        <p:nvSpPr>
-          <p:cNvPr id="8" name="Rectangle 7"/>
+              <a:rPr sz="1300" b="1" i="0">
+                <a:solidFill>
+                  <a:srgbClr val="256E8E"/>
+                </a:solidFill>
+                <a:latin typeface="Arial"/>
+              </a:rPr>
+              <a:t>▶  Prompt 4 — Test Development  — paste into the AI</a:t>
+            </a:r>
+          </a:p>
+        </p:txBody>
+      </p:sp>
+      <p:sp>
+        <p:nvSpPr>
+          <p:cNvPr id="9" name="Rectangle 8"/>
           <p:cNvSpPr/>
           <p:nvPr/>
         </p:nvSpPr>
         <p:spPr>
           <a:xfrm>
-            <a:off x="640080" y="6437376"/>
-            <a:ext cx="10908792" cy="13716"/>
+            <a:off x="896112" y="2414016"/>
+            <a:ext cx="10369296" cy="16459"/>
           </a:xfrm>
           <a:prstGeom prst="rect">
             <a:avLst/>
@@ -7851,7 +8236,217 @@
       </p:sp>
       <p:sp>
         <p:nvSpPr>
-          <p:cNvPr id="9" name="TextBox 8"/>
+          <p:cNvPr id="10" name="TextBox 9"/>
+          <p:cNvSpPr txBox="1"/>
+          <p:nvPr/>
+        </p:nvSpPr>
+        <p:spPr>
+          <a:xfrm>
+            <a:off x="896112" y="2523744"/>
+            <a:ext cx="10369296" cy="2743200"/>
+          </a:xfrm>
+          <a:prstGeom prst="rect">
+            <a:avLst/>
+          </a:prstGeom>
+          <a:noFill/>
+        </p:spPr>
+        <p:txBody>
+          <a:bodyPr wrap="square" anchor="t">
+            <a:noAutofit/>
+          </a:bodyPr>
+          <a:lstStyle/>
+          <a:p>
+            <a:pPr algn="l"/>
+            <a:r>
+              <a:rPr sz="1500" b="0" i="0">
+                <a:solidFill>
+                  <a:srgbClr val="1B1B1B"/>
+                </a:solidFill>
+                <a:latin typeface="Arial"/>
+              </a:rPr>
+              <a:t>Create:</a:t>
+            </a:r>
+          </a:p>
+          <a:p>
+            <a:pPr algn="l"/>
+            <a:r>
+              <a:rPr sz="1500" b="0" i="0">
+                <a:solidFill>
+                  <a:srgbClr val="1B1B1B"/>
+                </a:solidFill>
+                <a:latin typeface="Arial"/>
+              </a:rPr>
+              <a:t/>
+            </a:r>
+          </a:p>
+          <a:p>
+            <a:pPr algn="l"/>
+            <a:r>
+              <a:rPr sz="1500" b="0" i="0">
+                <a:solidFill>
+                  <a:srgbClr val="1B1B1B"/>
+                </a:solidFill>
+                <a:latin typeface="Arial"/>
+              </a:rPr>
+              <a:t>•  Verification strategy</a:t>
+            </a:r>
+          </a:p>
+          <a:p>
+            <a:pPr algn="l"/>
+            <a:r>
+              <a:rPr sz="1500" b="0" i="0">
+                <a:solidFill>
+                  <a:srgbClr val="1B1B1B"/>
+                </a:solidFill>
+                <a:latin typeface="Arial"/>
+              </a:rPr>
+              <a:t>•  Functional test cases</a:t>
+            </a:r>
+          </a:p>
+          <a:p>
+            <a:pPr algn="l"/>
+            <a:r>
+              <a:rPr sz="1500" b="0" i="0">
+                <a:solidFill>
+                  <a:srgbClr val="1B1B1B"/>
+                </a:solidFill>
+                <a:latin typeface="Arial"/>
+              </a:rPr>
+              <a:t>•  Edge cases (sunglasses, darkness, head turned, passenger interference)</a:t>
+            </a:r>
+          </a:p>
+          <a:p>
+            <a:pPr algn="l"/>
+            <a:r>
+              <a:rPr sz="1500" b="0" i="0">
+                <a:solidFill>
+                  <a:srgbClr val="1B1B1B"/>
+                </a:solidFill>
+                <a:latin typeface="Arial"/>
+              </a:rPr>
+              <a:t>•  Negative cases (false-positive drowsiness)</a:t>
+            </a:r>
+          </a:p>
+          <a:p>
+            <a:pPr algn="l"/>
+            <a:r>
+              <a:rPr sz="1500" b="0" i="0">
+                <a:solidFill>
+                  <a:srgbClr val="1B1B1B"/>
+                </a:solidFill>
+                <a:latin typeface="Arial"/>
+              </a:rPr>
+              <a:t>•  Requirements-to-test traceability matrix</a:t>
+            </a:r>
+          </a:p>
+          <a:p>
+            <a:pPr algn="l"/>
+            <a:r>
+              <a:rPr sz="1500" b="0" i="0">
+                <a:solidFill>
+                  <a:srgbClr val="1B1B1B"/>
+                </a:solidFill>
+                <a:latin typeface="Arial"/>
+              </a:rPr>
+              <a:t/>
+            </a:r>
+          </a:p>
+          <a:p>
+            <a:pPr algn="l"/>
+            <a:r>
+              <a:rPr sz="1500" b="0" i="0">
+                <a:solidFill>
+                  <a:srgbClr val="1B1B1B"/>
+                </a:solidFill>
+                <a:latin typeface="Arial"/>
+              </a:rPr>
+              <a:t>Include objective pass/fail criteria.</a:t>
+            </a:r>
+          </a:p>
+        </p:txBody>
+      </p:sp>
+      <p:sp>
+        <p:nvSpPr>
+          <p:cNvPr id="11" name="TextBox 10"/>
+          <p:cNvSpPr txBox="1"/>
+          <p:nvPr/>
+        </p:nvSpPr>
+        <p:spPr>
+          <a:xfrm>
+            <a:off x="640080" y="5541264"/>
+            <a:ext cx="10881360" cy="457200"/>
+          </a:xfrm>
+          <a:prstGeom prst="rect">
+            <a:avLst/>
+          </a:prstGeom>
+          <a:noFill/>
+        </p:spPr>
+        <p:txBody>
+          <a:bodyPr wrap="square" anchor="t">
+            <a:noAutofit/>
+          </a:bodyPr>
+          <a:lstStyle/>
+          <a:p>
+            <a:pPr algn="l"/>
+            <a:r>
+              <a:rPr sz="1400" b="1" i="1">
+                <a:solidFill>
+                  <a:srgbClr val="256E8E"/>
+                </a:solidFill>
+                <a:latin typeface="Arial"/>
+              </a:rPr>
+              <a:t>Ask the room:   Which test would you most want to pass before shipping?</a:t>
+            </a:r>
+          </a:p>
+        </p:txBody>
+      </p:sp>
+      <p:sp>
+        <p:nvSpPr>
+          <p:cNvPr id="12" name="Rectangle 11"/>
+          <p:cNvSpPr/>
+          <p:nvPr/>
+        </p:nvSpPr>
+        <p:spPr>
+          <a:xfrm>
+            <a:off x="640080" y="6437376"/>
+            <a:ext cx="10908792" cy="13716"/>
+          </a:xfrm>
+          <a:prstGeom prst="rect">
+            <a:avLst/>
+          </a:prstGeom>
+          <a:solidFill>
+            <a:srgbClr val="E2E2E2"/>
+          </a:solidFill>
+          <a:ln>
+            <a:noFill/>
+          </a:ln>
+          <a:effectLst/>
+        </p:spPr>
+        <p:style>
+          <a:lnRef idx="1">
+            <a:schemeClr val="accent1"/>
+          </a:lnRef>
+          <a:fillRef idx="3">
+            <a:schemeClr val="accent1"/>
+          </a:fillRef>
+          <a:effectRef idx="2">
+            <a:schemeClr val="accent1"/>
+          </a:effectRef>
+          <a:fontRef idx="minor">
+            <a:schemeClr val="lt1"/>
+          </a:fontRef>
+        </p:style>
+        <p:txBody>
+          <a:bodyPr rtlCol="0" anchor="ctr"/>
+          <a:lstStyle/>
+          <a:p>
+            <a:pPr algn="ctr"/>
+          </a:p>
+        </p:txBody>
+      </p:sp>
+      <p:sp>
+        <p:nvSpPr>
+          <p:cNvPr id="13" name="TextBox 12"/>
           <p:cNvSpPr txBox="1"/>
           <p:nvPr/>
         </p:nvSpPr>
@@ -7886,7 +8481,7 @@
       </p:sp>
       <p:sp>
         <p:nvSpPr>
-          <p:cNvPr id="10" name="TextBox 9"/>
+          <p:cNvPr id="14" name="TextBox 13"/>
           <p:cNvSpPr txBox="1"/>
           <p:nvPr/>
         </p:nvSpPr>
@@ -7921,7 +8516,7 @@
       </p:sp>
       <p:sp>
         <p:nvSpPr>
-          <p:cNvPr id="11" name="TextBox 10"/>
+          <p:cNvPr id="15" name="TextBox 14"/>
           <p:cNvSpPr txBox="1"/>
           <p:nvPr/>
         </p:nvSpPr>
@@ -8508,7 +9103,7 @@
         </p:nvSpPr>
         <p:spPr>
           <a:xfrm>
-            <a:off x="640080" y="457200"/>
+            <a:off x="640080" y="438912"/>
             <a:ext cx="10515600" cy="274320"/>
           </a:xfrm>
           <a:prstGeom prst="rect">
@@ -8543,8 +9138,8 @@
         </p:nvSpPr>
         <p:spPr>
           <a:xfrm>
-            <a:off x="640080" y="841248"/>
-            <a:ext cx="10881360" cy="822960"/>
+            <a:off x="640080" y="822960"/>
+            <a:ext cx="10881360" cy="868680"/>
           </a:xfrm>
           <a:prstGeom prst="rect">
             <a:avLst/>
@@ -8559,13 +9154,13 @@
           <a:p>
             <a:pPr algn="l"/>
             <a:r>
-              <a:rPr sz="3000" b="1" i="0">
-                <a:solidFill>
-                  <a:srgbClr val="256E8E"/>
-                </a:solidFill>
-                <a:latin typeface="Arial"/>
-              </a:rPr>
-              <a:t>Step 5–6 — Implementation &amp; verification</a:t>
+              <a:rPr sz="2800" b="1" i="0">
+                <a:solidFill>
+                  <a:srgbClr val="174C63"/>
+                </a:solidFill>
+                <a:latin typeface="Arial"/>
+              </a:rPr>
+              <a:t>STEP 5–6 — IMPLEMENTATION &amp; VERIFICATION</a:t>
             </a:r>
           </a:p>
         </p:txBody>
@@ -8578,7 +9173,7 @@
         </p:nvSpPr>
         <p:spPr>
           <a:xfrm>
-            <a:off x="658368" y="1591056"/>
+            <a:off x="658368" y="1609344"/>
             <a:ext cx="1005840" cy="41148"/>
           </a:xfrm>
           <a:prstGeom prst="rect">
@@ -8671,14 +9266,60 @@
       </p:sp>
       <p:sp>
         <p:nvSpPr>
-          <p:cNvPr id="7" name="TextBox 6"/>
+          <p:cNvPr id="7" name="Rounded Rectangle 6"/>
+          <p:cNvSpPr/>
+          <p:nvPr/>
+        </p:nvSpPr>
+        <p:spPr>
+          <a:xfrm>
+            <a:off x="640080" y="1901952"/>
+            <a:ext cx="5321808" cy="3520440"/>
+          </a:xfrm>
+          <a:prstGeom prst="roundRect">
+            <a:avLst/>
+          </a:prstGeom>
+          <a:solidFill>
+            <a:srgbClr val="F7F7F7"/>
+          </a:solidFill>
+          <a:ln w="15875">
+            <a:solidFill>
+              <a:srgbClr val="256E8E"/>
+            </a:solidFill>
+          </a:ln>
+          <a:effectLst/>
+        </p:spPr>
+        <p:style>
+          <a:lnRef idx="1">
+            <a:schemeClr val="accent1"/>
+          </a:lnRef>
+          <a:fillRef idx="3">
+            <a:schemeClr val="accent1"/>
+          </a:fillRef>
+          <a:effectRef idx="2">
+            <a:schemeClr val="accent1"/>
+          </a:effectRef>
+          <a:fontRef idx="minor">
+            <a:schemeClr val="lt1"/>
+          </a:fontRef>
+        </p:style>
+        <p:txBody>
+          <a:bodyPr rtlCol="0" anchor="ctr"/>
+          <a:lstStyle/>
+          <a:p>
+            <a:pPr algn="ctr"/>
+          </a:p>
+        </p:txBody>
+      </p:sp>
+      <p:sp>
+        <p:nvSpPr>
+          <p:cNvPr id="8" name="TextBox 7"/>
           <p:cNvSpPr txBox="1"/>
           <p:nvPr/>
         </p:nvSpPr>
         <p:spPr>
           <a:xfrm>
-            <a:off x="640080" y="1892807"/>
-            <a:ext cx="10607040" cy="1463040"/>
+            <a:off x="896112" y="2029968"/>
+            <a:ext cx="4818888" cy="365760"/>
           </a:xfrm>
           <a:prstGeom prst="rect">
             <a:avLst/>
@@ -8693,27 +9334,27 @@
           <a:p>
             <a:pPr algn="l"/>
             <a:r>
-              <a:rPr sz="2000" b="0" i="0">
-                <a:solidFill>
-                  <a:srgbClr val="1B1B1B"/>
-                </a:solidFill>
-                <a:latin typeface="Arial"/>
-              </a:rPr>
-              <a:t>Detect-assess-respond logic, then a pass/fail review against the requirements.</a:t>
-            </a:r>
-          </a:p>
-        </p:txBody>
-      </p:sp>
-      <p:sp>
-        <p:nvSpPr>
-          <p:cNvPr id="8" name="Rectangle 7"/>
+              <a:rPr sz="1300" b="1" i="0">
+                <a:solidFill>
+                  <a:srgbClr val="256E8E"/>
+                </a:solidFill>
+                <a:latin typeface="Arial"/>
+              </a:rPr>
+              <a:t>▶  Prompt 5 — Implementation</a:t>
+            </a:r>
+          </a:p>
+        </p:txBody>
+      </p:sp>
+      <p:sp>
+        <p:nvSpPr>
+          <p:cNvPr id="9" name="Rectangle 8"/>
           <p:cNvSpPr/>
           <p:nvPr/>
         </p:nvSpPr>
         <p:spPr>
           <a:xfrm>
-            <a:off x="640080" y="6437376"/>
-            <a:ext cx="10908792" cy="13716"/>
+            <a:off x="896112" y="2414016"/>
+            <a:ext cx="4809744" cy="16459"/>
           </a:xfrm>
           <a:prstGeom prst="rect">
             <a:avLst/>
@@ -8750,7 +9391,461 @@
       </p:sp>
       <p:sp>
         <p:nvSpPr>
-          <p:cNvPr id="9" name="TextBox 8"/>
+          <p:cNvPr id="10" name="TextBox 9"/>
+          <p:cNvSpPr txBox="1"/>
+          <p:nvPr/>
+        </p:nvSpPr>
+        <p:spPr>
+          <a:xfrm>
+            <a:off x="896112" y="2523744"/>
+            <a:ext cx="4809744" cy="2743200"/>
+          </a:xfrm>
+          <a:prstGeom prst="rect">
+            <a:avLst/>
+          </a:prstGeom>
+          <a:noFill/>
+        </p:spPr>
+        <p:txBody>
+          <a:bodyPr wrap="square" anchor="t">
+            <a:noAutofit/>
+          </a:bodyPr>
+          <a:lstStyle/>
+          <a:p>
+            <a:pPr algn="l"/>
+            <a:r>
+              <a:rPr sz="1300" b="0" i="0">
+                <a:solidFill>
+                  <a:srgbClr val="1B1B1B"/>
+                </a:solidFill>
+                <a:latin typeface="Arial"/>
+              </a:rPr>
+              <a:t>Generate:</a:t>
+            </a:r>
+          </a:p>
+          <a:p>
+            <a:pPr algn="l"/>
+            <a:r>
+              <a:rPr sz="1300" b="0" i="0">
+                <a:solidFill>
+                  <a:srgbClr val="1B1B1B"/>
+                </a:solidFill>
+                <a:latin typeface="Arial"/>
+              </a:rPr>
+              <a:t/>
+            </a:r>
+          </a:p>
+          <a:p>
+            <a:pPr algn="l"/>
+            <a:r>
+              <a:rPr sz="1300" b="0" i="0">
+                <a:solidFill>
+                  <a:srgbClr val="1B1B1B"/>
+                </a:solidFill>
+                <a:latin typeface="Arial"/>
+              </a:rPr>
+              <a:t>•  High-level implementation approach</a:t>
+            </a:r>
+          </a:p>
+          <a:p>
+            <a:pPr algn="l"/>
+            <a:r>
+              <a:rPr sz="1300" b="0" i="0">
+                <a:solidFill>
+                  <a:srgbClr val="1B1B1B"/>
+                </a:solidFill>
+                <a:latin typeface="Arial"/>
+              </a:rPr>
+              <a:t>•  Pseudocode for the detect-assess-respond loop</a:t>
+            </a:r>
+          </a:p>
+          <a:p>
+            <a:pPr algn="l"/>
+            <a:r>
+              <a:rPr sz="1300" b="0" i="0">
+                <a:solidFill>
+                  <a:srgbClr val="1B1B1B"/>
+                </a:solidFill>
+                <a:latin typeface="Arial"/>
+              </a:rPr>
+              <a:t>•  Logic flow &amp; data processing steps</a:t>
+            </a:r>
+          </a:p>
+          <a:p>
+            <a:pPr algn="l"/>
+            <a:r>
+              <a:rPr sz="1300" b="0" i="0">
+                <a:solidFill>
+                  <a:srgbClr val="1B1B1B"/>
+                </a:solidFill>
+                <a:latin typeface="Arial"/>
+              </a:rPr>
+              <a:t>•  Assumptions</a:t>
+            </a:r>
+          </a:p>
+          <a:p>
+            <a:pPr algn="l"/>
+            <a:r>
+              <a:rPr sz="1300" b="0" i="0">
+                <a:solidFill>
+                  <a:srgbClr val="1B1B1B"/>
+                </a:solidFill>
+                <a:latin typeface="Arial"/>
+              </a:rPr>
+              <a:t/>
+            </a:r>
+          </a:p>
+          <a:p>
+            <a:pPr algn="l"/>
+            <a:r>
+              <a:rPr sz="1300" b="0" i="0">
+                <a:solidFill>
+                  <a:srgbClr val="1B1B1B"/>
+                </a:solidFill>
+                <a:latin typeface="Arial"/>
+              </a:rPr>
+              <a:t>Explain how it satisfies the requirements.</a:t>
+            </a:r>
+          </a:p>
+        </p:txBody>
+      </p:sp>
+      <p:sp>
+        <p:nvSpPr>
+          <p:cNvPr id="11" name="Rounded Rectangle 10"/>
+          <p:cNvSpPr/>
+          <p:nvPr/>
+        </p:nvSpPr>
+        <p:spPr>
+          <a:xfrm>
+            <a:off x="6199632" y="1901952"/>
+            <a:ext cx="5321808" cy="3520440"/>
+          </a:xfrm>
+          <a:prstGeom prst="roundRect">
+            <a:avLst/>
+          </a:prstGeom>
+          <a:solidFill>
+            <a:srgbClr val="F7F7F7"/>
+          </a:solidFill>
+          <a:ln w="15875">
+            <a:solidFill>
+              <a:srgbClr val="256E8E"/>
+            </a:solidFill>
+          </a:ln>
+          <a:effectLst/>
+        </p:spPr>
+        <p:style>
+          <a:lnRef idx="1">
+            <a:schemeClr val="accent1"/>
+          </a:lnRef>
+          <a:fillRef idx="3">
+            <a:schemeClr val="accent1"/>
+          </a:fillRef>
+          <a:effectRef idx="2">
+            <a:schemeClr val="accent1"/>
+          </a:effectRef>
+          <a:fontRef idx="minor">
+            <a:schemeClr val="lt1"/>
+          </a:fontRef>
+        </p:style>
+        <p:txBody>
+          <a:bodyPr rtlCol="0" anchor="ctr"/>
+          <a:lstStyle/>
+          <a:p>
+            <a:pPr algn="ctr"/>
+          </a:p>
+        </p:txBody>
+      </p:sp>
+      <p:sp>
+        <p:nvSpPr>
+          <p:cNvPr id="12" name="TextBox 11"/>
+          <p:cNvSpPr txBox="1"/>
+          <p:nvPr/>
+        </p:nvSpPr>
+        <p:spPr>
+          <a:xfrm>
+            <a:off x="6455664" y="2029968"/>
+            <a:ext cx="4818888" cy="365760"/>
+          </a:xfrm>
+          <a:prstGeom prst="rect">
+            <a:avLst/>
+          </a:prstGeom>
+          <a:noFill/>
+        </p:spPr>
+        <p:txBody>
+          <a:bodyPr wrap="square" anchor="t">
+            <a:noAutofit/>
+          </a:bodyPr>
+          <a:lstStyle/>
+          <a:p>
+            <a:pPr algn="l"/>
+            <a:r>
+              <a:rPr sz="1300" b="1" i="0">
+                <a:solidFill>
+                  <a:srgbClr val="256E8E"/>
+                </a:solidFill>
+                <a:latin typeface="Arial"/>
+              </a:rPr>
+              <a:t>▶  Prompt 6 — Verification</a:t>
+            </a:r>
+          </a:p>
+        </p:txBody>
+      </p:sp>
+      <p:sp>
+        <p:nvSpPr>
+          <p:cNvPr id="13" name="Rectangle 12"/>
+          <p:cNvSpPr/>
+          <p:nvPr/>
+        </p:nvSpPr>
+        <p:spPr>
+          <a:xfrm>
+            <a:off x="6455664" y="2414016"/>
+            <a:ext cx="4809744" cy="16459"/>
+          </a:xfrm>
+          <a:prstGeom prst="rect">
+            <a:avLst/>
+          </a:prstGeom>
+          <a:solidFill>
+            <a:srgbClr val="E2E2E2"/>
+          </a:solidFill>
+          <a:ln>
+            <a:noFill/>
+          </a:ln>
+          <a:effectLst/>
+        </p:spPr>
+        <p:style>
+          <a:lnRef idx="1">
+            <a:schemeClr val="accent1"/>
+          </a:lnRef>
+          <a:fillRef idx="3">
+            <a:schemeClr val="accent1"/>
+          </a:fillRef>
+          <a:effectRef idx="2">
+            <a:schemeClr val="accent1"/>
+          </a:effectRef>
+          <a:fontRef idx="minor">
+            <a:schemeClr val="lt1"/>
+          </a:fontRef>
+        </p:style>
+        <p:txBody>
+          <a:bodyPr rtlCol="0" anchor="ctr"/>
+          <a:lstStyle/>
+          <a:p>
+            <a:pPr algn="ctr"/>
+          </a:p>
+        </p:txBody>
+      </p:sp>
+      <p:sp>
+        <p:nvSpPr>
+          <p:cNvPr id="14" name="TextBox 13"/>
+          <p:cNvSpPr txBox="1"/>
+          <p:nvPr/>
+        </p:nvSpPr>
+        <p:spPr>
+          <a:xfrm>
+            <a:off x="6455664" y="2523744"/>
+            <a:ext cx="4809744" cy="2743200"/>
+          </a:xfrm>
+          <a:prstGeom prst="rect">
+            <a:avLst/>
+          </a:prstGeom>
+          <a:noFill/>
+        </p:spPr>
+        <p:txBody>
+          <a:bodyPr wrap="square" anchor="t">
+            <a:noAutofit/>
+          </a:bodyPr>
+          <a:lstStyle/>
+          <a:p>
+            <a:pPr algn="l"/>
+            <a:r>
+              <a:rPr sz="1300" b="0" i="0">
+                <a:solidFill>
+                  <a:srgbClr val="1B1B1B"/>
+                </a:solidFill>
+                <a:latin typeface="Arial"/>
+              </a:rPr>
+              <a:t>Review the implementation. Identify:</a:t>
+            </a:r>
+          </a:p>
+          <a:p>
+            <a:pPr algn="l"/>
+            <a:r>
+              <a:rPr sz="1300" b="0" i="0">
+                <a:solidFill>
+                  <a:srgbClr val="1B1B1B"/>
+                </a:solidFill>
+                <a:latin typeface="Arial"/>
+              </a:rPr>
+              <a:t/>
+            </a:r>
+          </a:p>
+          <a:p>
+            <a:pPr algn="l"/>
+            <a:r>
+              <a:rPr sz="1300" b="0" i="0">
+                <a:solidFill>
+                  <a:srgbClr val="1B1B1B"/>
+                </a:solidFill>
+                <a:latin typeface="Arial"/>
+              </a:rPr>
+              <a:t>•  Requirements satisfied</a:t>
+            </a:r>
+          </a:p>
+          <a:p>
+            <a:pPr algn="l"/>
+            <a:r>
+              <a:rPr sz="1300" b="0" i="0">
+                <a:solidFill>
+                  <a:srgbClr val="1B1B1B"/>
+                </a:solidFill>
+                <a:latin typeface="Arial"/>
+              </a:rPr>
+              <a:t>•  Tests that would pass</a:t>
+            </a:r>
+          </a:p>
+          <a:p>
+            <a:pPr algn="l"/>
+            <a:r>
+              <a:rPr sz="1300" b="0" i="0">
+                <a:solidFill>
+                  <a:srgbClr val="1B1B1B"/>
+                </a:solidFill>
+                <a:latin typeface="Arial"/>
+              </a:rPr>
+              <a:t>•  Potential defects</a:t>
+            </a:r>
+          </a:p>
+          <a:p>
+            <a:pPr algn="l"/>
+            <a:r>
+              <a:rPr sz="1300" b="0" i="0">
+                <a:solidFill>
+                  <a:srgbClr val="1B1B1B"/>
+                </a:solidFill>
+                <a:latin typeface="Arial"/>
+              </a:rPr>
+              <a:t>•  Risks (false alarms, missed detections)</a:t>
+            </a:r>
+          </a:p>
+          <a:p>
+            <a:pPr algn="l"/>
+            <a:r>
+              <a:rPr sz="1300" b="0" i="0">
+                <a:solidFill>
+                  <a:srgbClr val="1B1B1B"/>
+                </a:solidFill>
+                <a:latin typeface="Arial"/>
+              </a:rPr>
+              <a:t>•  Recommended improvements</a:t>
+            </a:r>
+          </a:p>
+          <a:p>
+            <a:pPr algn="l"/>
+            <a:r>
+              <a:rPr sz="1300" b="0" i="0">
+                <a:solidFill>
+                  <a:srgbClr val="1B1B1B"/>
+                </a:solidFill>
+                <a:latin typeface="Arial"/>
+              </a:rPr>
+              <a:t/>
+            </a:r>
+          </a:p>
+          <a:p>
+            <a:pPr algn="l"/>
+            <a:r>
+              <a:rPr sz="1300" b="0" i="0">
+                <a:solidFill>
+                  <a:srgbClr val="1B1B1B"/>
+                </a:solidFill>
+                <a:latin typeface="Arial"/>
+              </a:rPr>
+              <a:t>Provide a pass/fail assessment.</a:t>
+            </a:r>
+          </a:p>
+        </p:txBody>
+      </p:sp>
+      <p:sp>
+        <p:nvSpPr>
+          <p:cNvPr id="15" name="TextBox 14"/>
+          <p:cNvSpPr txBox="1"/>
+          <p:nvPr/>
+        </p:nvSpPr>
+        <p:spPr>
+          <a:xfrm>
+            <a:off x="640080" y="5541264"/>
+            <a:ext cx="10881360" cy="457200"/>
+          </a:xfrm>
+          <a:prstGeom prst="rect">
+            <a:avLst/>
+          </a:prstGeom>
+          <a:noFill/>
+        </p:spPr>
+        <p:txBody>
+          <a:bodyPr wrap="square" anchor="t">
+            <a:noAutofit/>
+          </a:bodyPr>
+          <a:lstStyle/>
+          <a:p>
+            <a:pPr algn="l"/>
+            <a:r>
+              <a:rPr sz="1400" b="1" i="1">
+                <a:solidFill>
+                  <a:srgbClr val="256E8E"/>
+                </a:solidFill>
+                <a:latin typeface="Arial"/>
+              </a:rPr>
+              <a:t>Ask the room:   Where does human expertise make the final call?</a:t>
+            </a:r>
+          </a:p>
+        </p:txBody>
+      </p:sp>
+      <p:sp>
+        <p:nvSpPr>
+          <p:cNvPr id="16" name="Rectangle 15"/>
+          <p:cNvSpPr/>
+          <p:nvPr/>
+        </p:nvSpPr>
+        <p:spPr>
+          <a:xfrm>
+            <a:off x="640080" y="6437376"/>
+            <a:ext cx="10908792" cy="13716"/>
+          </a:xfrm>
+          <a:prstGeom prst="rect">
+            <a:avLst/>
+          </a:prstGeom>
+          <a:solidFill>
+            <a:srgbClr val="E2E2E2"/>
+          </a:solidFill>
+          <a:ln>
+            <a:noFill/>
+          </a:ln>
+          <a:effectLst/>
+        </p:spPr>
+        <p:style>
+          <a:lnRef idx="1">
+            <a:schemeClr val="accent1"/>
+          </a:lnRef>
+          <a:fillRef idx="3">
+            <a:schemeClr val="accent1"/>
+          </a:fillRef>
+          <a:effectRef idx="2">
+            <a:schemeClr val="accent1"/>
+          </a:effectRef>
+          <a:fontRef idx="minor">
+            <a:schemeClr val="lt1"/>
+          </a:fontRef>
+        </p:style>
+        <p:txBody>
+          <a:bodyPr rtlCol="0" anchor="ctr"/>
+          <a:lstStyle/>
+          <a:p>
+            <a:pPr algn="ctr"/>
+          </a:p>
+        </p:txBody>
+      </p:sp>
+      <p:sp>
+        <p:nvSpPr>
+          <p:cNvPr id="17" name="TextBox 16"/>
           <p:cNvSpPr txBox="1"/>
           <p:nvPr/>
         </p:nvSpPr>
@@ -8785,7 +9880,7 @@
       </p:sp>
       <p:sp>
         <p:nvSpPr>
-          <p:cNvPr id="10" name="TextBox 9"/>
+          <p:cNvPr id="18" name="TextBox 17"/>
           <p:cNvSpPr txBox="1"/>
           <p:nvPr/>
         </p:nvSpPr>
@@ -8820,7 +9915,7 @@
       </p:sp>
       <p:sp>
         <p:nvSpPr>
-          <p:cNvPr id="11" name="TextBox 10"/>
+          <p:cNvPr id="19" name="TextBox 18"/>
           <p:cNvSpPr txBox="1"/>
           <p:nvPr/>
         </p:nvSpPr>
@@ -8923,7 +10018,7 @@
         </p:nvSpPr>
         <p:spPr>
           <a:xfrm>
-            <a:off x="640080" y="457200"/>
+            <a:off x="640080" y="438912"/>
             <a:ext cx="10515600" cy="274320"/>
           </a:xfrm>
           <a:prstGeom prst="rect">
@@ -8958,8 +10053,8 @@
         </p:nvSpPr>
         <p:spPr>
           <a:xfrm>
-            <a:off x="640080" y="841248"/>
-            <a:ext cx="10881360" cy="822960"/>
+            <a:off x="640080" y="822960"/>
+            <a:ext cx="10881360" cy="868680"/>
           </a:xfrm>
           <a:prstGeom prst="rect">
             <a:avLst/>
@@ -8974,13 +10069,13 @@
           <a:p>
             <a:pPr algn="l"/>
             <a:r>
-              <a:rPr sz="3000" b="1" i="0">
-                <a:solidFill>
-                  <a:srgbClr val="256E8E"/>
-                </a:solidFill>
-                <a:latin typeface="Arial"/>
-              </a:rPr>
-              <a:t>Step 7 — Deployment</a:t>
+              <a:rPr sz="2800" b="1" i="0">
+                <a:solidFill>
+                  <a:srgbClr val="174C63"/>
+                </a:solidFill>
+                <a:latin typeface="Arial"/>
+              </a:rPr>
+              <a:t>STEP 7 — DEPLOYMENT</a:t>
             </a:r>
           </a:p>
         </p:txBody>
@@ -8993,7 +10088,7 @@
         </p:nvSpPr>
         <p:spPr>
           <a:xfrm>
-            <a:off x="658368" y="1591056"/>
+            <a:off x="658368" y="1609344"/>
             <a:ext cx="1005840" cy="41148"/>
           </a:xfrm>
           <a:prstGeom prst="rect">
@@ -9086,14 +10181,60 @@
       </p:sp>
       <p:sp>
         <p:nvSpPr>
-          <p:cNvPr id="7" name="TextBox 6"/>
+          <p:cNvPr id="7" name="Rounded Rectangle 6"/>
+          <p:cNvSpPr/>
+          <p:nvPr/>
+        </p:nvSpPr>
+        <p:spPr>
+          <a:xfrm>
+            <a:off x="640080" y="1901952"/>
+            <a:ext cx="10881360" cy="3520440"/>
+          </a:xfrm>
+          <a:prstGeom prst="roundRect">
+            <a:avLst/>
+          </a:prstGeom>
+          <a:solidFill>
+            <a:srgbClr val="F7F7F7"/>
+          </a:solidFill>
+          <a:ln w="15875">
+            <a:solidFill>
+              <a:srgbClr val="256E8E"/>
+            </a:solidFill>
+          </a:ln>
+          <a:effectLst/>
+        </p:spPr>
+        <p:style>
+          <a:lnRef idx="1">
+            <a:schemeClr val="accent1"/>
+          </a:lnRef>
+          <a:fillRef idx="3">
+            <a:schemeClr val="accent1"/>
+          </a:fillRef>
+          <a:effectRef idx="2">
+            <a:schemeClr val="accent1"/>
+          </a:effectRef>
+          <a:fontRef idx="minor">
+            <a:schemeClr val="lt1"/>
+          </a:fontRef>
+        </p:style>
+        <p:txBody>
+          <a:bodyPr rtlCol="0" anchor="ctr"/>
+          <a:lstStyle/>
+          <a:p>
+            <a:pPr algn="ctr"/>
+          </a:p>
+        </p:txBody>
+      </p:sp>
+      <p:sp>
+        <p:nvSpPr>
+          <p:cNvPr id="8" name="TextBox 7"/>
           <p:cNvSpPr txBox="1"/>
           <p:nvPr/>
         </p:nvSpPr>
         <p:spPr>
           <a:xfrm>
-            <a:off x="640080" y="1892807"/>
-            <a:ext cx="10607040" cy="1463040"/>
+            <a:off x="896112" y="2029968"/>
+            <a:ext cx="10378440" cy="365760"/>
           </a:xfrm>
           <a:prstGeom prst="rect">
             <a:avLst/>
@@ -9108,27 +10249,27 @@
           <a:p>
             <a:pPr algn="l"/>
             <a:r>
-              <a:rPr sz="2000" b="0" i="0">
-                <a:solidFill>
-                  <a:srgbClr val="1B1B1B"/>
-                </a:solidFill>
-                <a:latin typeface="Arial"/>
-              </a:rPr>
-              <a:t>OTA rollout, shadow mode, monitoring, and rollback.</a:t>
-            </a:r>
-          </a:p>
-        </p:txBody>
-      </p:sp>
-      <p:sp>
-        <p:nvSpPr>
-          <p:cNvPr id="8" name="Rectangle 7"/>
+              <a:rPr sz="1300" b="1" i="0">
+                <a:solidFill>
+                  <a:srgbClr val="256E8E"/>
+                </a:solidFill>
+                <a:latin typeface="Arial"/>
+              </a:rPr>
+              <a:t>▶  Prompt 7 — Deployment Planning  — paste into the AI</a:t>
+            </a:r>
+          </a:p>
+        </p:txBody>
+      </p:sp>
+      <p:sp>
+        <p:nvSpPr>
+          <p:cNvPr id="9" name="Rectangle 8"/>
           <p:cNvSpPr/>
           <p:nvPr/>
         </p:nvSpPr>
         <p:spPr>
           <a:xfrm>
-            <a:off x="640080" y="6437376"/>
-            <a:ext cx="10908792" cy="13716"/>
+            <a:off x="896112" y="2414016"/>
+            <a:ext cx="10369296" cy="16459"/>
           </a:xfrm>
           <a:prstGeom prst="rect">
             <a:avLst/>
@@ -9165,7 +10306,205 @@
       </p:sp>
       <p:sp>
         <p:nvSpPr>
-          <p:cNvPr id="9" name="TextBox 8"/>
+          <p:cNvPr id="10" name="TextBox 9"/>
+          <p:cNvSpPr txBox="1"/>
+          <p:nvPr/>
+        </p:nvSpPr>
+        <p:spPr>
+          <a:xfrm>
+            <a:off x="896112" y="2523744"/>
+            <a:ext cx="10369296" cy="2743200"/>
+          </a:xfrm>
+          <a:prstGeom prst="rect">
+            <a:avLst/>
+          </a:prstGeom>
+          <a:noFill/>
+        </p:spPr>
+        <p:txBody>
+          <a:bodyPr wrap="square" anchor="t">
+            <a:noAutofit/>
+          </a:bodyPr>
+          <a:lstStyle/>
+          <a:p>
+            <a:pPr algn="l"/>
+            <a:r>
+              <a:rPr sz="1500" b="0" i="0">
+                <a:solidFill>
+                  <a:srgbClr val="1B1B1B"/>
+                </a:solidFill>
+                <a:latin typeface="Arial"/>
+              </a:rPr>
+              <a:t>Create:</a:t>
+            </a:r>
+          </a:p>
+          <a:p>
+            <a:pPr algn="l"/>
+            <a:r>
+              <a:rPr sz="1500" b="0" i="0">
+                <a:solidFill>
+                  <a:srgbClr val="1B1B1B"/>
+                </a:solidFill>
+                <a:latin typeface="Arial"/>
+              </a:rPr>
+              <a:t/>
+            </a:r>
+          </a:p>
+          <a:p>
+            <a:pPr algn="l"/>
+            <a:r>
+              <a:rPr sz="1500" b="0" i="0">
+                <a:solidFill>
+                  <a:srgbClr val="1B1B1B"/>
+                </a:solidFill>
+                <a:latin typeface="Arial"/>
+              </a:rPr>
+              <a:t>•  OTA deployment plan</a:t>
+            </a:r>
+          </a:p>
+          <a:p>
+            <a:pPr algn="l"/>
+            <a:r>
+              <a:rPr sz="1500" b="0" i="0">
+                <a:solidFill>
+                  <a:srgbClr val="1B1B1B"/>
+                </a:solidFill>
+                <a:latin typeface="Arial"/>
+              </a:rPr>
+              <a:t>•  Rollback strategy</a:t>
+            </a:r>
+          </a:p>
+          <a:p>
+            <a:pPr algn="l"/>
+            <a:r>
+              <a:rPr sz="1500" b="0" i="0">
+                <a:solidFill>
+                  <a:srgbClr val="1B1B1B"/>
+                </a:solidFill>
+                <a:latin typeface="Arial"/>
+              </a:rPr>
+              <a:t>•  Monitoring metrics (accuracy, false-alarm rate, driver trust)</a:t>
+            </a:r>
+          </a:p>
+          <a:p>
+            <a:pPr algn="l"/>
+            <a:r>
+              <a:rPr sz="1500" b="0" i="0">
+                <a:solidFill>
+                  <a:srgbClr val="1B1B1B"/>
+                </a:solidFill>
+                <a:latin typeface="Arial"/>
+              </a:rPr>
+              <a:t>•  Release notes</a:t>
+            </a:r>
+          </a:p>
+          <a:p>
+            <a:pPr algn="l"/>
+            <a:r>
+              <a:rPr sz="1500" b="0" i="0">
+                <a:solidFill>
+                  <a:srgbClr val="1B1B1B"/>
+                </a:solidFill>
+                <a:latin typeface="Arial"/>
+              </a:rPr>
+              <a:t>•  Customer impact assessment</a:t>
+            </a:r>
+          </a:p>
+          <a:p>
+            <a:pPr algn="l"/>
+            <a:r>
+              <a:rPr sz="1500" b="0" i="0">
+                <a:solidFill>
+                  <a:srgbClr val="1B1B1B"/>
+                </a:solidFill>
+                <a:latin typeface="Arial"/>
+              </a:rPr>
+              <a:t>•  Success criteria after deployment</a:t>
+            </a:r>
+          </a:p>
+        </p:txBody>
+      </p:sp>
+      <p:sp>
+        <p:nvSpPr>
+          <p:cNvPr id="11" name="TextBox 10"/>
+          <p:cNvSpPr txBox="1"/>
+          <p:nvPr/>
+        </p:nvSpPr>
+        <p:spPr>
+          <a:xfrm>
+            <a:off x="640080" y="5541264"/>
+            <a:ext cx="10881360" cy="457200"/>
+          </a:xfrm>
+          <a:prstGeom prst="rect">
+            <a:avLst/>
+          </a:prstGeom>
+          <a:noFill/>
+        </p:spPr>
+        <p:txBody>
+          <a:bodyPr wrap="square" anchor="t">
+            <a:noAutofit/>
+          </a:bodyPr>
+          <a:lstStyle/>
+          <a:p>
+            <a:pPr algn="l"/>
+            <a:r>
+              <a:rPr sz="1400" b="1" i="1">
+                <a:solidFill>
+                  <a:srgbClr val="256E8E"/>
+                </a:solidFill>
+                <a:latin typeface="Arial"/>
+              </a:rPr>
+              <a:t>Ask the room:   How many teams would this normally take?</a:t>
+            </a:r>
+          </a:p>
+        </p:txBody>
+      </p:sp>
+      <p:sp>
+        <p:nvSpPr>
+          <p:cNvPr id="12" name="Rectangle 11"/>
+          <p:cNvSpPr/>
+          <p:nvPr/>
+        </p:nvSpPr>
+        <p:spPr>
+          <a:xfrm>
+            <a:off x="640080" y="6437376"/>
+            <a:ext cx="10908792" cy="13716"/>
+          </a:xfrm>
+          <a:prstGeom prst="rect">
+            <a:avLst/>
+          </a:prstGeom>
+          <a:solidFill>
+            <a:srgbClr val="E2E2E2"/>
+          </a:solidFill>
+          <a:ln>
+            <a:noFill/>
+          </a:ln>
+          <a:effectLst/>
+        </p:spPr>
+        <p:style>
+          <a:lnRef idx="1">
+            <a:schemeClr val="accent1"/>
+          </a:lnRef>
+          <a:fillRef idx="3">
+            <a:schemeClr val="accent1"/>
+          </a:fillRef>
+          <a:effectRef idx="2">
+            <a:schemeClr val="accent1"/>
+          </a:effectRef>
+          <a:fontRef idx="minor">
+            <a:schemeClr val="lt1"/>
+          </a:fontRef>
+        </p:style>
+        <p:txBody>
+          <a:bodyPr rtlCol="0" anchor="ctr"/>
+          <a:lstStyle/>
+          <a:p>
+            <a:pPr algn="ctr"/>
+          </a:p>
+        </p:txBody>
+      </p:sp>
+      <p:sp>
+        <p:nvSpPr>
+          <p:cNvPr id="13" name="TextBox 12"/>
           <p:cNvSpPr txBox="1"/>
           <p:nvPr/>
         </p:nvSpPr>
@@ -9200,7 +10539,7 @@
       </p:sp>
       <p:sp>
         <p:nvSpPr>
-          <p:cNvPr id="10" name="TextBox 9"/>
+          <p:cNvPr id="14" name="TextBox 13"/>
           <p:cNvSpPr txBox="1"/>
           <p:nvPr/>
         </p:nvSpPr>
@@ -9235,7 +10574,7 @@
       </p:sp>
       <p:sp>
         <p:nvSpPr>
-          <p:cNvPr id="11" name="TextBox 10"/>
+          <p:cNvPr id="15" name="TextBox 14"/>
           <p:cNvSpPr txBox="1"/>
           <p:nvPr/>
         </p:nvSpPr>
@@ -9338,7 +10677,7 @@
         </p:nvSpPr>
         <p:spPr>
           <a:xfrm>
-            <a:off x="640080" y="457200"/>
+            <a:off x="640080" y="438912"/>
             <a:ext cx="10515600" cy="274320"/>
           </a:xfrm>
           <a:prstGeom prst="rect">
@@ -9373,8 +10712,8 @@
         </p:nvSpPr>
         <p:spPr>
           <a:xfrm>
-            <a:off x="640080" y="841248"/>
-            <a:ext cx="10881360" cy="822960"/>
+            <a:off x="640080" y="822960"/>
+            <a:ext cx="10881360" cy="868680"/>
           </a:xfrm>
           <a:prstGeom prst="rect">
             <a:avLst/>
@@ -9389,13 +10728,13 @@
           <a:p>
             <a:pPr algn="l"/>
             <a:r>
-              <a:rPr sz="3000" b="1" i="0">
-                <a:solidFill>
-                  <a:srgbClr val="256E8E"/>
-                </a:solidFill>
-                <a:latin typeface="Arial"/>
-              </a:rPr>
-              <a:t>Why we're here</a:t>
+              <a:rPr sz="2800" b="1" i="0">
+                <a:solidFill>
+                  <a:srgbClr val="174C63"/>
+                </a:solidFill>
+                <a:latin typeface="Arial"/>
+              </a:rPr>
+              <a:t>WHY WE'RE HERE</a:t>
             </a:r>
           </a:p>
         </p:txBody>
@@ -9408,7 +10747,7 @@
         </p:nvSpPr>
         <p:spPr>
           <a:xfrm>
-            <a:off x="658368" y="1591056"/>
+            <a:off x="658368" y="1609344"/>
             <a:ext cx="1005840" cy="41148"/>
           </a:xfrm>
           <a:prstGeom prst="rect">
@@ -9452,7 +10791,7 @@
         </p:nvSpPr>
         <p:spPr>
           <a:xfrm>
-            <a:off x="640080" y="1892807"/>
+            <a:off x="640080" y="1901952"/>
             <a:ext cx="10607040" cy="1463040"/>
           </a:xfrm>
           <a:prstGeom prst="rect">
@@ -9722,7 +11061,7 @@
         </p:nvSpPr>
         <p:spPr>
           <a:xfrm>
-            <a:off x="640080" y="457200"/>
+            <a:off x="640080" y="438912"/>
             <a:ext cx="10515600" cy="274320"/>
           </a:xfrm>
           <a:prstGeom prst="rect">
@@ -9757,8 +11096,8 @@
         </p:nvSpPr>
         <p:spPr>
           <a:xfrm>
-            <a:off x="640080" y="841248"/>
-            <a:ext cx="10881360" cy="822960"/>
+            <a:off x="640080" y="822960"/>
+            <a:ext cx="10881360" cy="868680"/>
           </a:xfrm>
           <a:prstGeom prst="rect">
             <a:avLst/>
@@ -9773,13 +11112,13 @@
           <a:p>
             <a:pPr algn="l"/>
             <a:r>
-              <a:rPr sz="3000" b="1" i="0">
-                <a:solidFill>
-                  <a:srgbClr val="256E8E"/>
-                </a:solidFill>
-                <a:latin typeface="Arial"/>
-              </a:rPr>
-              <a:t>The digital thread</a:t>
+              <a:rPr sz="2800" b="1" i="0">
+                <a:solidFill>
+                  <a:srgbClr val="174C63"/>
+                </a:solidFill>
+                <a:latin typeface="Arial"/>
+              </a:rPr>
+              <a:t>THE DIGITAL THREAD</a:t>
             </a:r>
           </a:p>
         </p:txBody>
@@ -9792,7 +11131,7 @@
         </p:nvSpPr>
         <p:spPr>
           <a:xfrm>
-            <a:off x="658368" y="1591056"/>
+            <a:off x="658368" y="1609344"/>
             <a:ext cx="1005840" cy="41148"/>
           </a:xfrm>
           <a:prstGeom prst="rect">
@@ -9836,7 +11175,7 @@
         </p:nvSpPr>
         <p:spPr>
           <a:xfrm>
-            <a:off x="640080" y="1892807"/>
+            <a:off x="640080" y="1901952"/>
             <a:ext cx="10607040" cy="548640"/>
           </a:xfrm>
           <a:prstGeom prst="rect">
@@ -9865,16 +11204,16 @@
       </p:sp>
       <p:sp>
         <p:nvSpPr>
-          <p:cNvPr id="7" name="Rounded Rectangle 6"/>
+          <p:cNvPr id="7" name="Hexagon 6"/>
           <p:cNvSpPr/>
           <p:nvPr/>
         </p:nvSpPr>
         <p:spPr>
           <a:xfrm>
-            <a:off x="640080" y="3383280"/>
-            <a:ext cx="1604772" cy="960120"/>
-          </a:xfrm>
-          <a:prstGeom prst="roundRect">
+            <a:off x="640080" y="3200400"/>
+            <a:ext cx="1589532" cy="1371600"/>
+          </a:xfrm>
+          <a:prstGeom prst="hexagon">
             <a:avLst/>
           </a:prstGeom>
           <a:solidFill>
@@ -9926,8 +11265,8 @@
         </p:nvSpPr>
         <p:spPr>
           <a:xfrm>
-            <a:off x="2272284" y="3762756"/>
-            <a:ext cx="201168" cy="201168"/>
+            <a:off x="2238756" y="3794760"/>
+            <a:ext cx="237744" cy="182880"/>
           </a:xfrm>
           <a:prstGeom prst="rightArrow">
             <a:avLst/>
@@ -9964,16 +11303,16 @@
       </p:sp>
       <p:sp>
         <p:nvSpPr>
-          <p:cNvPr id="9" name="Rounded Rectangle 8"/>
+          <p:cNvPr id="9" name="Hexagon 8"/>
           <p:cNvSpPr/>
           <p:nvPr/>
         </p:nvSpPr>
         <p:spPr>
           <a:xfrm>
-            <a:off x="2500884" y="3383280"/>
-            <a:ext cx="1604772" cy="960120"/>
-          </a:xfrm>
-          <a:prstGeom prst="roundRect">
+            <a:off x="2503932" y="3200400"/>
+            <a:ext cx="1589532" cy="1371600"/>
+          </a:xfrm>
+          <a:prstGeom prst="hexagon">
             <a:avLst/>
           </a:prstGeom>
           <a:solidFill>
@@ -10025,8 +11364,8 @@
         </p:nvSpPr>
         <p:spPr>
           <a:xfrm>
-            <a:off x="4133088" y="3762756"/>
-            <a:ext cx="201168" cy="201168"/>
+            <a:off x="4102607" y="3794760"/>
+            <a:ext cx="237744" cy="182880"/>
           </a:xfrm>
           <a:prstGeom prst="rightArrow">
             <a:avLst/>
@@ -10063,16 +11402,16 @@
       </p:sp>
       <p:sp>
         <p:nvSpPr>
-          <p:cNvPr id="11" name="Rounded Rectangle 10"/>
+          <p:cNvPr id="11" name="Hexagon 10"/>
           <p:cNvSpPr/>
           <p:nvPr/>
         </p:nvSpPr>
         <p:spPr>
           <a:xfrm>
-            <a:off x="4361688" y="3383280"/>
-            <a:ext cx="1604772" cy="960120"/>
-          </a:xfrm>
-          <a:prstGeom prst="roundRect">
+            <a:off x="4367784" y="3200400"/>
+            <a:ext cx="1589532" cy="1371600"/>
+          </a:xfrm>
+          <a:prstGeom prst="hexagon">
             <a:avLst/>
           </a:prstGeom>
           <a:solidFill>
@@ -10124,8 +11463,8 @@
         </p:nvSpPr>
         <p:spPr>
           <a:xfrm>
-            <a:off x="5993892" y="3762756"/>
-            <a:ext cx="201168" cy="201168"/>
+            <a:off x="5966459" y="3794760"/>
+            <a:ext cx="237744" cy="182880"/>
           </a:xfrm>
           <a:prstGeom prst="rightArrow">
             <a:avLst/>
@@ -10162,16 +11501,16 @@
       </p:sp>
       <p:sp>
         <p:nvSpPr>
-          <p:cNvPr id="13" name="Rounded Rectangle 12"/>
+          <p:cNvPr id="13" name="Hexagon 12"/>
           <p:cNvSpPr/>
           <p:nvPr/>
         </p:nvSpPr>
         <p:spPr>
           <a:xfrm>
-            <a:off x="6222492" y="3383280"/>
-            <a:ext cx="1604772" cy="960120"/>
-          </a:xfrm>
-          <a:prstGeom prst="roundRect">
+            <a:off x="6231636" y="3200400"/>
+            <a:ext cx="1589532" cy="1371600"/>
+          </a:xfrm>
+          <a:prstGeom prst="hexagon">
             <a:avLst/>
           </a:prstGeom>
           <a:solidFill>
@@ -10223,8 +11562,8 @@
         </p:nvSpPr>
         <p:spPr>
           <a:xfrm>
-            <a:off x="7854696" y="3762756"/>
-            <a:ext cx="201168" cy="201168"/>
+            <a:off x="7830311" y="3794760"/>
+            <a:ext cx="237744" cy="182880"/>
           </a:xfrm>
           <a:prstGeom prst="rightArrow">
             <a:avLst/>
@@ -10261,16 +11600,16 @@
       </p:sp>
       <p:sp>
         <p:nvSpPr>
-          <p:cNvPr id="15" name="Rounded Rectangle 14"/>
+          <p:cNvPr id="15" name="Hexagon 14"/>
           <p:cNvSpPr/>
           <p:nvPr/>
         </p:nvSpPr>
         <p:spPr>
           <a:xfrm>
-            <a:off x="8083296" y="3383280"/>
-            <a:ext cx="1604772" cy="960120"/>
-          </a:xfrm>
-          <a:prstGeom prst="roundRect">
+            <a:off x="8095487" y="3200400"/>
+            <a:ext cx="1589532" cy="1371600"/>
+          </a:xfrm>
+          <a:prstGeom prst="hexagon">
             <a:avLst/>
           </a:prstGeom>
           <a:solidFill>
@@ -10322,8 +11661,8 @@
         </p:nvSpPr>
         <p:spPr>
           <a:xfrm>
-            <a:off x="9715499" y="3762756"/>
-            <a:ext cx="201168" cy="201168"/>
+            <a:off x="9694163" y="3794760"/>
+            <a:ext cx="237744" cy="182880"/>
           </a:xfrm>
           <a:prstGeom prst="rightArrow">
             <a:avLst/>
@@ -10360,16 +11699,16 @@
       </p:sp>
       <p:sp>
         <p:nvSpPr>
-          <p:cNvPr id="17" name="Rounded Rectangle 16"/>
+          <p:cNvPr id="17" name="Hexagon 16"/>
           <p:cNvSpPr/>
           <p:nvPr/>
         </p:nvSpPr>
         <p:spPr>
           <a:xfrm>
-            <a:off x="9944100" y="3383280"/>
-            <a:ext cx="1604772" cy="960120"/>
-          </a:xfrm>
-          <a:prstGeom prst="roundRect">
+            <a:off x="9959340" y="3200400"/>
+            <a:ext cx="1589532" cy="1371600"/>
+          </a:xfrm>
+          <a:prstGeom prst="hexagon">
             <a:avLst/>
           </a:prstGeom>
           <a:solidFill>
@@ -10632,7 +11971,7 @@
         </p:nvSpPr>
         <p:spPr>
           <a:xfrm>
-            <a:off x="640080" y="457200"/>
+            <a:off x="640080" y="438912"/>
             <a:ext cx="10515600" cy="274320"/>
           </a:xfrm>
           <a:prstGeom prst="rect">
@@ -10667,8 +12006,8 @@
         </p:nvSpPr>
         <p:spPr>
           <a:xfrm>
-            <a:off x="640080" y="841248"/>
-            <a:ext cx="10881360" cy="822960"/>
+            <a:off x="640080" y="822960"/>
+            <a:ext cx="10881360" cy="868680"/>
           </a:xfrm>
           <a:prstGeom prst="rect">
             <a:avLst/>
@@ -10683,13 +12022,13 @@
           <a:p>
             <a:pPr algn="l"/>
             <a:r>
-              <a:rPr sz="3000" b="1" i="0">
-                <a:solidFill>
-                  <a:srgbClr val="256E8E"/>
-                </a:solidFill>
-                <a:latin typeface="Arial"/>
-              </a:rPr>
-              <a:t>Traditional vs. AI-enabled timeline</a:t>
+              <a:rPr sz="2800" b="1" i="0">
+                <a:solidFill>
+                  <a:srgbClr val="174C63"/>
+                </a:solidFill>
+                <a:latin typeface="Arial"/>
+              </a:rPr>
+              <a:t>TRADITIONAL VS. AI-ENABLED TIMELINE</a:t>
             </a:r>
           </a:p>
         </p:txBody>
@@ -10702,7 +12041,7 @@
         </p:nvSpPr>
         <p:spPr>
           <a:xfrm>
-            <a:off x="658368" y="1591056"/>
+            <a:off x="658368" y="1609344"/>
             <a:ext cx="1005840" cy="41148"/>
           </a:xfrm>
           <a:prstGeom prst="rect">
@@ -11207,7 +12546,7 @@
         </p:nvSpPr>
         <p:spPr>
           <a:xfrm>
-            <a:off x="640080" y="457200"/>
+            <a:off x="640080" y="438912"/>
             <a:ext cx="10515600" cy="274320"/>
           </a:xfrm>
           <a:prstGeom prst="rect">
@@ -11242,8 +12581,8 @@
         </p:nvSpPr>
         <p:spPr>
           <a:xfrm>
-            <a:off x="640080" y="841248"/>
-            <a:ext cx="10881360" cy="822960"/>
+            <a:off x="640080" y="822960"/>
+            <a:ext cx="10881360" cy="868680"/>
           </a:xfrm>
           <a:prstGeom prst="rect">
             <a:avLst/>
@@ -11258,13 +12597,13 @@
           <a:p>
             <a:pPr algn="l"/>
             <a:r>
-              <a:rPr sz="3000" b="1" i="0">
-                <a:solidFill>
-                  <a:srgbClr val="256E8E"/>
-                </a:solidFill>
-                <a:latin typeface="Arial"/>
-              </a:rPr>
-              <a:t>Where humans stayed in the loop</a:t>
+              <a:rPr sz="2800" b="1" i="0">
+                <a:solidFill>
+                  <a:srgbClr val="174C63"/>
+                </a:solidFill>
+                <a:latin typeface="Arial"/>
+              </a:rPr>
+              <a:t>WHERE HUMANS STAYED IN THE LOOP</a:t>
             </a:r>
           </a:p>
         </p:txBody>
@@ -11277,7 +12616,7 @@
         </p:nvSpPr>
         <p:spPr>
           <a:xfrm>
-            <a:off x="658368" y="1591056"/>
+            <a:off x="658368" y="1609344"/>
             <a:ext cx="1005840" cy="41148"/>
           </a:xfrm>
           <a:prstGeom prst="rect">
@@ -11315,14 +12654,447 @@
       </p:sp>
       <p:sp>
         <p:nvSpPr>
-          <p:cNvPr id="6" name="TextBox 5"/>
+          <p:cNvPr id="6" name="Hexagon 5"/>
+          <p:cNvSpPr/>
+          <p:nvPr/>
+        </p:nvSpPr>
+        <p:spPr>
+          <a:xfrm>
+            <a:off x="5143500" y="1600199"/>
+            <a:ext cx="1874519" cy="1554480"/>
+          </a:xfrm>
+          <a:prstGeom prst="hexagon">
+            <a:avLst/>
+          </a:prstGeom>
+          <a:solidFill>
+            <a:srgbClr val="174C63"/>
+          </a:solidFill>
+          <a:ln>
+            <a:noFill/>
+          </a:ln>
+          <a:effectLst/>
+        </p:spPr>
+        <p:style>
+          <a:lnRef idx="1">
+            <a:schemeClr val="accent1"/>
+          </a:lnRef>
+          <a:fillRef idx="3">
+            <a:schemeClr val="accent1"/>
+          </a:fillRef>
+          <a:effectRef idx="2">
+            <a:schemeClr val="accent1"/>
+          </a:effectRef>
+          <a:fontRef idx="minor">
+            <a:schemeClr val="lt1"/>
+          </a:fontRef>
+        </p:style>
+        <p:txBody>
+          <a:bodyPr rtlCol="0" anchor="ctr" wrap="square">
+            <a:noAutofit/>
+          </a:bodyPr>
+          <a:lstStyle/>
+          <a:p>
+            <a:pPr algn="ctr"/>
+            <a:r>
+              <a:rPr sz="1100" b="1" i="0">
+                <a:solidFill>
+                  <a:srgbClr val="FFFFFF"/>
+                </a:solidFill>
+                <a:latin typeface="Arial"/>
+              </a:rPr>
+              <a:t>Confidence</a:t>
+            </a:r>
+          </a:p>
+          <a:p>
+            <a:pPr algn="ctr"/>
+            <a:r>
+              <a:rPr sz="1100" b="1" i="0">
+                <a:solidFill>
+                  <a:srgbClr val="FFFFFF"/>
+                </a:solidFill>
+                <a:latin typeface="Arial"/>
+              </a:rPr>
+              <a:t>thresholds</a:t>
+            </a:r>
+          </a:p>
+        </p:txBody>
+      </p:sp>
+      <p:sp>
+        <p:nvSpPr>
+          <p:cNvPr id="7" name="Hexagon 6"/>
+          <p:cNvSpPr/>
+          <p:nvPr/>
+        </p:nvSpPr>
+        <p:spPr>
+          <a:xfrm>
+            <a:off x="7321207" y="2400299"/>
+            <a:ext cx="1874519" cy="1554480"/>
+          </a:xfrm>
+          <a:prstGeom prst="hexagon">
+            <a:avLst/>
+          </a:prstGeom>
+          <a:solidFill>
+            <a:srgbClr val="1C5871"/>
+          </a:solidFill>
+          <a:ln>
+            <a:noFill/>
+          </a:ln>
+          <a:effectLst/>
+        </p:spPr>
+        <p:style>
+          <a:lnRef idx="1">
+            <a:schemeClr val="accent1"/>
+          </a:lnRef>
+          <a:fillRef idx="3">
+            <a:schemeClr val="accent1"/>
+          </a:fillRef>
+          <a:effectRef idx="2">
+            <a:schemeClr val="accent1"/>
+          </a:effectRef>
+          <a:fontRef idx="minor">
+            <a:schemeClr val="lt1"/>
+          </a:fontRef>
+        </p:style>
+        <p:txBody>
+          <a:bodyPr rtlCol="0" anchor="ctr" wrap="square">
+            <a:noAutofit/>
+          </a:bodyPr>
+          <a:lstStyle/>
+          <a:p>
+            <a:pPr algn="ctr"/>
+            <a:r>
+              <a:rPr sz="1100" b="1" i="0">
+                <a:solidFill>
+                  <a:srgbClr val="FFFFFF"/>
+                </a:solidFill>
+                <a:latin typeface="Arial"/>
+              </a:rPr>
+              <a:t>Safety</a:t>
+            </a:r>
+          </a:p>
+          <a:p>
+            <a:pPr algn="ctr"/>
+            <a:r>
+              <a:rPr sz="1100" b="1" i="0">
+                <a:solidFill>
+                  <a:srgbClr val="FFFFFF"/>
+                </a:solidFill>
+                <a:latin typeface="Arial"/>
+              </a:rPr>
+              <a:t>aggressiveness</a:t>
+            </a:r>
+          </a:p>
+        </p:txBody>
+      </p:sp>
+      <p:sp>
+        <p:nvSpPr>
+          <p:cNvPr id="8" name="Hexagon 7"/>
+          <p:cNvSpPr/>
+          <p:nvPr/>
+        </p:nvSpPr>
+        <p:spPr>
+          <a:xfrm>
+            <a:off x="7321207" y="4000500"/>
+            <a:ext cx="1874519" cy="1554480"/>
+          </a:xfrm>
+          <a:prstGeom prst="hexagon">
+            <a:avLst/>
+          </a:prstGeom>
+          <a:solidFill>
+            <a:srgbClr val="216480"/>
+          </a:solidFill>
+          <a:ln>
+            <a:noFill/>
+          </a:ln>
+          <a:effectLst/>
+        </p:spPr>
+        <p:style>
+          <a:lnRef idx="1">
+            <a:schemeClr val="accent1"/>
+          </a:lnRef>
+          <a:fillRef idx="3">
+            <a:schemeClr val="accent1"/>
+          </a:fillRef>
+          <a:effectRef idx="2">
+            <a:schemeClr val="accent1"/>
+          </a:effectRef>
+          <a:fontRef idx="minor">
+            <a:schemeClr val="lt1"/>
+          </a:fontRef>
+        </p:style>
+        <p:txBody>
+          <a:bodyPr rtlCol="0" anchor="ctr" wrap="square">
+            <a:noAutofit/>
+          </a:bodyPr>
+          <a:lstStyle/>
+          <a:p>
+            <a:pPr algn="ctr"/>
+            <a:r>
+              <a:rPr sz="1100" b="1" i="0">
+                <a:solidFill>
+                  <a:srgbClr val="FFFFFF"/>
+                </a:solidFill>
+                <a:latin typeface="Arial"/>
+              </a:rPr>
+              <a:t>Bias</a:t>
+            </a:r>
+          </a:p>
+          <a:p>
+            <a:pPr algn="ctr"/>
+            <a:r>
+              <a:rPr sz="1100" b="1" i="0">
+                <a:solidFill>
+                  <a:srgbClr val="FFFFFF"/>
+                </a:solidFill>
+                <a:latin typeface="Arial"/>
+              </a:rPr>
+              <a:t>checks</a:t>
+            </a:r>
+          </a:p>
+        </p:txBody>
+      </p:sp>
+      <p:sp>
+        <p:nvSpPr>
+          <p:cNvPr id="9" name="Hexagon 8"/>
+          <p:cNvSpPr/>
+          <p:nvPr/>
+        </p:nvSpPr>
+        <p:spPr>
+          <a:xfrm>
+            <a:off x="5143500" y="4800600"/>
+            <a:ext cx="1874519" cy="1554480"/>
+          </a:xfrm>
+          <a:prstGeom prst="hexagon">
+            <a:avLst/>
+          </a:prstGeom>
+          <a:solidFill>
+            <a:srgbClr val="27708F"/>
+          </a:solidFill>
+          <a:ln>
+            <a:noFill/>
+          </a:ln>
+          <a:effectLst/>
+        </p:spPr>
+        <p:style>
+          <a:lnRef idx="1">
+            <a:schemeClr val="accent1"/>
+          </a:lnRef>
+          <a:fillRef idx="3">
+            <a:schemeClr val="accent1"/>
+          </a:fillRef>
+          <a:effectRef idx="2">
+            <a:schemeClr val="accent1"/>
+          </a:effectRef>
+          <a:fontRef idx="minor">
+            <a:schemeClr val="lt1"/>
+          </a:fontRef>
+        </p:style>
+        <p:txBody>
+          <a:bodyPr rtlCol="0" anchor="ctr" wrap="square">
+            <a:noAutofit/>
+          </a:bodyPr>
+          <a:lstStyle/>
+          <a:p>
+            <a:pPr algn="ctr"/>
+            <a:r>
+              <a:rPr sz="1100" b="1" i="0">
+                <a:solidFill>
+                  <a:srgbClr val="FFFFFF"/>
+                </a:solidFill>
+                <a:latin typeface="Arial"/>
+              </a:rPr>
+              <a:t>Accountability</a:t>
+            </a:r>
+          </a:p>
+        </p:txBody>
+      </p:sp>
+      <p:sp>
+        <p:nvSpPr>
+          <p:cNvPr id="10" name="Hexagon 9"/>
+          <p:cNvSpPr/>
+          <p:nvPr/>
+        </p:nvSpPr>
+        <p:spPr>
+          <a:xfrm>
+            <a:off x="2965792" y="4000500"/>
+            <a:ext cx="1874519" cy="1554480"/>
+          </a:xfrm>
+          <a:prstGeom prst="hexagon">
+            <a:avLst/>
+          </a:prstGeom>
+          <a:solidFill>
+            <a:srgbClr val="2C7C9E"/>
+          </a:solidFill>
+          <a:ln>
+            <a:noFill/>
+          </a:ln>
+          <a:effectLst/>
+        </p:spPr>
+        <p:style>
+          <a:lnRef idx="1">
+            <a:schemeClr val="accent1"/>
+          </a:lnRef>
+          <a:fillRef idx="3">
+            <a:schemeClr val="accent1"/>
+          </a:fillRef>
+          <a:effectRef idx="2">
+            <a:schemeClr val="accent1"/>
+          </a:effectRef>
+          <a:fontRef idx="minor">
+            <a:schemeClr val="lt1"/>
+          </a:fontRef>
+        </p:style>
+        <p:txBody>
+          <a:bodyPr rtlCol="0" anchor="ctr" wrap="square">
+            <a:noAutofit/>
+          </a:bodyPr>
+          <a:lstStyle/>
+          <a:p>
+            <a:pPr algn="ctr"/>
+            <a:r>
+              <a:rPr sz="1100" b="1" i="0">
+                <a:solidFill>
+                  <a:srgbClr val="FFFFFF"/>
+                </a:solidFill>
+                <a:latin typeface="Arial"/>
+              </a:rPr>
+              <a:t>Governance</a:t>
+            </a:r>
+          </a:p>
+        </p:txBody>
+      </p:sp>
+      <p:sp>
+        <p:nvSpPr>
+          <p:cNvPr id="11" name="Hexagon 10"/>
+          <p:cNvSpPr/>
+          <p:nvPr/>
+        </p:nvSpPr>
+        <p:spPr>
+          <a:xfrm>
+            <a:off x="2965792" y="2400299"/>
+            <a:ext cx="1874519" cy="1554480"/>
+          </a:xfrm>
+          <a:prstGeom prst="hexagon">
+            <a:avLst/>
+          </a:prstGeom>
+          <a:solidFill>
+            <a:srgbClr val="3288AD"/>
+          </a:solidFill>
+          <a:ln>
+            <a:noFill/>
+          </a:ln>
+          <a:effectLst/>
+        </p:spPr>
+        <p:style>
+          <a:lnRef idx="1">
+            <a:schemeClr val="accent1"/>
+          </a:lnRef>
+          <a:fillRef idx="3">
+            <a:schemeClr val="accent1"/>
+          </a:fillRef>
+          <a:effectRef idx="2">
+            <a:schemeClr val="accent1"/>
+          </a:effectRef>
+          <a:fontRef idx="minor">
+            <a:schemeClr val="lt1"/>
+          </a:fontRef>
+        </p:style>
+        <p:txBody>
+          <a:bodyPr rtlCol="0" anchor="ctr" wrap="square">
+            <a:noAutofit/>
+          </a:bodyPr>
+          <a:lstStyle/>
+          <a:p>
+            <a:pPr algn="ctr"/>
+            <a:r>
+              <a:rPr sz="1100" b="1" i="0">
+                <a:solidFill>
+                  <a:srgbClr val="FFFFFF"/>
+                </a:solidFill>
+                <a:latin typeface="Arial"/>
+              </a:rPr>
+              <a:t>Reviews</a:t>
+            </a:r>
+          </a:p>
+        </p:txBody>
+      </p:sp>
+      <p:sp>
+        <p:nvSpPr>
+          <p:cNvPr id="12" name="Hexagon 11"/>
+          <p:cNvSpPr/>
+          <p:nvPr/>
+        </p:nvSpPr>
+        <p:spPr>
+          <a:xfrm>
+            <a:off x="5143500" y="3200399"/>
+            <a:ext cx="1874519" cy="1554480"/>
+          </a:xfrm>
+          <a:prstGeom prst="hexagon">
+            <a:avLst/>
+          </a:prstGeom>
+          <a:solidFill>
+            <a:srgbClr val="F0A500"/>
+          </a:solidFill>
+          <a:ln>
+            <a:noFill/>
+          </a:ln>
+          <a:effectLst/>
+        </p:spPr>
+        <p:style>
+          <a:lnRef idx="1">
+            <a:schemeClr val="accent1"/>
+          </a:lnRef>
+          <a:fillRef idx="3">
+            <a:schemeClr val="accent1"/>
+          </a:fillRef>
+          <a:effectRef idx="2">
+            <a:schemeClr val="accent1"/>
+          </a:effectRef>
+          <a:fontRef idx="minor">
+            <a:schemeClr val="lt1"/>
+          </a:fontRef>
+        </p:style>
+        <p:txBody>
+          <a:bodyPr rtlCol="0" anchor="ctr" wrap="square">
+            <a:noAutofit/>
+          </a:bodyPr>
+          <a:lstStyle/>
+          <a:p>
+            <a:pPr algn="ctr"/>
+            <a:r>
+              <a:rPr sz="1300" b="1" i="0">
+                <a:solidFill>
+                  <a:srgbClr val="1B1B1B"/>
+                </a:solidFill>
+                <a:latin typeface="Arial"/>
+              </a:rPr>
+              <a:t>Humans</a:t>
+            </a:r>
+          </a:p>
+          <a:p>
+            <a:pPr algn="ctr"/>
+            <a:r>
+              <a:rPr sz="1300" b="1" i="0">
+                <a:solidFill>
+                  <a:srgbClr val="1B1B1B"/>
+                </a:solidFill>
+                <a:latin typeface="Arial"/>
+              </a:rPr>
+              <a:t>in the loop</a:t>
+            </a:r>
+          </a:p>
+        </p:txBody>
+      </p:sp>
+      <p:sp>
+        <p:nvSpPr>
+          <p:cNvPr id="13" name="TextBox 12"/>
           <p:cNvSpPr txBox="1"/>
           <p:nvPr/>
         </p:nvSpPr>
         <p:spPr>
           <a:xfrm>
-            <a:off x="640080" y="1892807"/>
-            <a:ext cx="10607040" cy="1463040"/>
+            <a:off x="640080" y="5943600"/>
+            <a:ext cx="10881360" cy="365760"/>
           </a:xfrm>
           <a:prstGeom prst="rect">
             <a:avLst/>
@@ -11335,35 +13107,11 @@
           </a:bodyPr>
           <a:lstStyle/>
           <a:p>
-            <a:pPr algn="l"/>
-            <a:r>
-              <a:rPr sz="2000" b="0" i="0">
-                <a:solidFill>
-                  <a:srgbClr val="1B1B1B"/>
-                </a:solidFill>
-                <a:latin typeface="Arial"/>
-              </a:rPr>
-              <a:t>Confidence thresholds · safety aggressiveness · bias checks · accountability.</a:t>
-            </a:r>
-          </a:p>
-          <a:p>
-            <a:pPr algn="l"/>
-            <a:r>
-              <a:rPr sz="2000" b="0" i="0">
-                <a:solidFill>
-                  <a:srgbClr val="1B1B1B"/>
-                </a:solidFill>
-                <a:latin typeface="Arial"/>
-              </a:rPr>
-              <a:t/>
-            </a:r>
-          </a:p>
-          <a:p>
-            <a:pPr algn="l"/>
-            <a:r>
-              <a:rPr sz="2000" b="0" i="0">
-                <a:solidFill>
-                  <a:srgbClr val="1B1B1B"/>
+            <a:pPr algn="ctr"/>
+            <a:r>
+              <a:rPr sz="1600" b="0" i="1">
+                <a:solidFill>
+                  <a:srgbClr val="595959"/>
                 </a:solidFill>
                 <a:latin typeface="Arial"/>
               </a:rPr>
@@ -11374,7 +13122,7 @@
       </p:sp>
       <p:sp>
         <p:nvSpPr>
-          <p:cNvPr id="7" name="Rectangle 6"/>
+          <p:cNvPr id="14" name="Rectangle 13"/>
           <p:cNvSpPr/>
           <p:nvPr/>
         </p:nvSpPr>
@@ -11418,7 +13166,7 @@
       </p:sp>
       <p:sp>
         <p:nvSpPr>
-          <p:cNvPr id="8" name="TextBox 7"/>
+          <p:cNvPr id="15" name="TextBox 14"/>
           <p:cNvSpPr txBox="1"/>
           <p:nvPr/>
         </p:nvSpPr>
@@ -11453,7 +13201,7 @@
       </p:sp>
       <p:sp>
         <p:nvSpPr>
-          <p:cNvPr id="9" name="TextBox 8"/>
+          <p:cNvPr id="16" name="TextBox 15"/>
           <p:cNvSpPr txBox="1"/>
           <p:nvPr/>
         </p:nvSpPr>
@@ -11488,7 +13236,7 @@
       </p:sp>
       <p:sp>
         <p:nvSpPr>
-          <p:cNvPr id="10" name="TextBox 9"/>
+          <p:cNvPr id="17" name="TextBox 16"/>
           <p:cNvSpPr txBox="1"/>
           <p:nvPr/>
         </p:nvSpPr>
@@ -12075,7 +13823,7 @@
         </p:nvSpPr>
         <p:spPr>
           <a:xfrm>
-            <a:off x="640080" y="457200"/>
+            <a:off x="640080" y="438912"/>
             <a:ext cx="10515600" cy="274320"/>
           </a:xfrm>
           <a:prstGeom prst="rect">
@@ -12110,8 +13858,8 @@
         </p:nvSpPr>
         <p:spPr>
           <a:xfrm>
-            <a:off x="640080" y="841248"/>
-            <a:ext cx="10881360" cy="822960"/>
+            <a:off x="640080" y="822960"/>
+            <a:ext cx="10881360" cy="868680"/>
           </a:xfrm>
           <a:prstGeom prst="rect">
             <a:avLst/>
@@ -12126,13 +13874,13 @@
           <a:p>
             <a:pPr algn="l"/>
             <a:r>
-              <a:rPr sz="3000" b="1" i="0">
-                <a:solidFill>
-                  <a:srgbClr val="256E8E"/>
-                </a:solidFill>
-                <a:latin typeface="Arial"/>
-              </a:rPr>
-              <a:t>Future operating model</a:t>
+              <a:rPr sz="2800" b="1" i="0">
+                <a:solidFill>
+                  <a:srgbClr val="174C63"/>
+                </a:solidFill>
+                <a:latin typeface="Arial"/>
+              </a:rPr>
+              <a:t>FUTURE OPERATING MODEL</a:t>
             </a:r>
           </a:p>
         </p:txBody>
@@ -12145,7 +13893,7 @@
         </p:nvSpPr>
         <p:spPr>
           <a:xfrm>
-            <a:off x="658368" y="1591056"/>
+            <a:off x="658368" y="1609344"/>
             <a:ext cx="1005840" cy="41148"/>
           </a:xfrm>
           <a:prstGeom prst="rect">
@@ -12189,7 +13937,7 @@
         </p:nvSpPr>
         <p:spPr>
           <a:xfrm>
-            <a:off x="640080" y="1892807"/>
+            <a:off x="640080" y="1901952"/>
             <a:ext cx="10607040" cy="1463040"/>
           </a:xfrm>
           <a:prstGeom prst="rect">
@@ -12435,7 +14183,7 @@
         </p:nvSpPr>
         <p:spPr>
           <a:xfrm>
-            <a:off x="640080" y="457200"/>
+            <a:off x="640080" y="438912"/>
             <a:ext cx="10515600" cy="274320"/>
           </a:xfrm>
           <a:prstGeom prst="rect">
@@ -12470,8 +14218,8 @@
         </p:nvSpPr>
         <p:spPr>
           <a:xfrm>
-            <a:off x="640080" y="841248"/>
-            <a:ext cx="10881360" cy="822960"/>
+            <a:off x="640080" y="822960"/>
+            <a:ext cx="10881360" cy="868680"/>
           </a:xfrm>
           <a:prstGeom prst="rect">
             <a:avLst/>
@@ -12486,13 +14234,13 @@
           <a:p>
             <a:pPr algn="l"/>
             <a:r>
-              <a:rPr sz="3000" b="1" i="0">
-                <a:solidFill>
-                  <a:srgbClr val="256E8E"/>
-                </a:solidFill>
-                <a:latin typeface="Arial"/>
-              </a:rPr>
-              <a:t>Key takeaways</a:t>
+              <a:rPr sz="2800" b="1" i="0">
+                <a:solidFill>
+                  <a:srgbClr val="174C63"/>
+                </a:solidFill>
+                <a:latin typeface="Arial"/>
+              </a:rPr>
+              <a:t>KEY TAKEAWAYS</a:t>
             </a:r>
           </a:p>
         </p:txBody>
@@ -12505,7 +14253,7 @@
         </p:nvSpPr>
         <p:spPr>
           <a:xfrm>
-            <a:off x="658368" y="1591056"/>
+            <a:off x="658368" y="1609344"/>
             <a:ext cx="1005840" cy="41148"/>
           </a:xfrm>
           <a:prstGeom prst="rect">
@@ -12549,7 +14297,7 @@
         </p:nvSpPr>
         <p:spPr>
           <a:xfrm>
-            <a:off x="640080" y="2167127"/>
+            <a:off x="640080" y="2176272"/>
             <a:ext cx="3383280" cy="1463040"/>
           </a:xfrm>
           <a:prstGeom prst="roundRect">
@@ -12604,7 +14352,7 @@
         </p:nvSpPr>
         <p:spPr>
           <a:xfrm>
-            <a:off x="4434840" y="2167127"/>
+            <a:off x="4434840" y="2176272"/>
             <a:ext cx="3383280" cy="1463040"/>
           </a:xfrm>
           <a:prstGeom prst="roundRect">
@@ -12659,7 +14407,7 @@
         </p:nvSpPr>
         <p:spPr>
           <a:xfrm>
-            <a:off x="8229600" y="2167127"/>
+            <a:off x="8229600" y="2176272"/>
             <a:ext cx="3383280" cy="1463040"/>
           </a:xfrm>
           <a:prstGeom prst="roundRect">
@@ -12714,7 +14462,7 @@
         </p:nvSpPr>
         <p:spPr>
           <a:xfrm>
-            <a:off x="640080" y="3995927"/>
+            <a:off x="640080" y="4005072"/>
             <a:ext cx="10607040" cy="548640"/>
           </a:xfrm>
           <a:prstGeom prst="rect">
@@ -12960,17 +14708,17 @@
         </p:nvSpPr>
         <p:spPr>
           <a:xfrm>
-            <a:off x="10149840" y="-2103120"/>
-            <a:ext cx="5120640" cy="5120640"/>
+            <a:off x="4956048" y="1188720"/>
+            <a:ext cx="2286000" cy="2286000"/>
           </a:xfrm>
           <a:prstGeom prst="ellipse">
             <a:avLst/>
           </a:prstGeom>
-          <a:solidFill>
-            <a:srgbClr val="256E8E"/>
-          </a:solidFill>
-          <a:ln>
-            <a:noFill/>
+          <a:noFill/>
+          <a:ln w="50800">
+            <a:solidFill>
+              <a:srgbClr val="FFFFFF"/>
+            </a:solidFill>
           </a:ln>
           <a:effectLst/>
         </p:spPr>
@@ -12998,45 +14746,36 @@
       </p:sp>
       <p:sp>
         <p:nvSpPr>
-          <p:cNvPr id="4" name="Oval 3"/>
-          <p:cNvSpPr/>
-          <p:nvPr/>
-        </p:nvSpPr>
-        <p:spPr>
-          <a:xfrm>
-            <a:off x="11064240" y="3566160"/>
-            <a:ext cx="4206240" cy="4206240"/>
-          </a:xfrm>
-          <a:prstGeom prst="ellipse">
-            <a:avLst/>
-          </a:prstGeom>
-          <a:solidFill>
-            <a:srgbClr val="3288AD"/>
-          </a:solidFill>
-          <a:ln>
-            <a:noFill/>
-          </a:ln>
-          <a:effectLst/>
-        </p:spPr>
-        <p:style>
-          <a:lnRef idx="1">
-            <a:schemeClr val="accent1"/>
-          </a:lnRef>
-          <a:fillRef idx="3">
-            <a:schemeClr val="accent1"/>
-          </a:fillRef>
-          <a:effectRef idx="2">
-            <a:schemeClr val="accent1"/>
-          </a:effectRef>
-          <a:fontRef idx="minor">
-            <a:schemeClr val="lt1"/>
-          </a:fontRef>
-        </p:style>
-        <p:txBody>
-          <a:bodyPr rtlCol="0" anchor="ctr"/>
+          <p:cNvPr id="4" name="TextBox 3"/>
+          <p:cNvSpPr txBox="1"/>
+          <p:nvPr/>
+        </p:nvSpPr>
+        <p:spPr>
+          <a:xfrm>
+            <a:off x="4956048" y="1280160"/>
+            <a:ext cx="2286000" cy="2148840"/>
+          </a:xfrm>
+          <a:prstGeom prst="rect">
+            <a:avLst/>
+          </a:prstGeom>
+          <a:noFill/>
+        </p:spPr>
+        <p:txBody>
+          <a:bodyPr wrap="square" anchor="ctr">
+            <a:noAutofit/>
+          </a:bodyPr>
           <a:lstStyle/>
           <a:p>
             <a:pPr algn="ctr"/>
+            <a:r>
+              <a:rPr sz="9600" b="1" i="0">
+                <a:solidFill>
+                  <a:srgbClr val="FFFFFF"/>
+                </a:solidFill>
+                <a:latin typeface="Arial"/>
+              </a:rPr>
+              <a:t>?</a:t>
+            </a:r>
           </a:p>
         </p:txBody>
       </p:sp>
@@ -13048,8 +14787,8 @@
         </p:nvSpPr>
         <p:spPr>
           <a:xfrm>
-            <a:off x="731520" y="548640"/>
-            <a:ext cx="8229600" cy="365760"/>
+            <a:off x="0" y="3840480"/>
+            <a:ext cx="12191695" cy="731520"/>
           </a:xfrm>
           <a:prstGeom prst="rect">
             <a:avLst/>
@@ -13062,70 +14801,50 @@
           </a:bodyPr>
           <a:lstStyle/>
           <a:p>
-            <a:pPr algn="l"/>
-            <a:r>
-              <a:rPr sz="1400" b="1" i="0">
+            <a:pPr algn="ctr"/>
+            <a:r>
+              <a:rPr sz="3000" b="1" i="0">
                 <a:solidFill>
                   <a:srgbClr val="FFFFFF"/>
                 </a:solidFill>
                 <a:latin typeface="Arial"/>
               </a:rPr>
-              <a:t>INDUSTRIAL DEVOPS NOW</a:t>
-            </a:r>
-          </a:p>
-        </p:txBody>
-      </p:sp>
-      <p:sp>
-        <p:nvSpPr>
-          <p:cNvPr id="6" name="Rounded Rectangle 5"/>
-          <p:cNvSpPr/>
-          <p:nvPr/>
-        </p:nvSpPr>
-        <p:spPr>
-          <a:xfrm>
-            <a:off x="731520" y="1554480"/>
-            <a:ext cx="3383280" cy="502920"/>
-          </a:xfrm>
-          <a:prstGeom prst="roundRect">
-            <a:avLst/>
-          </a:prstGeom>
-          <a:solidFill>
-            <a:srgbClr val="F0A500"/>
-          </a:solidFill>
-          <a:ln>
-            <a:noFill/>
-          </a:ln>
-          <a:effectLst/>
-        </p:spPr>
-        <p:style>
-          <a:lnRef idx="1">
-            <a:schemeClr val="accent1"/>
-          </a:lnRef>
-          <a:fillRef idx="3">
-            <a:schemeClr val="accent1"/>
-          </a:fillRef>
-          <a:effectRef idx="2">
-            <a:schemeClr val="accent1"/>
-          </a:effectRef>
-          <a:fontRef idx="minor">
-            <a:schemeClr val="lt1"/>
-          </a:fontRef>
-        </p:style>
-        <p:txBody>
-          <a:bodyPr rtlCol="0" anchor="ctr" wrap="square">
+              <a:t>Questions  ·  Poll 5</a:t>
+            </a:r>
+          </a:p>
+        </p:txBody>
+      </p:sp>
+      <p:sp>
+        <p:nvSpPr>
+          <p:cNvPr id="6" name="TextBox 5"/>
+          <p:cNvSpPr txBox="1"/>
+          <p:nvPr/>
+        </p:nvSpPr>
+        <p:spPr>
+          <a:xfrm>
+            <a:off x="0" y="4709160"/>
+            <a:ext cx="12191695" cy="548640"/>
+          </a:xfrm>
+          <a:prstGeom prst="rect">
+            <a:avLst/>
+          </a:prstGeom>
+          <a:noFill/>
+        </p:spPr>
+        <p:txBody>
+          <a:bodyPr wrap="square" anchor="t">
             <a:noAutofit/>
           </a:bodyPr>
           <a:lstStyle/>
           <a:p>
             <a:pPr algn="ctr"/>
             <a:r>
-              <a:rPr sz="1400" b="1" i="0">
-                <a:solidFill>
-                  <a:srgbClr val="1B1B1B"/>
-                </a:solidFill>
-                <a:latin typeface="Arial"/>
-              </a:rPr>
-              <a:t>▶ POLL 5  ·  Q&amp;A</a:t>
+              <a:rPr sz="1600" b="0" i="0">
+                <a:solidFill>
+                  <a:srgbClr val="D8E6F7"/>
+                </a:solidFill>
+                <a:latin typeface="Arial"/>
+              </a:rPr>
+              <a:t>What is the biggest opportunity?   —   join at menti.com</a:t>
             </a:r>
           </a:p>
         </p:txBody>
@@ -13138,8 +14857,8 @@
         </p:nvSpPr>
         <p:spPr>
           <a:xfrm>
-            <a:off x="749808" y="2331720"/>
-            <a:ext cx="8229600" cy="320040"/>
+            <a:off x="640080" y="6455664"/>
+            <a:ext cx="3657600" cy="274320"/>
           </a:xfrm>
           <a:prstGeom prst="rect">
             <a:avLst/>
@@ -13154,71 +14873,27 @@
           <a:p>
             <a:pPr algn="l"/>
             <a:r>
-              <a:rPr sz="1300" b="1" i="0">
-                <a:solidFill>
-                  <a:srgbClr val="F0A500"/>
-                </a:solidFill>
-                <a:latin typeface="Arial"/>
-              </a:rPr>
-              <a:t>ACT 5 · CLOSING</a:t>
-            </a:r>
-          </a:p>
-        </p:txBody>
-      </p:sp>
-      <p:sp>
-        <p:nvSpPr>
-          <p:cNvPr id="8" name="Rectangle 7"/>
-          <p:cNvSpPr/>
-          <p:nvPr/>
-        </p:nvSpPr>
-        <p:spPr>
-          <a:xfrm>
-            <a:off x="777240" y="2743200"/>
-            <a:ext cx="1463040" cy="54864"/>
-          </a:xfrm>
-          <a:prstGeom prst="rect">
-            <a:avLst/>
-          </a:prstGeom>
-          <a:solidFill>
-            <a:srgbClr val="F0A500"/>
-          </a:solidFill>
-          <a:ln>
-            <a:noFill/>
-          </a:ln>
-          <a:effectLst/>
-        </p:spPr>
-        <p:style>
-          <a:lnRef idx="1">
-            <a:schemeClr val="accent1"/>
-          </a:lnRef>
-          <a:fillRef idx="3">
-            <a:schemeClr val="accent1"/>
-          </a:fillRef>
-          <a:effectRef idx="2">
-            <a:schemeClr val="accent1"/>
-          </a:effectRef>
-          <a:fontRef idx="minor">
-            <a:schemeClr val="lt1"/>
-          </a:fontRef>
-        </p:style>
-        <p:txBody>
-          <a:bodyPr rtlCol="0" anchor="ctr"/>
-          <a:lstStyle/>
-          <a:p>
-            <a:pPr algn="ctr"/>
-          </a:p>
-        </p:txBody>
-      </p:sp>
-      <p:sp>
-        <p:nvSpPr>
-          <p:cNvPr id="9" name="TextBox 8"/>
+              <a:rPr sz="900" b="1" i="0">
+                <a:solidFill>
+                  <a:srgbClr val="D8E6F7"/>
+                </a:solidFill>
+                <a:latin typeface="Arial"/>
+              </a:rPr>
+              <a:t>Industrial DevOps Now</a:t>
+            </a:r>
+          </a:p>
+        </p:txBody>
+      </p:sp>
+      <p:sp>
+        <p:nvSpPr>
+          <p:cNvPr id="8" name="TextBox 7"/>
           <p:cNvSpPr txBox="1"/>
           <p:nvPr/>
         </p:nvSpPr>
         <p:spPr>
           <a:xfrm>
-            <a:off x="731520" y="2926080"/>
-            <a:ext cx="9144000" cy="1645920"/>
+            <a:off x="10058400" y="6455664"/>
+            <a:ext cx="1490472" cy="274320"/>
           </a:xfrm>
           <a:prstGeom prst="rect">
             <a:avLst/>
@@ -13231,79 +14906,9 @@
           </a:bodyPr>
           <a:lstStyle/>
           <a:p>
-            <a:pPr algn="l"/>
-            <a:r>
-              <a:rPr sz="4000" b="1" i="0">
-                <a:solidFill>
-                  <a:srgbClr val="FFFFFF"/>
-                </a:solidFill>
-                <a:latin typeface="Arial"/>
-              </a:rPr>
-              <a:t>What is the biggest opportunity?</a:t>
-            </a:r>
-          </a:p>
-        </p:txBody>
-      </p:sp>
-      <p:sp>
-        <p:nvSpPr>
-          <p:cNvPr id="10" name="TextBox 9"/>
-          <p:cNvSpPr txBox="1"/>
-          <p:nvPr/>
-        </p:nvSpPr>
-        <p:spPr>
-          <a:xfrm>
-            <a:off x="731520" y="4480560"/>
-            <a:ext cx="8503920" cy="1280160"/>
-          </a:xfrm>
-          <a:prstGeom prst="rect">
-            <a:avLst/>
-          </a:prstGeom>
-          <a:noFill/>
-        </p:spPr>
-        <p:txBody>
-          <a:bodyPr wrap="square" anchor="t">
-            <a:noAutofit/>
-          </a:bodyPr>
-          <a:lstStyle/>
-          <a:p>
-            <a:pPr algn="l"/>
-            <a:r>
-              <a:rPr sz="2000" b="0" i="0">
-                <a:solidFill>
-                  <a:srgbClr val="D8E6F7"/>
-                </a:solidFill>
-                <a:latin typeface="Arial"/>
-              </a:rPr>
-              <a:t>Closing Mentimeter poll, then open Q&amp;A.  Join at menti.com.</a:t>
-            </a:r>
-          </a:p>
-        </p:txBody>
-      </p:sp>
-      <p:sp>
-        <p:nvSpPr>
-          <p:cNvPr id="11" name="TextBox 10"/>
-          <p:cNvSpPr txBox="1"/>
-          <p:nvPr/>
-        </p:nvSpPr>
-        <p:spPr>
-          <a:xfrm>
-            <a:off x="731520" y="6446520"/>
-            <a:ext cx="1828800" cy="274320"/>
-          </a:xfrm>
-          <a:prstGeom prst="rect">
-            <a:avLst/>
-          </a:prstGeom>
-          <a:noFill/>
-        </p:spPr>
-        <p:txBody>
-          <a:bodyPr wrap="square" anchor="t">
-            <a:noAutofit/>
-          </a:bodyPr>
-          <a:lstStyle/>
-          <a:p>
-            <a:pPr algn="l"/>
-            <a:r>
-              <a:rPr sz="1000" b="1" i="0">
+            <a:pPr algn="r"/>
+            <a:r>
+              <a:rPr sz="900" b="1" i="0">
                 <a:solidFill>
                   <a:srgbClr val="D8E6F7"/>
                 </a:solidFill>
@@ -13384,7 +14989,7 @@
         </p:nvSpPr>
         <p:spPr>
           <a:xfrm>
-            <a:off x="640080" y="457200"/>
+            <a:off x="640080" y="438912"/>
             <a:ext cx="10515600" cy="274320"/>
           </a:xfrm>
           <a:prstGeom prst="rect">
@@ -13419,8 +15024,8 @@
         </p:nvSpPr>
         <p:spPr>
           <a:xfrm>
-            <a:off x="640080" y="841248"/>
-            <a:ext cx="10881360" cy="822960"/>
+            <a:off x="640080" y="822960"/>
+            <a:ext cx="10881360" cy="868680"/>
           </a:xfrm>
           <a:prstGeom prst="rect">
             <a:avLst/>
@@ -13435,13 +15040,13 @@
           <a:p>
             <a:pPr algn="l"/>
             <a:r>
-              <a:rPr sz="3000" b="1" i="0">
-                <a:solidFill>
-                  <a:srgbClr val="256E8E"/>
-                </a:solidFill>
-                <a:latin typeface="Arial"/>
-              </a:rPr>
-              <a:t>Workshop objectives</a:t>
+              <a:rPr sz="2800" b="1" i="0">
+                <a:solidFill>
+                  <a:srgbClr val="174C63"/>
+                </a:solidFill>
+                <a:latin typeface="Arial"/>
+              </a:rPr>
+              <a:t>WORKSHOP OBJECTIVES</a:t>
             </a:r>
           </a:p>
         </p:txBody>
@@ -13454,7 +15059,7 @@
         </p:nvSpPr>
         <p:spPr>
           <a:xfrm>
-            <a:off x="658368" y="1591056"/>
+            <a:off x="658368" y="1609344"/>
             <a:ext cx="1005840" cy="41148"/>
           </a:xfrm>
           <a:prstGeom prst="rect">
@@ -13498,7 +15103,7 @@
         </p:nvSpPr>
         <p:spPr>
           <a:xfrm>
-            <a:off x="640080" y="2167127"/>
+            <a:off x="640080" y="2176272"/>
             <a:ext cx="5212080" cy="1188720"/>
           </a:xfrm>
           <a:prstGeom prst="roundRect">
@@ -13555,7 +15160,7 @@
         </p:nvSpPr>
         <p:spPr>
           <a:xfrm>
-            <a:off x="6309360" y="2167127"/>
+            <a:off x="6309360" y="2176272"/>
             <a:ext cx="5212080" cy="1188720"/>
           </a:xfrm>
           <a:prstGeom prst="roundRect">
@@ -13612,7 +15217,7 @@
         </p:nvSpPr>
         <p:spPr>
           <a:xfrm>
-            <a:off x="640080" y="3813048"/>
+            <a:off x="640080" y="3822191"/>
             <a:ext cx="5212080" cy="1188720"/>
           </a:xfrm>
           <a:prstGeom prst="roundRect">
@@ -13669,7 +15274,7 @@
         </p:nvSpPr>
         <p:spPr>
           <a:xfrm>
-            <a:off x="6309360" y="3813048"/>
+            <a:off x="6309360" y="3822191"/>
             <a:ext cx="5212080" cy="1188720"/>
           </a:xfrm>
           <a:prstGeom prst="roundRect">
@@ -14421,7 +16026,7 @@
         </p:nvSpPr>
         <p:spPr>
           <a:xfrm>
-            <a:off x="640080" y="457200"/>
+            <a:off x="640080" y="438912"/>
             <a:ext cx="10515600" cy="274320"/>
           </a:xfrm>
           <a:prstGeom prst="rect">
@@ -14456,8 +16061,8 @@
         </p:nvSpPr>
         <p:spPr>
           <a:xfrm>
-            <a:off x="640080" y="841248"/>
-            <a:ext cx="10881360" cy="822960"/>
+            <a:off x="640080" y="822960"/>
+            <a:ext cx="10881360" cy="868680"/>
           </a:xfrm>
           <a:prstGeom prst="rect">
             <a:avLst/>
@@ -14472,13 +16077,13 @@
           <a:p>
             <a:pPr algn="l"/>
             <a:r>
-              <a:rPr sz="3000" b="1" i="0">
-                <a:solidFill>
-                  <a:srgbClr val="256E8E"/>
-                </a:solidFill>
-                <a:latin typeface="Arial"/>
-              </a:rPr>
-              <a:t>Automotive development today</a:t>
+              <a:rPr sz="2800" b="1" i="0">
+                <a:solidFill>
+                  <a:srgbClr val="174C63"/>
+                </a:solidFill>
+                <a:latin typeface="Arial"/>
+              </a:rPr>
+              <a:t>AUTOMOTIVE DEVELOPMENT TODAY</a:t>
             </a:r>
           </a:p>
         </p:txBody>
@@ -14491,7 +16096,7 @@
         </p:nvSpPr>
         <p:spPr>
           <a:xfrm>
-            <a:off x="658368" y="1591056"/>
+            <a:off x="658368" y="1609344"/>
             <a:ext cx="1005840" cy="41148"/>
           </a:xfrm>
           <a:prstGeom prst="rect">
@@ -14535,7 +16140,7 @@
         </p:nvSpPr>
         <p:spPr>
           <a:xfrm>
-            <a:off x="640080" y="1892807"/>
+            <a:off x="640080" y="1901952"/>
             <a:ext cx="10607040" cy="1463040"/>
           </a:xfrm>
           <a:prstGeom prst="rect">
@@ -14781,7 +16386,7 @@
         </p:nvSpPr>
         <p:spPr>
           <a:xfrm>
-            <a:off x="640080" y="457200"/>
+            <a:off x="640080" y="438912"/>
             <a:ext cx="10515600" cy="274320"/>
           </a:xfrm>
           <a:prstGeom prst="rect">
@@ -14816,8 +16421,8 @@
         </p:nvSpPr>
         <p:spPr>
           <a:xfrm>
-            <a:off x="640080" y="841248"/>
-            <a:ext cx="10881360" cy="822960"/>
+            <a:off x="640080" y="822960"/>
+            <a:ext cx="10881360" cy="868680"/>
           </a:xfrm>
           <a:prstGeom prst="rect">
             <a:avLst/>
@@ -14832,13 +16437,13 @@
           <a:p>
             <a:pPr algn="l"/>
             <a:r>
-              <a:rPr sz="3000" b="1" i="0">
-                <a:solidFill>
-                  <a:srgbClr val="256E8E"/>
-                </a:solidFill>
-                <a:latin typeface="Arial"/>
-              </a:rPr>
-              <a:t>The cost of handoffs</a:t>
+              <a:rPr sz="2800" b="1" i="0">
+                <a:solidFill>
+                  <a:srgbClr val="174C63"/>
+                </a:solidFill>
+                <a:latin typeface="Arial"/>
+              </a:rPr>
+              <a:t>THE COST OF HANDOFFS</a:t>
             </a:r>
           </a:p>
         </p:txBody>
@@ -14851,7 +16456,7 @@
         </p:nvSpPr>
         <p:spPr>
           <a:xfrm>
-            <a:off x="658368" y="1591056"/>
+            <a:off x="658368" y="1609344"/>
             <a:ext cx="1005840" cy="41148"/>
           </a:xfrm>
           <a:prstGeom prst="rect">
@@ -14895,7 +16500,7 @@
         </p:nvSpPr>
         <p:spPr>
           <a:xfrm>
-            <a:off x="640080" y="1892807"/>
+            <a:off x="640080" y="1901952"/>
             <a:ext cx="10607040" cy="548640"/>
           </a:xfrm>
           <a:prstGeom prst="rect">
@@ -14924,16 +16529,16 @@
       </p:sp>
       <p:sp>
         <p:nvSpPr>
-          <p:cNvPr id="7" name="Rounded Rectangle 6"/>
+          <p:cNvPr id="7" name="Hexagon 6"/>
           <p:cNvSpPr/>
           <p:nvPr/>
         </p:nvSpPr>
         <p:spPr>
           <a:xfrm>
-            <a:off x="640080" y="3383280"/>
-            <a:ext cx="1604772" cy="960120"/>
-          </a:xfrm>
-          <a:prstGeom prst="roundRect">
+            <a:off x="640080" y="3200400"/>
+            <a:ext cx="1589532" cy="1371600"/>
+          </a:xfrm>
+          <a:prstGeom prst="hexagon">
             <a:avLst/>
           </a:prstGeom>
           <a:solidFill>
@@ -14985,8 +16590,8 @@
         </p:nvSpPr>
         <p:spPr>
           <a:xfrm>
-            <a:off x="2272284" y="3762756"/>
-            <a:ext cx="201168" cy="201168"/>
+            <a:off x="2238756" y="3794760"/>
+            <a:ext cx="237744" cy="182880"/>
           </a:xfrm>
           <a:prstGeom prst="rightArrow">
             <a:avLst/>
@@ -15023,16 +16628,16 @@
       </p:sp>
       <p:sp>
         <p:nvSpPr>
-          <p:cNvPr id="9" name="Rounded Rectangle 8"/>
+          <p:cNvPr id="9" name="Hexagon 8"/>
           <p:cNvSpPr/>
           <p:nvPr/>
         </p:nvSpPr>
         <p:spPr>
           <a:xfrm>
-            <a:off x="2500884" y="3383280"/>
-            <a:ext cx="1604772" cy="960120"/>
-          </a:xfrm>
-          <a:prstGeom prst="roundRect">
+            <a:off x="2503932" y="3200400"/>
+            <a:ext cx="1589532" cy="1371600"/>
+          </a:xfrm>
+          <a:prstGeom prst="hexagon">
             <a:avLst/>
           </a:prstGeom>
           <a:solidFill>
@@ -15084,8 +16689,8 @@
         </p:nvSpPr>
         <p:spPr>
           <a:xfrm>
-            <a:off x="4133088" y="3762756"/>
-            <a:ext cx="201168" cy="201168"/>
+            <a:off x="4102607" y="3794760"/>
+            <a:ext cx="237744" cy="182880"/>
           </a:xfrm>
           <a:prstGeom prst="rightArrow">
             <a:avLst/>
@@ -15122,16 +16727,16 @@
       </p:sp>
       <p:sp>
         <p:nvSpPr>
-          <p:cNvPr id="11" name="Rounded Rectangle 10"/>
+          <p:cNvPr id="11" name="Hexagon 10"/>
           <p:cNvSpPr/>
           <p:nvPr/>
         </p:nvSpPr>
         <p:spPr>
           <a:xfrm>
-            <a:off x="4361688" y="3383280"/>
-            <a:ext cx="1604772" cy="960120"/>
-          </a:xfrm>
-          <a:prstGeom prst="roundRect">
+            <a:off x="4367784" y="3200400"/>
+            <a:ext cx="1589532" cy="1371600"/>
+          </a:xfrm>
+          <a:prstGeom prst="hexagon">
             <a:avLst/>
           </a:prstGeom>
           <a:solidFill>
@@ -15183,8 +16788,8 @@
         </p:nvSpPr>
         <p:spPr>
           <a:xfrm>
-            <a:off x="5993892" y="3762756"/>
-            <a:ext cx="201168" cy="201168"/>
+            <a:off x="5966459" y="3794760"/>
+            <a:ext cx="237744" cy="182880"/>
           </a:xfrm>
           <a:prstGeom prst="rightArrow">
             <a:avLst/>
@@ -15221,16 +16826,16 @@
       </p:sp>
       <p:sp>
         <p:nvSpPr>
-          <p:cNvPr id="13" name="Rounded Rectangle 12"/>
+          <p:cNvPr id="13" name="Hexagon 12"/>
           <p:cNvSpPr/>
           <p:nvPr/>
         </p:nvSpPr>
         <p:spPr>
           <a:xfrm>
-            <a:off x="6222492" y="3383280"/>
-            <a:ext cx="1604772" cy="960120"/>
-          </a:xfrm>
-          <a:prstGeom prst="roundRect">
+            <a:off x="6231636" y="3200400"/>
+            <a:ext cx="1589532" cy="1371600"/>
+          </a:xfrm>
+          <a:prstGeom prst="hexagon">
             <a:avLst/>
           </a:prstGeom>
           <a:solidFill>
@@ -15282,8 +16887,8 @@
         </p:nvSpPr>
         <p:spPr>
           <a:xfrm>
-            <a:off x="7854696" y="3762756"/>
-            <a:ext cx="201168" cy="201168"/>
+            <a:off x="7830311" y="3794760"/>
+            <a:ext cx="237744" cy="182880"/>
           </a:xfrm>
           <a:prstGeom prst="rightArrow">
             <a:avLst/>
@@ -15320,16 +16925,16 @@
       </p:sp>
       <p:sp>
         <p:nvSpPr>
-          <p:cNvPr id="15" name="Rounded Rectangle 14"/>
+          <p:cNvPr id="15" name="Hexagon 14"/>
           <p:cNvSpPr/>
           <p:nvPr/>
         </p:nvSpPr>
         <p:spPr>
           <a:xfrm>
-            <a:off x="8083296" y="3383280"/>
-            <a:ext cx="1604772" cy="960120"/>
-          </a:xfrm>
-          <a:prstGeom prst="roundRect">
+            <a:off x="8095487" y="3200400"/>
+            <a:ext cx="1589532" cy="1371600"/>
+          </a:xfrm>
+          <a:prstGeom prst="hexagon">
             <a:avLst/>
           </a:prstGeom>
           <a:solidFill>
@@ -15381,8 +16986,8 @@
         </p:nvSpPr>
         <p:spPr>
           <a:xfrm>
-            <a:off x="9715499" y="3762756"/>
-            <a:ext cx="201168" cy="201168"/>
+            <a:off x="9694163" y="3794760"/>
+            <a:ext cx="237744" cy="182880"/>
           </a:xfrm>
           <a:prstGeom prst="rightArrow">
             <a:avLst/>
@@ -15419,16 +17024,16 @@
       </p:sp>
       <p:sp>
         <p:nvSpPr>
-          <p:cNvPr id="17" name="Rounded Rectangle 16"/>
+          <p:cNvPr id="17" name="Hexagon 16"/>
           <p:cNvSpPr/>
           <p:nvPr/>
         </p:nvSpPr>
         <p:spPr>
           <a:xfrm>
-            <a:off x="9944100" y="3383280"/>
-            <a:ext cx="1604772" cy="960120"/>
-          </a:xfrm>
-          <a:prstGeom prst="roundRect">
+            <a:off x="9959340" y="3200400"/>
+            <a:ext cx="1589532" cy="1371600"/>
+          </a:xfrm>
+          <a:prstGeom prst="hexagon">
             <a:avLst/>
           </a:prstGeom>
           <a:solidFill>
@@ -16175,7 +17780,7 @@
         </p:nvSpPr>
         <p:spPr>
           <a:xfrm>
-            <a:off x="640080" y="457200"/>
+            <a:off x="640080" y="438912"/>
             <a:ext cx="10515600" cy="274320"/>
           </a:xfrm>
           <a:prstGeom prst="rect">
@@ -16210,8 +17815,8 @@
         </p:nvSpPr>
         <p:spPr>
           <a:xfrm>
-            <a:off x="640080" y="841248"/>
-            <a:ext cx="10881360" cy="822960"/>
+            <a:off x="640080" y="822960"/>
+            <a:ext cx="10881360" cy="868680"/>
           </a:xfrm>
           <a:prstGeom prst="rect">
             <a:avLst/>
@@ -16226,13 +17831,13 @@
           <a:p>
             <a:pPr algn="l"/>
             <a:r>
-              <a:rPr sz="3000" b="1" i="0">
-                <a:solidFill>
-                  <a:srgbClr val="256E8E"/>
-                </a:solidFill>
-                <a:latin typeface="Arial"/>
-              </a:rPr>
-              <a:t>Why specialization exists</a:t>
+              <a:rPr sz="2800" b="1" i="0">
+                <a:solidFill>
+                  <a:srgbClr val="174C63"/>
+                </a:solidFill>
+                <a:latin typeface="Arial"/>
+              </a:rPr>
+              <a:t>WHY SPECIALIZATION EXISTS</a:t>
             </a:r>
           </a:p>
         </p:txBody>
@@ -16245,7 +17850,7 @@
         </p:nvSpPr>
         <p:spPr>
           <a:xfrm>
-            <a:off x="658368" y="1591056"/>
+            <a:off x="658368" y="1609344"/>
             <a:ext cx="1005840" cy="41148"/>
           </a:xfrm>
           <a:prstGeom prst="rect">
@@ -16289,7 +17894,7 @@
         </p:nvSpPr>
         <p:spPr>
           <a:xfrm>
-            <a:off x="640080" y="1892807"/>
+            <a:off x="640080" y="1901952"/>
             <a:ext cx="10607040" cy="1463040"/>
           </a:xfrm>
           <a:prstGeom prst="rect">
@@ -16535,7 +18140,7 @@
         </p:nvSpPr>
         <p:spPr>
           <a:xfrm>
-            <a:off x="640080" y="457200"/>
+            <a:off x="640080" y="438912"/>
             <a:ext cx="10515600" cy="274320"/>
           </a:xfrm>
           <a:prstGeom prst="rect">
@@ -16570,8 +18175,8 @@
         </p:nvSpPr>
         <p:spPr>
           <a:xfrm>
-            <a:off x="640080" y="841248"/>
-            <a:ext cx="10881360" cy="822960"/>
+            <a:off x="640080" y="822960"/>
+            <a:ext cx="10881360" cy="868680"/>
           </a:xfrm>
           <a:prstGeom prst="rect">
             <a:avLst/>
@@ -16586,13 +18191,13 @@
           <a:p>
             <a:pPr algn="l"/>
             <a:r>
-              <a:rPr sz="3000" b="1" i="0">
-                <a:solidFill>
-                  <a:srgbClr val="256E8E"/>
-                </a:solidFill>
-                <a:latin typeface="Arial"/>
-              </a:rPr>
-              <a:t>AI as capability amplification</a:t>
+              <a:rPr sz="2800" b="1" i="0">
+                <a:solidFill>
+                  <a:srgbClr val="174C63"/>
+                </a:solidFill>
+                <a:latin typeface="Arial"/>
+              </a:rPr>
+              <a:t>AI AS CAPABILITY AMPLIFICATION</a:t>
             </a:r>
           </a:p>
         </p:txBody>
@@ -16605,7 +18210,7 @@
         </p:nvSpPr>
         <p:spPr>
           <a:xfrm>
-            <a:off x="658368" y="1591056"/>
+            <a:off x="658368" y="1609344"/>
             <a:ext cx="1005840" cy="41148"/>
           </a:xfrm>
           <a:prstGeom prst="rect">
@@ -16649,7 +18254,7 @@
         </p:nvSpPr>
         <p:spPr>
           <a:xfrm>
-            <a:off x="640080" y="1892807"/>
+            <a:off x="640080" y="1901952"/>
             <a:ext cx="10607040" cy="1463040"/>
           </a:xfrm>
           <a:prstGeom prst="rect">

--- a/dms-workshop/AI-Powered-Product-Development_DMS.pptx
+++ b/dms-workshop/AI-Powered-Product-Development_DMS.pptx
@@ -6117,7 +6117,7 @@
         <p:spPr>
           <a:xfrm>
             <a:off x="640080" y="1901952"/>
-            <a:ext cx="10881360" cy="3520440"/>
+            <a:ext cx="10881360" cy="4114800"/>
           </a:xfrm>
           <a:prstGeom prst="roundRect">
             <a:avLst/>
@@ -6242,7 +6242,7 @@
         <p:spPr>
           <a:xfrm>
             <a:off x="896112" y="2523744"/>
-            <a:ext cx="10369296" cy="2743200"/>
+            <a:ext cx="10369296" cy="3337560"/>
           </a:xfrm>
           <a:prstGeom prst="rect">
             <a:avLst/>
@@ -6257,7 +6257,7 @@
           <a:p>
             <a:pPr algn="l"/>
             <a:r>
-              <a:rPr sz="1500" b="0" i="0">
+              <a:rPr sz="1600" b="0" i="0">
                 <a:solidFill>
                   <a:srgbClr val="1B1B1B"/>
                 </a:solidFill>
@@ -6269,7 +6269,7 @@
           <a:p>
             <a:pPr algn="l"/>
             <a:r>
-              <a:rPr sz="1500" b="0" i="0">
+              <a:rPr sz="1600" b="0" i="0">
                 <a:solidFill>
                   <a:srgbClr val="1B1B1B"/>
                 </a:solidFill>
@@ -6281,7 +6281,7 @@
           <a:p>
             <a:pPr algn="l"/>
             <a:r>
-              <a:rPr sz="1500" b="0" i="0">
+              <a:rPr sz="1600" b="0" i="0">
                 <a:solidFill>
                   <a:srgbClr val="1B1B1B"/>
                 </a:solidFill>
@@ -6293,7 +6293,7 @@
           <a:p>
             <a:pPr algn="l"/>
             <a:r>
-              <a:rPr sz="1500" b="0" i="0">
+              <a:rPr sz="1600" b="0" i="0">
                 <a:solidFill>
                   <a:srgbClr val="1B1B1B"/>
                 </a:solidFill>
@@ -6305,7 +6305,7 @@
           <a:p>
             <a:pPr algn="l"/>
             <a:r>
-              <a:rPr sz="1500" b="0" i="0">
+              <a:rPr sz="1600" b="0" i="0">
                 <a:solidFill>
                   <a:srgbClr val="1B1B1B"/>
                 </a:solidFill>
@@ -6317,7 +6317,7 @@
           <a:p>
             <a:pPr algn="l"/>
             <a:r>
-              <a:rPr sz="1500" b="0" i="0">
+              <a:rPr sz="1600" b="0" i="0">
                 <a:solidFill>
                   <a:srgbClr val="1B1B1B"/>
                 </a:solidFill>
@@ -6329,7 +6329,7 @@
           <a:p>
             <a:pPr algn="l"/>
             <a:r>
-              <a:rPr sz="1500" b="0" i="0">
+              <a:rPr sz="1600" b="0" i="0">
                 <a:solidFill>
                   <a:srgbClr val="1B1B1B"/>
                 </a:solidFill>
@@ -6341,7 +6341,7 @@
           <a:p>
             <a:pPr algn="l"/>
             <a:r>
-              <a:rPr sz="1500" b="0" i="0">
+              <a:rPr sz="1600" b="0" i="0">
                 <a:solidFill>
                   <a:srgbClr val="1B1B1B"/>
                 </a:solidFill>
@@ -6353,7 +6353,7 @@
           <a:p>
             <a:pPr algn="l"/>
             <a:r>
-              <a:rPr sz="1500" b="0" i="0">
+              <a:rPr sz="1600" b="0" i="0">
                 <a:solidFill>
                   <a:srgbClr val="1B1B1B"/>
                 </a:solidFill>
@@ -6365,7 +6365,7 @@
           <a:p>
             <a:pPr algn="l"/>
             <a:r>
-              <a:rPr sz="1500" b="0" i="0">
+              <a:rPr sz="1600" b="0" i="0">
                 <a:solidFill>
                   <a:srgbClr val="1B1B1B"/>
                 </a:solidFill>
@@ -6378,42 +6378,7 @@
       </p:sp>
       <p:sp>
         <p:nvSpPr>
-          <p:cNvPr id="11" name="TextBox 10"/>
-          <p:cNvSpPr txBox="1"/>
-          <p:nvPr/>
-        </p:nvSpPr>
-        <p:spPr>
-          <a:xfrm>
-            <a:off x="640080" y="5541264"/>
-            <a:ext cx="10881360" cy="457200"/>
-          </a:xfrm>
-          <a:prstGeom prst="rect">
-            <a:avLst/>
-          </a:prstGeom>
-          <a:noFill/>
-        </p:spPr>
-        <p:txBody>
-          <a:bodyPr wrap="square" anchor="t">
-            <a:noAutofit/>
-          </a:bodyPr>
-          <a:lstStyle/>
-          <a:p>
-            <a:pPr algn="l"/>
-            <a:r>
-              <a:rPr sz="1400" b="1" i="1">
-                <a:solidFill>
-                  <a:srgbClr val="256E8E"/>
-                </a:solidFill>
-                <a:latin typeface="Arial"/>
-              </a:rPr>
-              <a:t>Ask the room:   What's missing? What would you challenge?</a:t>
-            </a:r>
-          </a:p>
-        </p:txBody>
-      </p:sp>
-      <p:sp>
-        <p:nvSpPr>
-          <p:cNvPr id="12" name="Rectangle 11"/>
+          <p:cNvPr id="11" name="Rectangle 10"/>
           <p:cNvSpPr/>
           <p:nvPr/>
         </p:nvSpPr>
@@ -6457,47 +6422,47 @@
       </p:sp>
       <p:sp>
         <p:nvSpPr>
+          <p:cNvPr id="12" name="TextBox 11"/>
+          <p:cNvSpPr txBox="1"/>
+          <p:nvPr/>
+        </p:nvSpPr>
+        <p:spPr>
+          <a:xfrm>
+            <a:off x="640080" y="6473952"/>
+            <a:ext cx="6400800" cy="274320"/>
+          </a:xfrm>
+          <a:prstGeom prst="rect">
+            <a:avLst/>
+          </a:prstGeom>
+          <a:noFill/>
+        </p:spPr>
+        <p:txBody>
+          <a:bodyPr wrap="square" anchor="t">
+            <a:noAutofit/>
+          </a:bodyPr>
+          <a:lstStyle/>
+          <a:p>
+            <a:pPr algn="l"/>
+            <a:r>
+              <a:rPr sz="900" b="0" i="0">
+                <a:solidFill>
+                  <a:srgbClr val="595959"/>
+                </a:solidFill>
+                <a:latin typeface="Arial"/>
+              </a:rPr>
+              <a:t>Industrial DevOps Now  ·  AI-Powered Product Development</a:t>
+            </a:r>
+          </a:p>
+        </p:txBody>
+      </p:sp>
+      <p:sp>
+        <p:nvSpPr>
           <p:cNvPr id="13" name="TextBox 12"/>
           <p:cNvSpPr txBox="1"/>
           <p:nvPr/>
         </p:nvSpPr>
         <p:spPr>
           <a:xfrm>
-            <a:off x="640080" y="6473952"/>
-            <a:ext cx="6400800" cy="274320"/>
-          </a:xfrm>
-          <a:prstGeom prst="rect">
-            <a:avLst/>
-          </a:prstGeom>
-          <a:noFill/>
-        </p:spPr>
-        <p:txBody>
-          <a:bodyPr wrap="square" anchor="t">
-            <a:noAutofit/>
-          </a:bodyPr>
-          <a:lstStyle/>
-          <a:p>
-            <a:pPr algn="l"/>
-            <a:r>
-              <a:rPr sz="900" b="0" i="0">
-                <a:solidFill>
-                  <a:srgbClr val="595959"/>
-                </a:solidFill>
-                <a:latin typeface="Arial"/>
-              </a:rPr>
-              <a:t>Industrial DevOps Now  ·  AI-Powered Product Development</a:t>
-            </a:r>
-          </a:p>
-        </p:txBody>
-      </p:sp>
-      <p:sp>
-        <p:nvSpPr>
-          <p:cNvPr id="14" name="TextBox 13"/>
-          <p:cNvSpPr txBox="1"/>
-          <p:nvPr/>
-        </p:nvSpPr>
-        <p:spPr>
-          <a:xfrm>
             <a:off x="4389120" y="6473952"/>
             <a:ext cx="3657600" cy="274320"/>
           </a:xfrm>
@@ -6527,7 +6492,7 @@
       </p:sp>
       <p:sp>
         <p:nvSpPr>
-          <p:cNvPr id="15" name="TextBox 14"/>
+          <p:cNvPr id="14" name="TextBox 13"/>
           <p:cNvSpPr txBox="1"/>
           <p:nvPr/>
         </p:nvSpPr>
@@ -6800,7 +6765,7 @@
         <p:spPr>
           <a:xfrm>
             <a:off x="640080" y="1901952"/>
-            <a:ext cx="10881360" cy="3520440"/>
+            <a:ext cx="10881360" cy="4114800"/>
           </a:xfrm>
           <a:prstGeom prst="roundRect">
             <a:avLst/>
@@ -6925,7 +6890,7 @@
         <p:spPr>
           <a:xfrm>
             <a:off x="896112" y="2523744"/>
-            <a:ext cx="10369296" cy="2743200"/>
+            <a:ext cx="10369296" cy="3337560"/>
           </a:xfrm>
           <a:prstGeom prst="rect">
             <a:avLst/>
@@ -6940,7 +6905,7 @@
           <a:p>
             <a:pPr algn="l"/>
             <a:r>
-              <a:rPr sz="1500" b="0" i="0">
+              <a:rPr sz="1600" b="0" i="0">
                 <a:solidFill>
                   <a:srgbClr val="1B1B1B"/>
                 </a:solidFill>
@@ -6952,7 +6917,7 @@
           <a:p>
             <a:pPr algn="l"/>
             <a:r>
-              <a:rPr sz="1500" b="0" i="0">
+              <a:rPr sz="1600" b="0" i="0">
                 <a:solidFill>
                   <a:srgbClr val="1B1B1B"/>
                 </a:solidFill>
@@ -6964,7 +6929,7 @@
           <a:p>
             <a:pPr algn="l"/>
             <a:r>
-              <a:rPr sz="1500" b="0" i="0">
+              <a:rPr sz="1600" b="0" i="0">
                 <a:solidFill>
                   <a:srgbClr val="1B1B1B"/>
                 </a:solidFill>
@@ -6976,7 +6941,7 @@
           <a:p>
             <a:pPr algn="l"/>
             <a:r>
-              <a:rPr sz="1500" b="0" i="0">
+              <a:rPr sz="1600" b="0" i="0">
                 <a:solidFill>
                   <a:srgbClr val="1B1B1B"/>
                 </a:solidFill>
@@ -6988,7 +6953,7 @@
           <a:p>
             <a:pPr algn="l"/>
             <a:r>
-              <a:rPr sz="1500" b="0" i="0">
+              <a:rPr sz="1600" b="0" i="0">
                 <a:solidFill>
                   <a:srgbClr val="1B1B1B"/>
                 </a:solidFill>
@@ -7000,7 +6965,7 @@
           <a:p>
             <a:pPr algn="l"/>
             <a:r>
-              <a:rPr sz="1500" b="0" i="0">
+              <a:rPr sz="1600" b="0" i="0">
                 <a:solidFill>
                   <a:srgbClr val="1B1B1B"/>
                 </a:solidFill>
@@ -7012,7 +6977,7 @@
           <a:p>
             <a:pPr algn="l"/>
             <a:r>
-              <a:rPr sz="1500" b="0" i="0">
+              <a:rPr sz="1600" b="0" i="0">
                 <a:solidFill>
                   <a:srgbClr val="1B1B1B"/>
                 </a:solidFill>
@@ -7024,7 +6989,7 @@
           <a:p>
             <a:pPr algn="l"/>
             <a:r>
-              <a:rPr sz="1500" b="0" i="0">
+              <a:rPr sz="1600" b="0" i="0">
                 <a:solidFill>
                   <a:srgbClr val="1B1B1B"/>
                 </a:solidFill>
@@ -7037,42 +7002,7 @@
       </p:sp>
       <p:sp>
         <p:nvSpPr>
-          <p:cNvPr id="11" name="TextBox 10"/>
-          <p:cNvSpPr txBox="1"/>
-          <p:nvPr/>
-        </p:nvSpPr>
-        <p:spPr>
-          <a:xfrm>
-            <a:off x="640080" y="5541264"/>
-            <a:ext cx="10881360" cy="457200"/>
-          </a:xfrm>
-          <a:prstGeom prst="rect">
-            <a:avLst/>
-          </a:prstGeom>
-          <a:noFill/>
-        </p:spPr>
-        <p:txBody>
-          <a:bodyPr wrap="square" anchor="t">
-            <a:noAutofit/>
-          </a:bodyPr>
-          <a:lstStyle/>
-          <a:p>
-            <a:pPr algn="l"/>
-            <a:r>
-              <a:rPr sz="1400" b="1" i="1">
-                <a:solidFill>
-                  <a:srgbClr val="256E8E"/>
-                </a:solidFill>
-                <a:latin typeface="Arial"/>
-              </a:rPr>
-              <a:t>Ask the room:   Where could this go wrong, and how does it stay safe?</a:t>
-            </a:r>
-          </a:p>
-        </p:txBody>
-      </p:sp>
-      <p:sp>
-        <p:nvSpPr>
-          <p:cNvPr id="12" name="Rectangle 11"/>
+          <p:cNvPr id="11" name="Rectangle 10"/>
           <p:cNvSpPr/>
           <p:nvPr/>
         </p:nvSpPr>
@@ -7116,47 +7046,47 @@
       </p:sp>
       <p:sp>
         <p:nvSpPr>
+          <p:cNvPr id="12" name="TextBox 11"/>
+          <p:cNvSpPr txBox="1"/>
+          <p:nvPr/>
+        </p:nvSpPr>
+        <p:spPr>
+          <a:xfrm>
+            <a:off x="640080" y="6473952"/>
+            <a:ext cx="6400800" cy="274320"/>
+          </a:xfrm>
+          <a:prstGeom prst="rect">
+            <a:avLst/>
+          </a:prstGeom>
+          <a:noFill/>
+        </p:spPr>
+        <p:txBody>
+          <a:bodyPr wrap="square" anchor="t">
+            <a:noAutofit/>
+          </a:bodyPr>
+          <a:lstStyle/>
+          <a:p>
+            <a:pPr algn="l"/>
+            <a:r>
+              <a:rPr sz="900" b="0" i="0">
+                <a:solidFill>
+                  <a:srgbClr val="595959"/>
+                </a:solidFill>
+                <a:latin typeface="Arial"/>
+              </a:rPr>
+              <a:t>Industrial DevOps Now  ·  AI-Powered Product Development</a:t>
+            </a:r>
+          </a:p>
+        </p:txBody>
+      </p:sp>
+      <p:sp>
+        <p:nvSpPr>
           <p:cNvPr id="13" name="TextBox 12"/>
           <p:cNvSpPr txBox="1"/>
           <p:nvPr/>
         </p:nvSpPr>
         <p:spPr>
           <a:xfrm>
-            <a:off x="640080" y="6473952"/>
-            <a:ext cx="6400800" cy="274320"/>
-          </a:xfrm>
-          <a:prstGeom prst="rect">
-            <a:avLst/>
-          </a:prstGeom>
-          <a:noFill/>
-        </p:spPr>
-        <p:txBody>
-          <a:bodyPr wrap="square" anchor="t">
-            <a:noAutofit/>
-          </a:bodyPr>
-          <a:lstStyle/>
-          <a:p>
-            <a:pPr algn="l"/>
-            <a:r>
-              <a:rPr sz="900" b="0" i="0">
-                <a:solidFill>
-                  <a:srgbClr val="595959"/>
-                </a:solidFill>
-                <a:latin typeface="Arial"/>
-              </a:rPr>
-              <a:t>Industrial DevOps Now  ·  AI-Powered Product Development</a:t>
-            </a:r>
-          </a:p>
-        </p:txBody>
-      </p:sp>
-      <p:sp>
-        <p:nvSpPr>
-          <p:cNvPr id="14" name="TextBox 13"/>
-          <p:cNvSpPr txBox="1"/>
-          <p:nvPr/>
-        </p:nvSpPr>
-        <p:spPr>
-          <a:xfrm>
             <a:off x="4389120" y="6473952"/>
             <a:ext cx="3657600" cy="274320"/>
           </a:xfrm>
@@ -7186,7 +7116,7 @@
       </p:sp>
       <p:sp>
         <p:nvSpPr>
-          <p:cNvPr id="15" name="TextBox 14"/>
+          <p:cNvPr id="14" name="TextBox 13"/>
           <p:cNvSpPr txBox="1"/>
           <p:nvPr/>
         </p:nvSpPr>
@@ -7459,7 +7389,7 @@
         <p:spPr>
           <a:xfrm>
             <a:off x="640080" y="1901952"/>
-            <a:ext cx="10881360" cy="3520440"/>
+            <a:ext cx="10881360" cy="4114800"/>
           </a:xfrm>
           <a:prstGeom prst="roundRect">
             <a:avLst/>
@@ -7584,7 +7514,7 @@
         <p:spPr>
           <a:xfrm>
             <a:off x="896112" y="2523744"/>
-            <a:ext cx="10369296" cy="2743200"/>
+            <a:ext cx="10369296" cy="3337560"/>
           </a:xfrm>
           <a:prstGeom prst="rect">
             <a:avLst/>
@@ -7599,7 +7529,7 @@
           <a:p>
             <a:pPr algn="l"/>
             <a:r>
-              <a:rPr sz="1500" b="0" i="0">
+              <a:rPr sz="1600" b="0" i="0">
                 <a:solidFill>
                   <a:srgbClr val="1B1B1B"/>
                 </a:solidFill>
@@ -7611,7 +7541,7 @@
           <a:p>
             <a:pPr algn="l"/>
             <a:r>
-              <a:rPr sz="1500" b="0" i="0">
+              <a:rPr sz="1600" b="0" i="0">
                 <a:solidFill>
                   <a:srgbClr val="1B1B1B"/>
                 </a:solidFill>
@@ -7623,7 +7553,7 @@
           <a:p>
             <a:pPr algn="l"/>
             <a:r>
-              <a:rPr sz="1500" b="0" i="0">
+              <a:rPr sz="1600" b="0" i="0">
                 <a:solidFill>
                   <a:srgbClr val="1B1B1B"/>
                 </a:solidFill>
@@ -7635,7 +7565,7 @@
           <a:p>
             <a:pPr algn="l"/>
             <a:r>
-              <a:rPr sz="1500" b="0" i="0">
+              <a:rPr sz="1600" b="0" i="0">
                 <a:solidFill>
                   <a:srgbClr val="1B1B1B"/>
                 </a:solidFill>
@@ -7647,7 +7577,7 @@
           <a:p>
             <a:pPr algn="l"/>
             <a:r>
-              <a:rPr sz="1500" b="0" i="0">
+              <a:rPr sz="1600" b="0" i="0">
                 <a:solidFill>
                   <a:srgbClr val="1B1B1B"/>
                 </a:solidFill>
@@ -7659,7 +7589,7 @@
           <a:p>
             <a:pPr algn="l"/>
             <a:r>
-              <a:rPr sz="1500" b="0" i="0">
+              <a:rPr sz="1600" b="0" i="0">
                 <a:solidFill>
                   <a:srgbClr val="1B1B1B"/>
                 </a:solidFill>
@@ -7671,7 +7601,7 @@
           <a:p>
             <a:pPr algn="l"/>
             <a:r>
-              <a:rPr sz="1500" b="0" i="0">
+              <a:rPr sz="1600" b="0" i="0">
                 <a:solidFill>
                   <a:srgbClr val="1B1B1B"/>
                 </a:solidFill>
@@ -7683,7 +7613,7 @@
           <a:p>
             <a:pPr algn="l"/>
             <a:r>
-              <a:rPr sz="1500" b="0" i="0">
+              <a:rPr sz="1600" b="0" i="0">
                 <a:solidFill>
                   <a:srgbClr val="1B1B1B"/>
                 </a:solidFill>
@@ -7696,42 +7626,7 @@
       </p:sp>
       <p:sp>
         <p:nvSpPr>
-          <p:cNvPr id="11" name="TextBox 10"/>
-          <p:cNvSpPr txBox="1"/>
-          <p:nvPr/>
-        </p:nvSpPr>
-        <p:spPr>
-          <a:xfrm>
-            <a:off x="640080" y="5541264"/>
-            <a:ext cx="10881360" cy="457200"/>
-          </a:xfrm>
-          <a:prstGeom prst="rect">
-            <a:avLst/>
-          </a:prstGeom>
-          <a:noFill/>
-        </p:spPr>
-        <p:txBody>
-          <a:bodyPr wrap="square" anchor="t">
-            <a:noAutofit/>
-          </a:bodyPr>
-          <a:lstStyle/>
-          <a:p>
-            <a:pPr algn="l"/>
-            <a:r>
-              <a:rPr sz="1400" b="1" i="1">
-                <a:solidFill>
-                  <a:srgbClr val="256E8E"/>
-                </a:solidFill>
-                <a:latin typeface="Arial"/>
-              </a:rPr>
-              <a:t>Ask the room:   See how it traces back to the requirements.</a:t>
-            </a:r>
-          </a:p>
-        </p:txBody>
-      </p:sp>
-      <p:sp>
-        <p:nvSpPr>
-          <p:cNvPr id="12" name="Rectangle 11"/>
+          <p:cNvPr id="11" name="Rectangle 10"/>
           <p:cNvSpPr/>
           <p:nvPr/>
         </p:nvSpPr>
@@ -7775,47 +7670,47 @@
       </p:sp>
       <p:sp>
         <p:nvSpPr>
+          <p:cNvPr id="12" name="TextBox 11"/>
+          <p:cNvSpPr txBox="1"/>
+          <p:nvPr/>
+        </p:nvSpPr>
+        <p:spPr>
+          <a:xfrm>
+            <a:off x="640080" y="6473952"/>
+            <a:ext cx="6400800" cy="274320"/>
+          </a:xfrm>
+          <a:prstGeom prst="rect">
+            <a:avLst/>
+          </a:prstGeom>
+          <a:noFill/>
+        </p:spPr>
+        <p:txBody>
+          <a:bodyPr wrap="square" anchor="t">
+            <a:noAutofit/>
+          </a:bodyPr>
+          <a:lstStyle/>
+          <a:p>
+            <a:pPr algn="l"/>
+            <a:r>
+              <a:rPr sz="900" b="0" i="0">
+                <a:solidFill>
+                  <a:srgbClr val="595959"/>
+                </a:solidFill>
+                <a:latin typeface="Arial"/>
+              </a:rPr>
+              <a:t>Industrial DevOps Now  ·  AI-Powered Product Development</a:t>
+            </a:r>
+          </a:p>
+        </p:txBody>
+      </p:sp>
+      <p:sp>
+        <p:nvSpPr>
           <p:cNvPr id="13" name="TextBox 12"/>
           <p:cNvSpPr txBox="1"/>
           <p:nvPr/>
         </p:nvSpPr>
         <p:spPr>
           <a:xfrm>
-            <a:off x="640080" y="6473952"/>
-            <a:ext cx="6400800" cy="274320"/>
-          </a:xfrm>
-          <a:prstGeom prst="rect">
-            <a:avLst/>
-          </a:prstGeom>
-          <a:noFill/>
-        </p:spPr>
-        <p:txBody>
-          <a:bodyPr wrap="square" anchor="t">
-            <a:noAutofit/>
-          </a:bodyPr>
-          <a:lstStyle/>
-          <a:p>
-            <a:pPr algn="l"/>
-            <a:r>
-              <a:rPr sz="900" b="0" i="0">
-                <a:solidFill>
-                  <a:srgbClr val="595959"/>
-                </a:solidFill>
-                <a:latin typeface="Arial"/>
-              </a:rPr>
-              <a:t>Industrial DevOps Now  ·  AI-Powered Product Development</a:t>
-            </a:r>
-          </a:p>
-        </p:txBody>
-      </p:sp>
-      <p:sp>
-        <p:nvSpPr>
-          <p:cNvPr id="14" name="TextBox 13"/>
-          <p:cNvSpPr txBox="1"/>
-          <p:nvPr/>
-        </p:nvSpPr>
-        <p:spPr>
-          <a:xfrm>
             <a:off x="4389120" y="6473952"/>
             <a:ext cx="3657600" cy="274320"/>
           </a:xfrm>
@@ -7845,7 +7740,7 @@
       </p:sp>
       <p:sp>
         <p:nvSpPr>
-          <p:cNvPr id="15" name="TextBox 14"/>
+          <p:cNvPr id="14" name="TextBox 13"/>
           <p:cNvSpPr txBox="1"/>
           <p:nvPr/>
         </p:nvSpPr>
@@ -8118,7 +8013,7 @@
         <p:spPr>
           <a:xfrm>
             <a:off x="640080" y="1901952"/>
-            <a:ext cx="10881360" cy="3520440"/>
+            <a:ext cx="10881360" cy="4114800"/>
           </a:xfrm>
           <a:prstGeom prst="roundRect">
             <a:avLst/>
@@ -8243,7 +8138,7 @@
         <p:spPr>
           <a:xfrm>
             <a:off x="896112" y="2523744"/>
-            <a:ext cx="10369296" cy="2743200"/>
+            <a:ext cx="10369296" cy="3337560"/>
           </a:xfrm>
           <a:prstGeom prst="rect">
             <a:avLst/>
@@ -8258,7 +8153,7 @@
           <a:p>
             <a:pPr algn="l"/>
             <a:r>
-              <a:rPr sz="1500" b="0" i="0">
+              <a:rPr sz="1600" b="0" i="0">
                 <a:solidFill>
                   <a:srgbClr val="1B1B1B"/>
                 </a:solidFill>
@@ -8270,7 +8165,7 @@
           <a:p>
             <a:pPr algn="l"/>
             <a:r>
-              <a:rPr sz="1500" b="0" i="0">
+              <a:rPr sz="1600" b="0" i="0">
                 <a:solidFill>
                   <a:srgbClr val="1B1B1B"/>
                 </a:solidFill>
@@ -8282,7 +8177,7 @@
           <a:p>
             <a:pPr algn="l"/>
             <a:r>
-              <a:rPr sz="1500" b="0" i="0">
+              <a:rPr sz="1600" b="0" i="0">
                 <a:solidFill>
                   <a:srgbClr val="1B1B1B"/>
                 </a:solidFill>
@@ -8294,7 +8189,7 @@
           <a:p>
             <a:pPr algn="l"/>
             <a:r>
-              <a:rPr sz="1500" b="0" i="0">
+              <a:rPr sz="1600" b="0" i="0">
                 <a:solidFill>
                   <a:srgbClr val="1B1B1B"/>
                 </a:solidFill>
@@ -8306,7 +8201,7 @@
           <a:p>
             <a:pPr algn="l"/>
             <a:r>
-              <a:rPr sz="1500" b="0" i="0">
+              <a:rPr sz="1600" b="0" i="0">
                 <a:solidFill>
                   <a:srgbClr val="1B1B1B"/>
                 </a:solidFill>
@@ -8318,7 +8213,7 @@
           <a:p>
             <a:pPr algn="l"/>
             <a:r>
-              <a:rPr sz="1500" b="0" i="0">
+              <a:rPr sz="1600" b="0" i="0">
                 <a:solidFill>
                   <a:srgbClr val="1B1B1B"/>
                 </a:solidFill>
@@ -8330,7 +8225,7 @@
           <a:p>
             <a:pPr algn="l"/>
             <a:r>
-              <a:rPr sz="1500" b="0" i="0">
+              <a:rPr sz="1600" b="0" i="0">
                 <a:solidFill>
                   <a:srgbClr val="1B1B1B"/>
                 </a:solidFill>
@@ -8342,7 +8237,7 @@
           <a:p>
             <a:pPr algn="l"/>
             <a:r>
-              <a:rPr sz="1500" b="0" i="0">
+              <a:rPr sz="1600" b="0" i="0">
                 <a:solidFill>
                   <a:srgbClr val="1B1B1B"/>
                 </a:solidFill>
@@ -8354,7 +8249,7 @@
           <a:p>
             <a:pPr algn="l"/>
             <a:r>
-              <a:rPr sz="1500" b="0" i="0">
+              <a:rPr sz="1600" b="0" i="0">
                 <a:solidFill>
                   <a:srgbClr val="1B1B1B"/>
                 </a:solidFill>
@@ -8367,42 +8262,7 @@
       </p:sp>
       <p:sp>
         <p:nvSpPr>
-          <p:cNvPr id="11" name="TextBox 10"/>
-          <p:cNvSpPr txBox="1"/>
-          <p:nvPr/>
-        </p:nvSpPr>
-        <p:spPr>
-          <a:xfrm>
-            <a:off x="640080" y="5541264"/>
-            <a:ext cx="10881360" cy="457200"/>
-          </a:xfrm>
-          <a:prstGeom prst="rect">
-            <a:avLst/>
-          </a:prstGeom>
-          <a:noFill/>
-        </p:spPr>
-        <p:txBody>
-          <a:bodyPr wrap="square" anchor="t">
-            <a:noAutofit/>
-          </a:bodyPr>
-          <a:lstStyle/>
-          <a:p>
-            <a:pPr algn="l"/>
-            <a:r>
-              <a:rPr sz="1400" b="1" i="1">
-                <a:solidFill>
-                  <a:srgbClr val="256E8E"/>
-                </a:solidFill>
-                <a:latin typeface="Arial"/>
-              </a:rPr>
-              <a:t>Ask the room:   Which test would you most want to pass before shipping?</a:t>
-            </a:r>
-          </a:p>
-        </p:txBody>
-      </p:sp>
-      <p:sp>
-        <p:nvSpPr>
-          <p:cNvPr id="12" name="Rectangle 11"/>
+          <p:cNvPr id="11" name="Rectangle 10"/>
           <p:cNvSpPr/>
           <p:nvPr/>
         </p:nvSpPr>
@@ -8446,47 +8306,47 @@
       </p:sp>
       <p:sp>
         <p:nvSpPr>
+          <p:cNvPr id="12" name="TextBox 11"/>
+          <p:cNvSpPr txBox="1"/>
+          <p:nvPr/>
+        </p:nvSpPr>
+        <p:spPr>
+          <a:xfrm>
+            <a:off x="640080" y="6473952"/>
+            <a:ext cx="6400800" cy="274320"/>
+          </a:xfrm>
+          <a:prstGeom prst="rect">
+            <a:avLst/>
+          </a:prstGeom>
+          <a:noFill/>
+        </p:spPr>
+        <p:txBody>
+          <a:bodyPr wrap="square" anchor="t">
+            <a:noAutofit/>
+          </a:bodyPr>
+          <a:lstStyle/>
+          <a:p>
+            <a:pPr algn="l"/>
+            <a:r>
+              <a:rPr sz="900" b="0" i="0">
+                <a:solidFill>
+                  <a:srgbClr val="595959"/>
+                </a:solidFill>
+                <a:latin typeface="Arial"/>
+              </a:rPr>
+              <a:t>Industrial DevOps Now  ·  AI-Powered Product Development</a:t>
+            </a:r>
+          </a:p>
+        </p:txBody>
+      </p:sp>
+      <p:sp>
+        <p:nvSpPr>
           <p:cNvPr id="13" name="TextBox 12"/>
           <p:cNvSpPr txBox="1"/>
           <p:nvPr/>
         </p:nvSpPr>
         <p:spPr>
           <a:xfrm>
-            <a:off x="640080" y="6473952"/>
-            <a:ext cx="6400800" cy="274320"/>
-          </a:xfrm>
-          <a:prstGeom prst="rect">
-            <a:avLst/>
-          </a:prstGeom>
-          <a:noFill/>
-        </p:spPr>
-        <p:txBody>
-          <a:bodyPr wrap="square" anchor="t">
-            <a:noAutofit/>
-          </a:bodyPr>
-          <a:lstStyle/>
-          <a:p>
-            <a:pPr algn="l"/>
-            <a:r>
-              <a:rPr sz="900" b="0" i="0">
-                <a:solidFill>
-                  <a:srgbClr val="595959"/>
-                </a:solidFill>
-                <a:latin typeface="Arial"/>
-              </a:rPr>
-              <a:t>Industrial DevOps Now  ·  AI-Powered Product Development</a:t>
-            </a:r>
-          </a:p>
-        </p:txBody>
-      </p:sp>
-      <p:sp>
-        <p:nvSpPr>
-          <p:cNvPr id="14" name="TextBox 13"/>
-          <p:cNvSpPr txBox="1"/>
-          <p:nvPr/>
-        </p:nvSpPr>
-        <p:spPr>
-          <a:xfrm>
             <a:off x="4389120" y="6473952"/>
             <a:ext cx="3657600" cy="274320"/>
           </a:xfrm>
@@ -8516,7 +8376,7 @@
       </p:sp>
       <p:sp>
         <p:nvSpPr>
-          <p:cNvPr id="15" name="TextBox 14"/>
+          <p:cNvPr id="14" name="TextBox 13"/>
           <p:cNvSpPr txBox="1"/>
           <p:nvPr/>
         </p:nvSpPr>
@@ -10188,7 +10048,7 @@
         <p:spPr>
           <a:xfrm>
             <a:off x="640080" y="1901952"/>
-            <a:ext cx="10881360" cy="3520440"/>
+            <a:ext cx="10881360" cy="4114800"/>
           </a:xfrm>
           <a:prstGeom prst="roundRect">
             <a:avLst/>
@@ -10313,7 +10173,7 @@
         <p:spPr>
           <a:xfrm>
             <a:off x="896112" y="2523744"/>
-            <a:ext cx="10369296" cy="2743200"/>
+            <a:ext cx="10369296" cy="3337560"/>
           </a:xfrm>
           <a:prstGeom prst="rect">
             <a:avLst/>
@@ -10328,7 +10188,7 @@
           <a:p>
             <a:pPr algn="l"/>
             <a:r>
-              <a:rPr sz="1500" b="0" i="0">
+              <a:rPr sz="1600" b="0" i="0">
                 <a:solidFill>
                   <a:srgbClr val="1B1B1B"/>
                 </a:solidFill>
@@ -10340,7 +10200,7 @@
           <a:p>
             <a:pPr algn="l"/>
             <a:r>
-              <a:rPr sz="1500" b="0" i="0">
+              <a:rPr sz="1600" b="0" i="0">
                 <a:solidFill>
                   <a:srgbClr val="1B1B1B"/>
                 </a:solidFill>
@@ -10352,7 +10212,7 @@
           <a:p>
             <a:pPr algn="l"/>
             <a:r>
-              <a:rPr sz="1500" b="0" i="0">
+              <a:rPr sz="1600" b="0" i="0">
                 <a:solidFill>
                   <a:srgbClr val="1B1B1B"/>
                 </a:solidFill>
@@ -10364,7 +10224,7 @@
           <a:p>
             <a:pPr algn="l"/>
             <a:r>
-              <a:rPr sz="1500" b="0" i="0">
+              <a:rPr sz="1600" b="0" i="0">
                 <a:solidFill>
                   <a:srgbClr val="1B1B1B"/>
                 </a:solidFill>
@@ -10376,7 +10236,7 @@
           <a:p>
             <a:pPr algn="l"/>
             <a:r>
-              <a:rPr sz="1500" b="0" i="0">
+              <a:rPr sz="1600" b="0" i="0">
                 <a:solidFill>
                   <a:srgbClr val="1B1B1B"/>
                 </a:solidFill>
@@ -10388,7 +10248,7 @@
           <a:p>
             <a:pPr algn="l"/>
             <a:r>
-              <a:rPr sz="1500" b="0" i="0">
+              <a:rPr sz="1600" b="0" i="0">
                 <a:solidFill>
                   <a:srgbClr val="1B1B1B"/>
                 </a:solidFill>
@@ -10400,7 +10260,7 @@
           <a:p>
             <a:pPr algn="l"/>
             <a:r>
-              <a:rPr sz="1500" b="0" i="0">
+              <a:rPr sz="1600" b="0" i="0">
                 <a:solidFill>
                   <a:srgbClr val="1B1B1B"/>
                 </a:solidFill>
@@ -10412,7 +10272,7 @@
           <a:p>
             <a:pPr algn="l"/>
             <a:r>
-              <a:rPr sz="1500" b="0" i="0">
+              <a:rPr sz="1600" b="0" i="0">
                 <a:solidFill>
                   <a:srgbClr val="1B1B1B"/>
                 </a:solidFill>
@@ -10425,42 +10285,7 @@
       </p:sp>
       <p:sp>
         <p:nvSpPr>
-          <p:cNvPr id="11" name="TextBox 10"/>
-          <p:cNvSpPr txBox="1"/>
-          <p:nvPr/>
-        </p:nvSpPr>
-        <p:spPr>
-          <a:xfrm>
-            <a:off x="640080" y="5541264"/>
-            <a:ext cx="10881360" cy="457200"/>
-          </a:xfrm>
-          <a:prstGeom prst="rect">
-            <a:avLst/>
-          </a:prstGeom>
-          <a:noFill/>
-        </p:spPr>
-        <p:txBody>
-          <a:bodyPr wrap="square" anchor="t">
-            <a:noAutofit/>
-          </a:bodyPr>
-          <a:lstStyle/>
-          <a:p>
-            <a:pPr algn="l"/>
-            <a:r>
-              <a:rPr sz="1400" b="1" i="1">
-                <a:solidFill>
-                  <a:srgbClr val="256E8E"/>
-                </a:solidFill>
-                <a:latin typeface="Arial"/>
-              </a:rPr>
-              <a:t>Ask the room:   How many teams would this normally take?</a:t>
-            </a:r>
-          </a:p>
-        </p:txBody>
-      </p:sp>
-      <p:sp>
-        <p:nvSpPr>
-          <p:cNvPr id="12" name="Rectangle 11"/>
+          <p:cNvPr id="11" name="Rectangle 10"/>
           <p:cNvSpPr/>
           <p:nvPr/>
         </p:nvSpPr>
@@ -10504,47 +10329,47 @@
       </p:sp>
       <p:sp>
         <p:nvSpPr>
+          <p:cNvPr id="12" name="TextBox 11"/>
+          <p:cNvSpPr txBox="1"/>
+          <p:nvPr/>
+        </p:nvSpPr>
+        <p:spPr>
+          <a:xfrm>
+            <a:off x="640080" y="6473952"/>
+            <a:ext cx="6400800" cy="274320"/>
+          </a:xfrm>
+          <a:prstGeom prst="rect">
+            <a:avLst/>
+          </a:prstGeom>
+          <a:noFill/>
+        </p:spPr>
+        <p:txBody>
+          <a:bodyPr wrap="square" anchor="t">
+            <a:noAutofit/>
+          </a:bodyPr>
+          <a:lstStyle/>
+          <a:p>
+            <a:pPr algn="l"/>
+            <a:r>
+              <a:rPr sz="900" b="0" i="0">
+                <a:solidFill>
+                  <a:srgbClr val="595959"/>
+                </a:solidFill>
+                <a:latin typeface="Arial"/>
+              </a:rPr>
+              <a:t>Industrial DevOps Now  ·  AI-Powered Product Development</a:t>
+            </a:r>
+          </a:p>
+        </p:txBody>
+      </p:sp>
+      <p:sp>
+        <p:nvSpPr>
           <p:cNvPr id="13" name="TextBox 12"/>
           <p:cNvSpPr txBox="1"/>
           <p:nvPr/>
         </p:nvSpPr>
         <p:spPr>
           <a:xfrm>
-            <a:off x="640080" y="6473952"/>
-            <a:ext cx="6400800" cy="274320"/>
-          </a:xfrm>
-          <a:prstGeom prst="rect">
-            <a:avLst/>
-          </a:prstGeom>
-          <a:noFill/>
-        </p:spPr>
-        <p:txBody>
-          <a:bodyPr wrap="square" anchor="t">
-            <a:noAutofit/>
-          </a:bodyPr>
-          <a:lstStyle/>
-          <a:p>
-            <a:pPr algn="l"/>
-            <a:r>
-              <a:rPr sz="900" b="0" i="0">
-                <a:solidFill>
-                  <a:srgbClr val="595959"/>
-                </a:solidFill>
-                <a:latin typeface="Arial"/>
-              </a:rPr>
-              <a:t>Industrial DevOps Now  ·  AI-Powered Product Development</a:t>
-            </a:r>
-          </a:p>
-        </p:txBody>
-      </p:sp>
-      <p:sp>
-        <p:nvSpPr>
-          <p:cNvPr id="14" name="TextBox 13"/>
-          <p:cNvSpPr txBox="1"/>
-          <p:nvPr/>
-        </p:nvSpPr>
-        <p:spPr>
-          <a:xfrm>
             <a:off x="4389120" y="6473952"/>
             <a:ext cx="3657600" cy="274320"/>
           </a:xfrm>
@@ -10574,7 +10399,7 @@
       </p:sp>
       <p:sp>
         <p:nvSpPr>
-          <p:cNvPr id="15" name="TextBox 14"/>
+          <p:cNvPr id="14" name="TextBox 13"/>
           <p:cNvSpPr txBox="1"/>
           <p:nvPr/>
         </p:nvSpPr>
